--- a/DDCA PPT.pptx
+++ b/DDCA PPT.pptx
@@ -23,7 +23,7 @@
   <p:notesSz cx="6858000" cy="12192000"/>
   <p:embeddedFontLst>
     <p:embeddedFont>
-      <p:font typeface="Open Sans" panose="020B0606030504020204" pitchFamily="34" charset="0"/>
+      <p:font typeface="Open Sans" panose="020F0502020204030204" pitchFamily="34" charset="0"/>
       <p:regular r:id="rId13"/>
     </p:embeddedFont>
     <p:embeddedFont>
@@ -19106,36 +19106,6 @@
           </a:p>
         </p:txBody>
       </p:sp>
-      <p:pic>
-        <p:nvPicPr>
-          <p:cNvPr id="22" name="Picture 21">
-            <a:extLst>
-              <a:ext uri="{FF2B5EF4-FFF2-40B4-BE49-F238E27FC236}">
-                <a16:creationId xmlns:a16="http://schemas.microsoft.com/office/drawing/2014/main" id="{20E5CD27-EB02-29F0-F173-49EE627A6888}"/>
-              </a:ext>
-            </a:extLst>
-          </p:cNvPr>
-          <p:cNvPicPr>
-            <a:picLocks noChangeAspect="1"/>
-          </p:cNvPicPr>
-          <p:nvPr/>
-        </p:nvPicPr>
-        <p:blipFill>
-          <a:blip r:embed="rId5"/>
-          <a:stretch>
-            <a:fillRect/>
-          </a:stretch>
-        </p:blipFill>
-        <p:spPr>
-          <a:xfrm>
-            <a:off x="1298195" y="4360038"/>
-            <a:ext cx="3692905" cy="2243200"/>
-          </a:xfrm>
-          <a:prstGeom prst="rect">
-            <a:avLst/>
-          </a:prstGeom>
-        </p:spPr>
-      </p:pic>
     </p:spTree>
   </p:cSld>
   <p:clrMapOvr>

--- a/DDCA PPT.pptx
+++ b/DDCA PPT.pptx
@@ -1,12 +1,9 @@
 
 <file path=ppt/presentation.xml><?xml version="1.0" encoding="utf-8"?>
-<p:presentation xmlns:a="http://schemas.openxmlformats.org/drawingml/2006/main" xmlns:r="http://schemas.openxmlformats.org/officeDocument/2006/relationships" xmlns:p="http://schemas.openxmlformats.org/presentationml/2006/main" embedTrueTypeFonts="1" saveSubsetFonts="1" autoCompressPictures="0">
+<p:presentation xmlns:a="http://schemas.openxmlformats.org/drawingml/2006/main" xmlns:r="http://schemas.openxmlformats.org/officeDocument/2006/relationships" xmlns:p="http://schemas.openxmlformats.org/presentationml/2006/main" saveSubsetFonts="true" autoCompressPictures="0" embedTrueTypeFonts="true">
   <p:sldMasterIdLst>
     <p:sldMasterId id="2147483648" r:id="rId1"/>
   </p:sldMasterIdLst>
-  <p:notesMasterIdLst>
-    <p:notesMasterId r:id="rId12"/>
-  </p:notesMasterIdLst>
   <p:sldIdLst>
     <p:sldId id="256" r:id="rId2"/>
     <p:sldId id="257" r:id="rId3"/>
@@ -19,20 +16,23 @@
     <p:sldId id="264" r:id="rId10"/>
     <p:sldId id="265" r:id="rId11"/>
   </p:sldIdLst>
-  <p:sldSz cx="12192000" cy="6858000"/>
-  <p:notesSz cx="6858000" cy="12192000"/>
+  <p:notesMasterIdLst>
+    <p:notesMasterId r:id="rId12"/>
+  </p:notesMasterIdLst>
+  <p:sldSz cx="12191695" cy="6858000"/>
+  <p:notesSz cx="6858000" cy="12191695"/>
   <p:embeddedFontLst>
     <p:embeddedFont>
-      <p:font typeface="Open Sans" panose="020F0502020204030204" pitchFamily="34" charset="0"/>
-      <p:regular r:id="rId13"/>
+      <p:font typeface="Open Sans Bold"/>
+      <p:regular r:id="rId201314"/>
     </p:embeddedFont>
     <p:embeddedFont>
-      <p:font typeface="Open Sans Bold" panose="020B0604020202020204" charset="0"/>
-      <p:regular r:id="rId14"/>
+      <p:font typeface="Open Sans"/>
+      <p:regular r:id="rId201315"/>
     </p:embeddedFont>
     <p:embeddedFont>
-      <p:font typeface="Unbounded Bold" panose="020B0604020202020204" charset="0"/>
-      <p:regular r:id="rId15"/>
+      <p:font typeface="Unbounded Bold"/>
+      <p:regular r:id="rId201316"/>
     </p:embeddedFont>
   </p:embeddedFontLst>
   <p:defaultTextStyle>
@@ -127,11 +127,6 @@
       </a:defRPr>
     </a:lvl9pPr>
   </p:defaultTextStyle>
-  <p:extLst>
-    <p:ext uri="{EFAFB233-063F-42B5-8137-9DF3F51BA10A}">
-      <p15:sldGuideLst xmlns:p15="http://schemas.microsoft.com/office/powerpoint/2012/main"/>
-    </p:ext>
-  </p:extLst>
 </p:presentation>
 </file>
 
@@ -157,10 +152,234 @@
           <a:chExt cx="0" cy="0"/>
         </a:xfrm>
       </p:grpSpPr>
+      <p:sp>
+        <p:nvSpPr>
+          <p:cNvPr id="2" name="Header Placeholder 1"/>
+          <p:cNvSpPr>
+            <a:spLocks noGrp="1"/>
+          </p:cNvSpPr>
+          <p:nvPr>
+            <p:ph type="hdr" sz="quarter"/>
+          </p:nvPr>
+        </p:nvSpPr>
+        <p:spPr>
+          <a:xfrm>
+            <a:off x="0" y="0"/>
+            <a:ext cx="2971800" cy="458788"/>
+          </a:xfrm>
+          <a:prstGeom prst="rect">
+            <a:avLst/>
+          </a:prstGeom>
+        </p:spPr>
+        <p:txBody>
+          <a:bodyPr vert="horz" lIns="91440" tIns="45720" rIns="91440" bIns="45720" rtlCol="0"/>
+          <a:lstStyle>
+            <a:lvl1pPr algn="l">
+              <a:defRPr sz="1200"/>
+            </a:lvl1pPr>
+          </a:lstStyle>
+          <a:p>
+            <a:endParaRPr lang="en-US"/>
+          </a:p>
+        </p:txBody>
+      </p:sp>
+      <p:sp>
+        <p:nvSpPr>
+          <p:cNvPr id="3" name="Date Placeholder 2"/>
+          <p:cNvSpPr>
+            <a:spLocks noGrp="1"/>
+          </p:cNvSpPr>
+          <p:nvPr>
+            <p:ph type="dt" idx="1"/>
+          </p:nvPr>
+        </p:nvSpPr>
+        <p:spPr>
+          <a:xfrm>
+            <a:off x="3884613" y="0"/>
+            <a:ext cx="2971800" cy="458788"/>
+          </a:xfrm>
+          <a:prstGeom prst="rect">
+            <a:avLst/>
+          </a:prstGeom>
+        </p:spPr>
+        <p:txBody>
+          <a:bodyPr vert="horz" lIns="91440" tIns="45720" rIns="91440" bIns="45720" rtlCol="0"/>
+          <a:lstStyle>
+            <a:lvl1pPr algn="r">
+              <a:defRPr sz="1200"/>
+            </a:lvl1pPr>
+          </a:lstStyle>
+          <a:p>
+            <a:fld id="{5282F153-3F37-0F45-9E97-73ACFA13230C}" type="datetimeFigureOut">
+              <a:rPr lang="en-US"/>
+              <a:t>7/23/19</a:t>
+            </a:fld>
+            <a:endParaRPr lang="en-US"/>
+          </a:p>
+        </p:txBody>
+      </p:sp>
+      <p:sp>
+        <p:nvSpPr>
+          <p:cNvPr id="4" name="Slide Image Placeholder 3"/>
+          <p:cNvSpPr>
+            <a:spLocks noGrp="1" noRot="1" noChangeAspect="1"/>
+          </p:cNvSpPr>
+          <p:nvPr>
+            <p:ph type="sldImg" idx="2"/>
+          </p:nvPr>
+        </p:nvSpPr>
+        <p:spPr>
+          <a:xfrm>
+            <a:off x="685800" y="1143000"/>
+            <a:ext cx="5486400" cy="3086100"/>
+          </a:xfrm>
+          <a:prstGeom prst="rect">
+            <a:avLst/>
+          </a:prstGeom>
+          <a:noFill/>
+          <a:ln w="12700">
+            <a:solidFill>
+              <a:prstClr val="black"/>
+            </a:solidFill>
+          </a:ln>
+        </p:spPr>
+        <p:txBody>
+          <a:bodyPr vert="horz" lIns="91440" tIns="45720" rIns="91440" bIns="45720" rtlCol="0" anchor="ctr"/>
+          <a:lstStyle/>
+          <a:p>
+            <a:endParaRPr lang="en-US"/>
+          </a:p>
+        </p:txBody>
+      </p:sp>
+      <p:sp>
+        <p:nvSpPr>
+          <p:cNvPr id="5" name="Notes Placeholder 4"/>
+          <p:cNvSpPr>
+            <a:spLocks noGrp="1"/>
+          </p:cNvSpPr>
+          <p:nvPr>
+            <p:ph type="body" sz="quarter" idx="3"/>
+          </p:nvPr>
+        </p:nvSpPr>
+        <p:spPr>
+          <a:xfrm>
+            <a:off x="685800" y="4400550"/>
+            <a:ext cx="5486400" cy="3600450"/>
+          </a:xfrm>
+          <a:prstGeom prst="rect">
+            <a:avLst/>
+          </a:prstGeom>
+        </p:spPr>
+        <p:txBody>
+          <a:bodyPr vert="horz" lIns="91440" tIns="45720" rIns="91440" bIns="45720" rtlCol="0"/>
+          <a:lstStyle/>
+          <a:p>
+            <a:pPr lvl="0"/>
+            <a:r>
+              <a:rPr lang="en-US"/>
+              <a:t>Click to edit Master text styles</a:t>
+            </a:r>
+          </a:p>
+          <a:p>
+            <a:pPr lvl="1"/>
+            <a:r>
+              <a:rPr lang="en-US"/>
+              <a:t>Second level</a:t>
+            </a:r>
+          </a:p>
+          <a:p>
+            <a:pPr lvl="2"/>
+            <a:r>
+              <a:rPr lang="en-US"/>
+              <a:t>Third level</a:t>
+            </a:r>
+          </a:p>
+          <a:p>
+            <a:pPr lvl="3"/>
+            <a:r>
+              <a:rPr lang="en-US"/>
+              <a:t>Fourth level</a:t>
+            </a:r>
+          </a:p>
+          <a:p>
+            <a:pPr lvl="4"/>
+            <a:r>
+              <a:rPr lang="en-US"/>
+              <a:t>Fifth level</a:t>
+            </a:r>
+          </a:p>
+        </p:txBody>
+      </p:sp>
+      <p:sp>
+        <p:nvSpPr>
+          <p:cNvPr id="6" name="Footer Placeholder 5"/>
+          <p:cNvSpPr>
+            <a:spLocks noGrp="1"/>
+          </p:cNvSpPr>
+          <p:nvPr>
+            <p:ph type="ftr" sz="quarter" idx="4"/>
+          </p:nvPr>
+        </p:nvSpPr>
+        <p:spPr>
+          <a:xfrm>
+            <a:off x="0" y="8685213"/>
+            <a:ext cx="2971800" cy="458787"/>
+          </a:xfrm>
+          <a:prstGeom prst="rect">
+            <a:avLst/>
+          </a:prstGeom>
+        </p:spPr>
+        <p:txBody>
+          <a:bodyPr vert="horz" lIns="91440" tIns="45720" rIns="91440" bIns="45720" rtlCol="0" anchor="b"/>
+          <a:lstStyle>
+            <a:lvl1pPr algn="l">
+              <a:defRPr sz="1200"/>
+            </a:lvl1pPr>
+          </a:lstStyle>
+          <a:p>
+            <a:endParaRPr lang="en-US"/>
+          </a:p>
+        </p:txBody>
+      </p:sp>
+      <p:sp>
+        <p:nvSpPr>
+          <p:cNvPr id="7" name="Slide Number Placeholder 6"/>
+          <p:cNvSpPr>
+            <a:spLocks noGrp="1"/>
+          </p:cNvSpPr>
+          <p:nvPr>
+            <p:ph type="sldNum" sz="quarter" idx="5"/>
+          </p:nvPr>
+        </p:nvSpPr>
+        <p:spPr>
+          <a:xfrm>
+            <a:off x="3884613" y="8685213"/>
+            <a:ext cx="2971800" cy="458787"/>
+          </a:xfrm>
+          <a:prstGeom prst="rect">
+            <a:avLst/>
+          </a:prstGeom>
+        </p:spPr>
+        <p:txBody>
+          <a:bodyPr vert="horz" lIns="91440" tIns="45720" rIns="91440" bIns="45720" rtlCol="0" anchor="b"/>
+          <a:lstStyle>
+            <a:lvl1pPr algn="r">
+              <a:defRPr sz="1200"/>
+            </a:lvl1pPr>
+          </a:lstStyle>
+          <a:p>
+            <a:fld id="{CE5E9CC1-C706-0F49-92D6-E571CC5EEA8F}" type="slidenum">
+              <a:rPr lang="en-US"/>
+              <a:t>‹#›</a:t>
+            </a:fld>
+            <a:endParaRPr lang="en-US"/>
+          </a:p>
+        </p:txBody>
+      </p:sp>
     </p:spTree>
     <p:extLst>
       <p:ext uri="{BB962C8B-B14F-4D97-AF65-F5344CB8AC3E}">
-        <p14:creationId xmlns:p14="http://schemas.microsoft.com/office/powerpoint/2010/main" val="2614416788"/>
+        <p14:creationId xmlns:p14="http://schemas.microsoft.com/office/powerpoint/2010/main" val="1024086991"/>
       </p:ext>
     </p:extLst>
   </p:cSld>
@@ -304,6 +523,10 @@
           <a:bodyPr/>
           <a:lstStyle/>
           <a:p>
+            <a:r>
+              <a:rPr lang="en-US" dirty="0"/>
+              <a:t/>
+            </a:r>
             <a:endParaRPr lang="en-US" dirty="0"/>
           </a:p>
         </p:txBody>
@@ -388,6 +611,10 @@
           <a:bodyPr/>
           <a:lstStyle/>
           <a:p>
+            <a:r>
+              <a:rPr lang="en-US" dirty="0"/>
+              <a:t/>
+            </a:r>
             <a:endParaRPr lang="en-US" dirty="0"/>
           </a:p>
         </p:txBody>
@@ -472,6 +699,10 @@
           <a:bodyPr/>
           <a:lstStyle/>
           <a:p>
+            <a:r>
+              <a:rPr lang="en-US" dirty="0"/>
+              <a:t/>
+            </a:r>
             <a:endParaRPr lang="en-US" dirty="0"/>
           </a:p>
         </p:txBody>
@@ -556,6 +787,10 @@
           <a:bodyPr/>
           <a:lstStyle/>
           <a:p>
+            <a:r>
+              <a:rPr lang="en-US" dirty="0"/>
+              <a:t/>
+            </a:r>
             <a:endParaRPr lang="en-US" dirty="0"/>
           </a:p>
         </p:txBody>
@@ -640,6 +875,10 @@
           <a:bodyPr/>
           <a:lstStyle/>
           <a:p>
+            <a:r>
+              <a:rPr lang="en-US" dirty="0"/>
+              <a:t/>
+            </a:r>
             <a:endParaRPr lang="en-US" dirty="0"/>
           </a:p>
         </p:txBody>
@@ -724,6 +963,10 @@
           <a:bodyPr/>
           <a:lstStyle/>
           <a:p>
+            <a:r>
+              <a:rPr lang="en-US" dirty="0"/>
+              <a:t/>
+            </a:r>
             <a:endParaRPr lang="en-US" dirty="0"/>
           </a:p>
         </p:txBody>
@@ -808,6 +1051,10 @@
           <a:bodyPr/>
           <a:lstStyle/>
           <a:p>
+            <a:r>
+              <a:rPr lang="en-US" dirty="0"/>
+              <a:t/>
+            </a:r>
             <a:endParaRPr lang="en-US" dirty="0"/>
           </a:p>
         </p:txBody>
@@ -892,6 +1139,10 @@
           <a:bodyPr/>
           <a:lstStyle/>
           <a:p>
+            <a:r>
+              <a:rPr lang="en-US" dirty="0"/>
+              <a:t/>
+            </a:r>
             <a:endParaRPr lang="en-US" dirty="0"/>
           </a:p>
         </p:txBody>
@@ -976,6 +1227,10 @@
           <a:bodyPr/>
           <a:lstStyle/>
           <a:p>
+            <a:r>
+              <a:rPr lang="en-US" dirty="0"/>
+              <a:t/>
+            </a:r>
             <a:endParaRPr lang="en-US" dirty="0"/>
           </a:p>
         </p:txBody>
@@ -1060,6 +1315,10 @@
           <a:bodyPr/>
           <a:lstStyle/>
           <a:p>
+            <a:r>
+              <a:rPr lang="en-US" dirty="0"/>
+              <a:t/>
+            </a:r>
             <a:endParaRPr lang="en-US" dirty="0"/>
           </a:p>
         </p:txBody>
@@ -1190,7 +1449,7 @@
       <p:pic>
         <p:nvPicPr>
           <p:cNvPr id="4" name="Image 0" descr="preencoded.png">
-            <a:hlinkClick r:id="rId2"/>
+            <a:hlinkClick r:id="rId2" tooltip=""/>
           </p:cNvPr>
           <p:cNvPicPr>
             <a:picLocks noChangeAspect="1"/>
@@ -1198,7 +1457,7 @@
           <p:nvPr/>
         </p:nvPicPr>
         <p:blipFill>
-          <a:blip r:embed="rId3"/>
+          <a:blip r:embed="rId1"/>
           <a:stretch>
             <a:fillRect/>
           </a:stretch>
@@ -1224,11 +1483,6 @@
 <file path=ppt/slideMasters/slideMaster1.xml><?xml version="1.0" encoding="utf-8"?>
 <p:sldMaster xmlns:a="http://schemas.openxmlformats.org/drawingml/2006/main" xmlns:r="http://schemas.openxmlformats.org/officeDocument/2006/relationships" xmlns:p="http://schemas.openxmlformats.org/presentationml/2006/main">
   <p:cSld>
-    <p:bg>
-      <p:bgRef idx="1001">
-        <a:schemeClr val="bg1"/>
-      </p:bgRef>
-    </p:bg>
     <p:spTree>
       <p:nvGrpSpPr>
         <p:cNvPr id="1" name=""/>
@@ -1542,7 +1796,7 @@
           <a:bodyPr wrap="none" lIns="0" tIns="0" rIns="0" bIns="0" rtlCol="0" anchor="t"/>
           <a:lstStyle/>
           <a:p>
-            <a:pPr marL="0" indent="0" algn="ctr">
+            <a:pPr algn="ctr" indent="0" marL="0">
               <a:lnSpc>
                 <a:spcPct val="104000"/>
               </a:lnSpc>
@@ -1586,7 +1840,7 @@
           </a:bodyPr>
           <a:lstStyle/>
           <a:p>
-            <a:pPr marL="0" indent="0" algn="ctr">
+            <a:pPr algn="ctr" indent="0" marL="0">
               <a:lnSpc>
                 <a:spcPct val="104000"/>
               </a:lnSpc>
@@ -1674,7 +1928,7 @@
           <a:bodyPr wrap="none" lIns="0" tIns="0" rIns="0" bIns="0" rtlCol="0" anchor="t"/>
           <a:lstStyle/>
           <a:p>
-            <a:pPr marL="0" indent="0" algn="l">
+            <a:pPr algn="l" indent="0" marL="0">
               <a:lnSpc>
                 <a:spcPct val="104000"/>
               </a:lnSpc>
@@ -1716,7 +1970,7 @@
           <a:bodyPr wrap="square" lIns="0" tIns="0" rIns="0" bIns="0" rtlCol="0" anchor="t"/>
           <a:lstStyle/>
           <a:p>
-            <a:pPr marL="0" indent="0" algn="l">
+            <a:pPr algn="l" indent="0" marL="0">
               <a:lnSpc>
                 <a:spcPct val="133000"/>
               </a:lnSpc>
@@ -1736,6 +1990,15 @@
               </a:rPr>
               <a:t>Student Name(s):</a:t>
             </a:r>
+            <a:pPr algn="l" indent="0" marL="0">
+              <a:lnSpc>
+                <a:spcPct val="133000"/>
+              </a:lnSpc>
+              <a:spcAft>
+                <a:spcPts val="1150"/>
+              </a:spcAft>
+              <a:buNone/>
+            </a:pPr>
             <a:r>
               <a:rPr lang="en-US" sz="1300" dirty="0">
                 <a:solidFill>
@@ -1750,7 +2013,7 @@
             <a:endParaRPr lang="en-US" sz="1300" dirty="0"/>
           </a:p>
           <a:p>
-            <a:pPr marL="0" indent="0" algn="l">
+            <a:pPr algn="l" indent="0" marL="0">
               <a:lnSpc>
                 <a:spcPct val="133000"/>
               </a:lnSpc>
@@ -1770,7 +2033,7 @@
             <a:endParaRPr lang="en-US" sz="1300" dirty="0"/>
           </a:p>
           <a:p>
-            <a:pPr marL="0" indent="0" algn="l">
+            <a:pPr algn="l" indent="0" marL="0">
               <a:lnSpc>
                 <a:spcPct val="133000"/>
               </a:lnSpc>
@@ -1790,7 +2053,7 @@
             <a:endParaRPr lang="en-US" sz="1300" dirty="0"/>
           </a:p>
           <a:p>
-            <a:pPr marL="0" indent="0" algn="l">
+            <a:pPr algn="l" indent="0" marL="0">
               <a:lnSpc>
                 <a:spcPct val="133000"/>
               </a:lnSpc>
@@ -1810,7 +2073,7 @@
             <a:endParaRPr lang="en-US" sz="1300" dirty="0"/>
           </a:p>
           <a:p>
-            <a:pPr marL="0" indent="0" algn="l">
+            <a:pPr algn="l" indent="0" marL="0">
               <a:lnSpc>
                 <a:spcPct val="133000"/>
               </a:lnSpc>
@@ -1833,7 +2096,7 @@
             <a:endParaRPr lang="en-US" sz="1300" dirty="0"/>
           </a:p>
           <a:p>
-            <a:pPr marL="0" indent="0" algn="l">
+            <a:pPr algn="l" indent="0" marL="0">
               <a:lnSpc>
                 <a:spcPct val="133000"/>
               </a:lnSpc>
@@ -1850,6 +2113,12 @@
               </a:rPr>
               <a:t>Guide / Supervisor:</a:t>
             </a:r>
+            <a:pPr algn="l" indent="0" marL="0">
+              <a:lnSpc>
+                <a:spcPct val="133000"/>
+              </a:lnSpc>
+              <a:buNone/>
+            </a:pPr>
             <a:r>
               <a:rPr lang="en-US" sz="1300" dirty="0">
                 <a:solidFill>
@@ -1886,7 +2155,7 @@
           <a:bodyPr wrap="none" lIns="0" tIns="0" rIns="0" bIns="0" rtlCol="0" anchor="t"/>
           <a:lstStyle/>
           <a:p>
-            <a:pPr marL="0" indent="0" algn="l">
+            <a:pPr algn="l" indent="0" marL="0">
               <a:lnSpc>
                 <a:spcPct val="104000"/>
               </a:lnSpc>
@@ -1928,7 +2197,7 @@
           <a:bodyPr wrap="square" lIns="0" tIns="0" rIns="0" bIns="0" rtlCol="0" anchor="t"/>
           <a:lstStyle/>
           <a:p>
-            <a:pPr marL="0" indent="0" algn="l">
+            <a:pPr algn="l" indent="0" marL="0">
               <a:lnSpc>
                 <a:spcPct val="133000"/>
               </a:lnSpc>
@@ -1948,6 +2217,15 @@
               </a:rPr>
               <a:t>Department:</a:t>
             </a:r>
+            <a:pPr algn="l" indent="0" marL="0">
+              <a:lnSpc>
+                <a:spcPct val="133000"/>
+              </a:lnSpc>
+              <a:spcAft>
+                <a:spcPts val="1150"/>
+              </a:spcAft>
+              <a:buNone/>
+            </a:pPr>
             <a:r>
               <a:rPr lang="en-US" sz="1300" dirty="0">
                 <a:solidFill>
@@ -1962,7 +2240,7 @@
             <a:endParaRPr lang="en-US" sz="1300" dirty="0"/>
           </a:p>
           <a:p>
-            <a:pPr marL="0" indent="0" algn="l">
+            <a:pPr algn="l" indent="0" marL="0">
               <a:lnSpc>
                 <a:spcPct val="133000"/>
               </a:lnSpc>
@@ -1982,6 +2260,15 @@
               </a:rPr>
               <a:t>College / Institution:</a:t>
             </a:r>
+            <a:pPr algn="l" indent="0" marL="0">
+              <a:lnSpc>
+                <a:spcPct val="133000"/>
+              </a:lnSpc>
+              <a:spcAft>
+                <a:spcPts val="1150"/>
+              </a:spcAft>
+              <a:buNone/>
+            </a:pPr>
             <a:r>
               <a:rPr lang="en-US" sz="1300" dirty="0">
                 <a:solidFill>
@@ -1996,7 +2283,7 @@
             <a:endParaRPr lang="en-US" sz="1300" dirty="0"/>
           </a:p>
           <a:p>
-            <a:pPr marL="0" indent="0" algn="l">
+            <a:pPr algn="l" indent="0" marL="0">
               <a:lnSpc>
                 <a:spcPct val="133000"/>
               </a:lnSpc>
@@ -2013,6 +2300,12 @@
               </a:rPr>
               <a:t>Academic Year:</a:t>
             </a:r>
+            <a:pPr algn="l" indent="0" marL="0">
+              <a:lnSpc>
+                <a:spcPct val="133000"/>
+              </a:lnSpc>
+              <a:buNone/>
+            </a:pPr>
             <a:r>
               <a:rPr lang="en-US" sz="1300" dirty="0">
                 <a:solidFill>
@@ -2076,7 +2369,7 @@
           <a:bodyPr wrap="none" lIns="0" tIns="0" rIns="0" bIns="0" rtlCol="0" anchor="t"/>
           <a:lstStyle/>
           <a:p>
-            <a:pPr marL="0" indent="0" algn="l">
+            <a:pPr algn="l" indent="0" marL="0">
               <a:lnSpc>
                 <a:spcPct val="104000"/>
               </a:lnSpc>
@@ -2118,7 +2411,7 @@
           <a:bodyPr wrap="none" lIns="0" tIns="0" rIns="0" bIns="0" rtlCol="0" anchor="t"/>
           <a:lstStyle/>
           <a:p>
-            <a:pPr marL="0" indent="0" algn="l">
+            <a:pPr algn="l" indent="0" marL="0">
               <a:lnSpc>
                 <a:spcPct val="133000"/>
               </a:lnSpc>
@@ -2187,7 +2480,7 @@
           <a:bodyPr wrap="none" lIns="0" tIns="0" rIns="0" bIns="0" rtlCol="0" anchor="t"/>
           <a:lstStyle/>
           <a:p>
-            <a:pPr marL="0" indent="0" algn="l">
+            <a:pPr algn="l" indent="0" marL="0">
               <a:lnSpc>
                 <a:spcPct val="104000"/>
               </a:lnSpc>
@@ -2229,7 +2522,7 @@
           <a:bodyPr wrap="none" lIns="0" tIns="0" rIns="0" bIns="0" rtlCol="0" anchor="t"/>
           <a:lstStyle/>
           <a:p>
-            <a:pPr marL="0" indent="0" algn="l">
+            <a:pPr algn="l" indent="0" marL="0">
               <a:lnSpc>
                 <a:spcPct val="133000"/>
               </a:lnSpc>
@@ -2298,7 +2591,7 @@
           <a:bodyPr wrap="none" lIns="0" tIns="0" rIns="0" bIns="0" rtlCol="0" anchor="t"/>
           <a:lstStyle/>
           <a:p>
-            <a:pPr marL="0" indent="0" algn="l">
+            <a:pPr algn="l" indent="0" marL="0">
               <a:lnSpc>
                 <a:spcPct val="104000"/>
               </a:lnSpc>
@@ -2340,7 +2633,7 @@
           <a:bodyPr wrap="none" lIns="0" tIns="0" rIns="0" bIns="0" rtlCol="0" anchor="t"/>
           <a:lstStyle/>
           <a:p>
-            <a:pPr marL="0" indent="0" algn="l">
+            <a:pPr algn="l" indent="0" marL="0">
               <a:lnSpc>
                 <a:spcPct val="133000"/>
               </a:lnSpc>
@@ -2409,7 +2702,7 @@
           <a:bodyPr wrap="none" lIns="0" tIns="0" rIns="0" bIns="0" rtlCol="0" anchor="t"/>
           <a:lstStyle/>
           <a:p>
-            <a:pPr marL="0" indent="0" algn="l">
+            <a:pPr algn="l" indent="0" marL="0">
               <a:lnSpc>
                 <a:spcPct val="104000"/>
               </a:lnSpc>
@@ -2451,7 +2744,7 @@
           <a:bodyPr wrap="none" lIns="0" tIns="0" rIns="0" bIns="0" rtlCol="0" anchor="t"/>
           <a:lstStyle/>
           <a:p>
-            <a:pPr marL="0" indent="0" algn="l">
+            <a:pPr algn="l" indent="0" marL="0">
               <a:lnSpc>
                 <a:spcPct val="133000"/>
               </a:lnSpc>
@@ -2540,7 +2833,7 @@
           <a:bodyPr wrap="none" lIns="0" tIns="0" rIns="0" bIns="0" rtlCol="0" anchor="t"/>
           <a:lstStyle/>
           <a:p>
-            <a:pPr marL="0" indent="0" algn="l">
+            <a:pPr algn="l" indent="0" marL="0">
               <a:lnSpc>
                 <a:spcPct val="96000"/>
               </a:lnSpc>
@@ -2582,7 +2875,7 @@
           <a:bodyPr wrap="none" lIns="0" tIns="0" rIns="0" bIns="0" rtlCol="0" anchor="t"/>
           <a:lstStyle/>
           <a:p>
-            <a:pPr marL="0" indent="0" algn="l">
+            <a:pPr algn="l" indent="0" marL="0">
               <a:lnSpc>
                 <a:spcPct val="104000"/>
               </a:lnSpc>
@@ -2646,7 +2939,7 @@
           <a:bodyPr wrap="none" lIns="0" tIns="0" rIns="0" bIns="0" rtlCol="0" anchor="t"/>
           <a:lstStyle/>
           <a:p>
-            <a:pPr marL="0" indent="0" algn="l">
+            <a:pPr algn="l" indent="0" marL="0">
               <a:lnSpc>
                 <a:spcPct val="104000"/>
               </a:lnSpc>
@@ -2690,7 +2983,7 @@
           </a:bodyPr>
           <a:lstStyle/>
           <a:p>
-            <a:pPr marL="0" indent="0" algn="l">
+            <a:pPr algn="l" indent="0" marL="0">
               <a:lnSpc>
                 <a:spcPct val="127000"/>
               </a:lnSpc>
@@ -2707,6 +3000,12 @@
               </a:rPr>
               <a:t>A complete 4-bit binary arithmetic calculator was successfully </a:t>
             </a:r>
+            <a:pPr algn="l" indent="0" marL="0">
+              <a:lnSpc>
+                <a:spcPct val="127000"/>
+              </a:lnSpc>
+              <a:buNone/>
+            </a:pPr>
             <a:r>
               <a:rPr lang="en-US" sz="1150" b="1" dirty="0">
                 <a:solidFill>
@@ -2718,6 +3017,12 @@
               </a:rPr>
               <a:t>designed, implemented, and simulated</a:t>
             </a:r>
+            <a:pPr algn="l" indent="0" marL="0">
+              <a:lnSpc>
+                <a:spcPct val="127000"/>
+              </a:lnSpc>
+              <a:buNone/>
+            </a:pPr>
             <a:r>
               <a:rPr lang="en-US" sz="1150" dirty="0">
                 <a:solidFill>
@@ -2756,7 +3061,7 @@
           </a:bodyPr>
           <a:lstStyle/>
           <a:p>
-            <a:pPr marL="233680" indent="-233680" algn="l">
+            <a:pPr algn="l" marL="233680" indent="-233680">
               <a:lnSpc>
                 <a:spcPct val="127000"/>
               </a:lnSpc>
@@ -2777,7 +3082,7 @@
             <a:endParaRPr lang="en-US" sz="1150" dirty="0"/>
           </a:p>
           <a:p>
-            <a:pPr marL="233680" indent="-233680" algn="l">
+            <a:pPr algn="l" marL="233680" indent="-233680">
               <a:lnSpc>
                 <a:spcPct val="127000"/>
               </a:lnSpc>
@@ -2798,7 +3103,7 @@
             <a:endParaRPr lang="en-US" sz="1150" dirty="0"/>
           </a:p>
           <a:p>
-            <a:pPr marL="233680" indent="-233680" algn="l">
+            <a:pPr algn="l" marL="233680" indent="-233680">
               <a:lnSpc>
                 <a:spcPct val="127000"/>
               </a:lnSpc>
@@ -2819,7 +3124,7 @@
             <a:endParaRPr lang="en-US" sz="1150" dirty="0"/>
           </a:p>
           <a:p>
-            <a:pPr marL="233680" indent="-233680" algn="l">
+            <a:pPr algn="l" marL="233680" indent="-233680">
               <a:lnSpc>
                 <a:spcPct val="127000"/>
               </a:lnSpc>
@@ -2862,7 +3167,7 @@
           <a:bodyPr wrap="none" lIns="0" tIns="0" rIns="0" bIns="0" rtlCol="0" anchor="t"/>
           <a:lstStyle/>
           <a:p>
-            <a:pPr marL="0" indent="0" algn="l">
+            <a:pPr algn="l" indent="0" marL="0">
               <a:lnSpc>
                 <a:spcPct val="104000"/>
               </a:lnSpc>
@@ -2906,7 +3211,7 @@
           </a:bodyPr>
           <a:lstStyle/>
           <a:p>
-            <a:pPr marL="0" indent="0" algn="l">
+            <a:pPr algn="l" indent="0" marL="0">
               <a:lnSpc>
                 <a:spcPct val="127000"/>
               </a:lnSpc>
@@ -2923,6 +3228,12 @@
               </a:rPr>
               <a:t>The project concretely demonstrated how </a:t>
             </a:r>
+            <a:pPr algn="l" indent="0" marL="0">
+              <a:lnSpc>
+                <a:spcPct val="127000"/>
+              </a:lnSpc>
+              <a:buNone/>
+            </a:pPr>
             <a:r>
               <a:rPr lang="en-US" sz="1150" b="1" dirty="0">
                 <a:solidFill>
@@ -2934,6 +3245,12 @@
               </a:rPr>
               <a:t>complex arithmetic behavior emerges from simple Boolean logic</a:t>
             </a:r>
+            <a:pPr algn="l" indent="0" marL="0">
+              <a:lnSpc>
+                <a:spcPct val="127000"/>
+              </a:lnSpc>
+              <a:buNone/>
+            </a:pPr>
             <a:r>
               <a:rPr lang="en-US" sz="1150" dirty="0">
                 <a:solidFill>
@@ -2970,7 +3287,7 @@
           <a:bodyPr wrap="none" lIns="0" tIns="0" rIns="0" bIns="0" rtlCol="0" anchor="t"/>
           <a:lstStyle/>
           <a:p>
-            <a:pPr marL="0" indent="0" algn="l">
+            <a:pPr algn="l" indent="0" marL="0">
               <a:lnSpc>
                 <a:spcPct val="104000"/>
               </a:lnSpc>
@@ -2993,17 +3310,17 @@
       </p:sp>
       <p:pic>
         <p:nvPicPr>
-          <p:cNvPr id="12" name="Image 0" descr="preencoded.png"/>
+          <p:cNvPr id="12" name="Image 0" descr="preencoded.png">    </p:cNvPr>
           <p:cNvPicPr>
             <a:picLocks noChangeAspect="1"/>
           </p:cNvPicPr>
           <p:nvPr/>
         </p:nvPicPr>
         <p:blipFill>
-          <a:blip>
+          <a:blip r:embed="rId1">
             <a:extLst>
               <a:ext uri="{96DAC541-7B7A-43D3-8B79-37D633B846F1}">
-                <asvg:svgBlip xmlns:asvg="http://schemas.microsoft.com/office/drawing/2016/SVG/main" r:embed="rId3"/>
+                <asvg:svgBlip xmlns:asvg="http://schemas.microsoft.com/office/drawing/2016/SVG/main" r:embed="rId2"/>
               </a:ext>
             </a:extLst>
           </a:blip>
@@ -3042,7 +3359,7 @@
           <a:bodyPr wrap="none" lIns="0" tIns="0" rIns="0" bIns="0" rtlCol="0" anchor="t"/>
           <a:lstStyle/>
           <a:p>
-            <a:pPr marL="0" indent="0" algn="l">
+            <a:pPr algn="l" indent="0" marL="0">
               <a:lnSpc>
                 <a:spcPct val="104000"/>
               </a:lnSpc>
@@ -3086,7 +3403,7 @@
           </a:bodyPr>
           <a:lstStyle/>
           <a:p>
-            <a:pPr marL="0" indent="0" algn="l">
+            <a:pPr algn="l" indent="0" marL="0">
               <a:lnSpc>
                 <a:spcPct val="127000"/>
               </a:lnSpc>
@@ -3109,17 +3426,17 @@
       </p:sp>
       <p:pic>
         <p:nvPicPr>
-          <p:cNvPr id="15" name="Image 1" descr="preencoded.png"/>
+          <p:cNvPr id="15" name="Image 1" descr="preencoded.png">    </p:cNvPr>
           <p:cNvPicPr>
             <a:picLocks noChangeAspect="1"/>
           </p:cNvPicPr>
           <p:nvPr/>
         </p:nvPicPr>
         <p:blipFill>
-          <a:blip>
+          <a:blip r:embed="rId3">
             <a:extLst>
               <a:ext uri="{96DAC541-7B7A-43D3-8B79-37D633B846F1}">
-                <asvg:svgBlip xmlns:asvg="http://schemas.microsoft.com/office/drawing/2016/SVG/main" r:embed="rId3"/>
+                <asvg:svgBlip xmlns:asvg="http://schemas.microsoft.com/office/drawing/2016/SVG/main" r:embed="rId4"/>
               </a:ext>
             </a:extLst>
           </a:blip>
@@ -3158,7 +3475,7 @@
           <a:bodyPr wrap="none" lIns="0" tIns="0" rIns="0" bIns="0" rtlCol="0" anchor="t"/>
           <a:lstStyle/>
           <a:p>
-            <a:pPr marL="0" indent="0" algn="l">
+            <a:pPr algn="l" indent="0" marL="0">
               <a:lnSpc>
                 <a:spcPct val="104000"/>
               </a:lnSpc>
@@ -3202,7 +3519,7 @@
           </a:bodyPr>
           <a:lstStyle/>
           <a:p>
-            <a:pPr marL="0" indent="0" algn="l">
+            <a:pPr algn="l" indent="0" marL="0">
               <a:lnSpc>
                 <a:spcPct val="127000"/>
               </a:lnSpc>
@@ -3225,17 +3542,17 @@
       </p:sp>
       <p:pic>
         <p:nvPicPr>
-          <p:cNvPr id="18" name="Image 2" descr="preencoded.png"/>
+          <p:cNvPr id="18" name="Image 2" descr="preencoded.png">    </p:cNvPr>
           <p:cNvPicPr>
             <a:picLocks noChangeAspect="1"/>
           </p:cNvPicPr>
           <p:nvPr/>
         </p:nvPicPr>
         <p:blipFill>
-          <a:blip>
+          <a:blip r:embed="rId5">
             <a:extLst>
               <a:ext uri="{96DAC541-7B7A-43D3-8B79-37D633B846F1}">
-                <asvg:svgBlip xmlns:asvg="http://schemas.microsoft.com/office/drawing/2016/SVG/main" r:embed="rId3"/>
+                <asvg:svgBlip xmlns:asvg="http://schemas.microsoft.com/office/drawing/2016/SVG/main" r:embed="rId6"/>
               </a:ext>
             </a:extLst>
           </a:blip>
@@ -3274,7 +3591,7 @@
           <a:bodyPr wrap="none" lIns="0" tIns="0" rIns="0" bIns="0" rtlCol="0" anchor="t"/>
           <a:lstStyle/>
           <a:p>
-            <a:pPr marL="0" indent="0" algn="l">
+            <a:pPr algn="l" indent="0" marL="0">
               <a:lnSpc>
                 <a:spcPct val="104000"/>
               </a:lnSpc>
@@ -3318,7 +3635,7 @@
           </a:bodyPr>
           <a:lstStyle/>
           <a:p>
-            <a:pPr marL="0" indent="0" algn="l">
+            <a:pPr algn="l" indent="0" marL="0">
               <a:lnSpc>
                 <a:spcPct val="127000"/>
               </a:lnSpc>
@@ -3360,7 +3677,7 @@
           <a:bodyPr wrap="none" lIns="0" tIns="0" rIns="0" bIns="0" rtlCol="0" anchor="t"/>
           <a:lstStyle/>
           <a:p>
-            <a:pPr marL="0" indent="0" algn="l">
+            <a:pPr algn="l" indent="0" marL="0">
               <a:lnSpc>
                 <a:spcPct val="104000"/>
               </a:lnSpc>
@@ -3404,7 +3721,7 @@
           </a:bodyPr>
           <a:lstStyle/>
           <a:p>
-            <a:pPr marL="0" indent="0" algn="l">
+            <a:pPr algn="l" indent="0" marL="0">
               <a:lnSpc>
                 <a:spcPct val="127000"/>
               </a:lnSpc>
@@ -3421,6 +3738,12 @@
               </a:rPr>
               <a:t>The principles demonstrated in this project apply directly to </a:t>
             </a:r>
+            <a:pPr algn="l" indent="0" marL="0">
+              <a:lnSpc>
+                <a:spcPct val="127000"/>
+              </a:lnSpc>
+              <a:buNone/>
+            </a:pPr>
             <a:r>
               <a:rPr lang="en-US" sz="1150" b="1" dirty="0">
                 <a:solidFill>
@@ -3432,6 +3755,12 @@
               </a:rPr>
               <a:t>CPU ALU design, microcontroller arithmetic units, and digital signal processors</a:t>
             </a:r>
+            <a:pPr algn="l" indent="0" marL="0">
+              <a:lnSpc>
+                <a:spcPct val="127000"/>
+              </a:lnSpc>
+              <a:buNone/>
+            </a:pPr>
             <a:r>
               <a:rPr lang="en-US" sz="1150" dirty="0">
                 <a:solidFill>
@@ -3515,7 +3844,7 @@
           <a:bodyPr wrap="none" lIns="0" tIns="0" rIns="0" bIns="0" rtlCol="0" anchor="t"/>
           <a:lstStyle/>
           <a:p>
-            <a:pPr marL="0" indent="0" algn="l">
+            <a:pPr algn="l" indent="0" marL="0">
               <a:lnSpc>
                 <a:spcPct val="96000"/>
               </a:lnSpc>
@@ -3557,7 +3886,7 @@
           <a:bodyPr wrap="none" lIns="0" tIns="0" rIns="0" bIns="0" rtlCol="0" anchor="t"/>
           <a:lstStyle/>
           <a:p>
-            <a:pPr marL="0" indent="0" algn="l">
+            <a:pPr algn="l" indent="0" marL="0">
               <a:lnSpc>
                 <a:spcPct val="104000"/>
               </a:lnSpc>
@@ -3599,7 +3928,7 @@
           <a:bodyPr wrap="none" lIns="0" tIns="0" rIns="0" bIns="0" rtlCol="0" anchor="t"/>
           <a:lstStyle/>
           <a:p>
-            <a:pPr marL="0" indent="0" algn="l">
+            <a:pPr algn="l" indent="0" marL="0">
               <a:lnSpc>
                 <a:spcPct val="104000"/>
               </a:lnSpc>
@@ -3643,7 +3972,7 @@
           </a:bodyPr>
           <a:lstStyle/>
           <a:p>
-            <a:pPr marL="0" indent="0" algn="l">
+            <a:pPr algn="l" indent="0" marL="0">
               <a:lnSpc>
                 <a:spcPct val="129000"/>
               </a:lnSpc>
@@ -3660,6 +3989,12 @@
               </a:rPr>
               <a:t>All modern computing systems are founded on </a:t>
             </a:r>
+            <a:pPr algn="l" indent="0" marL="0">
+              <a:lnSpc>
+                <a:spcPct val="129000"/>
+              </a:lnSpc>
+              <a:buNone/>
+            </a:pPr>
             <a:r>
               <a:rPr lang="en-US" sz="1200" b="1" dirty="0">
                 <a:solidFill>
@@ -3671,6 +4006,12 @@
               </a:rPr>
               <a:t>digital logic design</a:t>
             </a:r>
+            <a:pPr algn="l" indent="0" marL="0">
+              <a:lnSpc>
+                <a:spcPct val="129000"/>
+              </a:lnSpc>
+              <a:buNone/>
+            </a:pPr>
             <a:r>
               <a:rPr lang="en-US" sz="1200" dirty="0">
                 <a:solidFill>
@@ -3707,7 +4048,7 @@
           <a:bodyPr wrap="none" lIns="0" tIns="0" rIns="0" bIns="0" rtlCol="0" anchor="t"/>
           <a:lstStyle/>
           <a:p>
-            <a:pPr marL="0" indent="0" algn="l">
+            <a:pPr algn="l" indent="0" marL="0">
               <a:lnSpc>
                 <a:spcPct val="104000"/>
               </a:lnSpc>
@@ -3751,7 +4092,7 @@
           </a:bodyPr>
           <a:lstStyle/>
           <a:p>
-            <a:pPr marL="0" indent="0" algn="l">
+            <a:pPr algn="l" indent="0" marL="0">
               <a:lnSpc>
                 <a:spcPct val="129000"/>
               </a:lnSpc>
@@ -3768,6 +4109,12 @@
               </a:rPr>
               <a:t>Digital systems communicate exclusively in binary. All computation — from simple addition to floating-point operations — reduces to </a:t>
             </a:r>
+            <a:pPr algn="l" indent="0" marL="0">
+              <a:lnSpc>
+                <a:spcPct val="129000"/>
+              </a:lnSpc>
+              <a:buNone/>
+            </a:pPr>
             <a:r>
               <a:rPr lang="en-US" sz="1200" b="1" dirty="0">
                 <a:solidFill>
@@ -3779,6 +4126,12 @@
               </a:rPr>
               <a:t>binary addition and subtraction</a:t>
             </a:r>
+            <a:pPr algn="l" indent="0" marL="0">
+              <a:lnSpc>
+                <a:spcPct val="129000"/>
+              </a:lnSpc>
+              <a:buNone/>
+            </a:pPr>
             <a:r>
               <a:rPr lang="en-US" sz="1200" dirty="0">
                 <a:solidFill>
@@ -3815,7 +4168,7 @@
           <a:bodyPr wrap="none" lIns="0" tIns="0" rIns="0" bIns="0" rtlCol="0" anchor="t"/>
           <a:lstStyle/>
           <a:p>
-            <a:pPr marL="0" indent="0" algn="l">
+            <a:pPr algn="l" indent="0" marL="0">
               <a:lnSpc>
                 <a:spcPct val="104000"/>
               </a:lnSpc>
@@ -3859,7 +4212,7 @@
           </a:bodyPr>
           <a:lstStyle/>
           <a:p>
-            <a:pPr marL="0" indent="0" algn="l">
+            <a:pPr algn="l" indent="0" marL="0">
               <a:lnSpc>
                 <a:spcPct val="129000"/>
               </a:lnSpc>
@@ -3903,7 +4256,7 @@
           </a:bodyPr>
           <a:lstStyle/>
           <a:p>
-            <a:pPr marL="0" indent="0" algn="l">
+            <a:pPr algn="l" indent="0" marL="0">
               <a:lnSpc>
                 <a:spcPct val="104000"/>
               </a:lnSpc>
@@ -3947,7 +4300,7 @@
           </a:bodyPr>
           <a:lstStyle/>
           <a:p>
-            <a:pPr marL="0" indent="0" algn="l">
+            <a:pPr algn="l" indent="0" marL="0">
               <a:lnSpc>
                 <a:spcPct val="129000"/>
               </a:lnSpc>
@@ -3964,6 +4317,12 @@
               </a:rPr>
               <a:t>The arithmetic logic unit (ALU) is the computational heart of every CPU. Hardware-level arithmetic circuits are the </a:t>
             </a:r>
+            <a:pPr algn="l" indent="0" marL="0">
+              <a:lnSpc>
+                <a:spcPct val="129000"/>
+              </a:lnSpc>
+              <a:buNone/>
+            </a:pPr>
             <a:r>
               <a:rPr lang="en-US" sz="1200" b="1" dirty="0">
                 <a:solidFill>
@@ -3975,6 +4334,12 @@
               </a:rPr>
               <a:t>core building blocks</a:t>
             </a:r>
+            <a:pPr algn="l" indent="0" marL="0">
+              <a:lnSpc>
+                <a:spcPct val="129000"/>
+              </a:lnSpc>
+              <a:buNone/>
+            </a:pPr>
             <a:r>
               <a:rPr lang="en-US" sz="1200" dirty="0">
                 <a:solidFill>
@@ -4014,14 +4379,14 @@
       </p:sp>
       <p:pic>
         <p:nvPicPr>
-          <p:cNvPr id="14" name="Image 0" descr="preencoded.png"/>
+          <p:cNvPr id="14" name="Image 0" descr="preencoded.png">    </p:cNvPr>
           <p:cNvPicPr>
             <a:picLocks noChangeAspect="1"/>
           </p:cNvPicPr>
           <p:nvPr/>
         </p:nvPicPr>
         <p:blipFill>
-          <a:blip r:embed="rId3"/>
+          <a:blip r:embed="rId1"/>
           <a:stretch>
             <a:fillRect/>
           </a:stretch>
@@ -4059,7 +4424,7 @@
           </a:bodyPr>
           <a:lstStyle/>
           <a:p>
-            <a:pPr marL="0" indent="0" algn="l">
+            <a:pPr algn="l" indent="0" marL="0">
               <a:lnSpc>
                 <a:spcPct val="129000"/>
               </a:lnSpc>
@@ -4101,7 +4466,7 @@
           <a:bodyPr wrap="none" lIns="0" tIns="0" rIns="0" bIns="0" rtlCol="0" anchor="t"/>
           <a:lstStyle/>
           <a:p>
-            <a:pPr marL="0" indent="0" algn="l">
+            <a:pPr algn="l" indent="0" marL="0">
               <a:lnSpc>
                 <a:spcPct val="104000"/>
               </a:lnSpc>
@@ -4145,7 +4510,7 @@
           </a:bodyPr>
           <a:lstStyle/>
           <a:p>
-            <a:pPr marL="0" indent="0" algn="l">
+            <a:pPr algn="l" indent="0" marL="0">
               <a:lnSpc>
                 <a:spcPct val="129000"/>
               </a:lnSpc>
@@ -4162,6 +4527,12 @@
               </a:rPr>
               <a:t>The power of digital design lies in </a:t>
             </a:r>
+            <a:pPr algn="l" indent="0" marL="0">
+              <a:lnSpc>
+                <a:spcPct val="129000"/>
+              </a:lnSpc>
+              <a:buNone/>
+            </a:pPr>
             <a:r>
               <a:rPr lang="en-US" sz="1200" b="1" dirty="0">
                 <a:solidFill>
@@ -4173,6 +4544,12 @@
               </a:rPr>
               <a:t>composability</a:t>
             </a:r>
+            <a:pPr algn="l" indent="0" marL="0">
+              <a:lnSpc>
+                <a:spcPct val="129000"/>
+              </a:lnSpc>
+              <a:buNone/>
+            </a:pPr>
             <a:r>
               <a:rPr lang="en-US" sz="1200" dirty="0">
                 <a:solidFill>
@@ -4256,7 +4633,7 @@
           <a:bodyPr wrap="none" lIns="0" tIns="0" rIns="0" bIns="0" rtlCol="0" anchor="t"/>
           <a:lstStyle/>
           <a:p>
-            <a:pPr marL="0" indent="0" algn="l">
+            <a:pPr algn="l" indent="0" marL="0">
               <a:lnSpc>
                 <a:spcPct val="96000"/>
               </a:lnSpc>
@@ -4298,7 +4675,7 @@
           <a:bodyPr wrap="none" lIns="0" tIns="0" rIns="0" bIns="0" rtlCol="0" anchor="t"/>
           <a:lstStyle/>
           <a:p>
-            <a:pPr marL="0" indent="0" algn="l">
+            <a:pPr algn="l" indent="0" marL="0">
               <a:lnSpc>
                 <a:spcPct val="104000"/>
               </a:lnSpc>
@@ -4321,17 +4698,17 @@
       </p:sp>
       <p:pic>
         <p:nvPicPr>
-          <p:cNvPr id="5" name="Image 0" descr="preencoded.png"/>
+          <p:cNvPr id="5" name="Image 0" descr="preencoded.png">    </p:cNvPr>
           <p:cNvPicPr>
             <a:picLocks noChangeAspect="1"/>
           </p:cNvPicPr>
           <p:nvPr/>
         </p:nvPicPr>
         <p:blipFill>
-          <a:blip>
+          <a:blip r:embed="rId1">
             <a:extLst>
               <a:ext uri="{96DAC541-7B7A-43D3-8B79-37D633B846F1}">
-                <asvg:svgBlip xmlns:asvg="http://schemas.microsoft.com/office/drawing/2016/SVG/main" r:embed="rId3"/>
+                <asvg:svgBlip xmlns:asvg="http://schemas.microsoft.com/office/drawing/2016/SVG/main" r:embed="rId2"/>
               </a:ext>
             </a:extLst>
           </a:blip>
@@ -4372,7 +4749,7 @@
           </a:bodyPr>
           <a:lstStyle/>
           <a:p>
-            <a:pPr marL="0" indent="0" algn="l">
+            <a:pPr algn="l" indent="0" marL="0">
               <a:lnSpc>
                 <a:spcPct val="104000"/>
               </a:lnSpc>
@@ -4402,7 +4779,7 @@
         <p:spPr>
           <a:xfrm>
             <a:off x="911698" y="2228453"/>
-            <a:ext cx="3101699" cy="1441847"/>
+            <a:ext cx="3101699" cy="1201539"/>
           </a:xfrm>
           <a:prstGeom prst="rect">
             <a:avLst/>
@@ -4416,7 +4793,7 @@
           </a:bodyPr>
           <a:lstStyle/>
           <a:p>
-            <a:pPr marL="0" indent="0" algn="l">
+            <a:pPr algn="l" indent="0" marL="0">
               <a:lnSpc>
                 <a:spcPct val="129000"/>
               </a:lnSpc>
@@ -4431,7 +4808,7 @@
                 <a:ea typeface="Open Sans" pitchFamily="34" charset="-122"/>
                 <a:cs typeface="Open Sans" pitchFamily="34" charset="-120"/>
               </a:rPr>
-              <a:t>Software simulation alone cannot reveal how physical circuits perform arithmetic reliably at the gate level. A hardware-level design study is required to observe actual signal propagation, timing behavior, and gate interactions.</a:t>
+              <a:t>Software simulation alone cannot fully show how arithmetic works at the logic gate level. A hardware-level circuit is needed to understand signal flow and gate interactions.</a:t>
             </a:r>
             <a:endParaRPr lang="en-US" sz="1200" dirty="0"/>
           </a:p>
@@ -4439,272 +4816,14 @@
       </p:sp>
       <p:pic>
         <p:nvPicPr>
-          <p:cNvPr id="8" name="Image 1" descr="preencoded.png"/>
+          <p:cNvPr id="8" name="Image 1" descr="preencoded.png">    </p:cNvPr>
           <p:cNvPicPr>
             <a:picLocks noChangeAspect="1"/>
           </p:cNvPicPr>
           <p:nvPr/>
         </p:nvPicPr>
         <p:blipFill>
-          <a:blip>
-            <a:extLst>
-              <a:ext uri="{96DAC541-7B7A-43D3-8B79-37D633B846F1}">
-                <asvg:svgBlip xmlns:asvg="http://schemas.microsoft.com/office/drawing/2016/SVG/main" r:embed="rId3"/>
-              </a:ext>
-            </a:extLst>
-          </a:blip>
-          <a:stretch>
-            <a:fillRect/>
-          </a:stretch>
-        </p:blipFill>
-        <p:spPr>
-          <a:xfrm>
-            <a:off x="4332774" y="1482824"/>
-            <a:ext cx="3526047" cy="2844006"/>
-          </a:xfrm>
-          <a:prstGeom prst="rect">
-            <a:avLst/>
-          </a:prstGeom>
-        </p:spPr>
-      </p:pic>
-      <p:sp>
-        <p:nvSpPr>
-          <p:cNvPr id="9" name="Text 5"/>
-          <p:cNvSpPr/>
-          <p:nvPr/>
-        </p:nvSpPr>
-        <p:spPr>
-          <a:xfrm>
-            <a:off x="4582998" y="1656854"/>
-            <a:ext cx="3101798" cy="484386"/>
-          </a:xfrm>
-          <a:prstGeom prst="rect">
-            <a:avLst/>
-          </a:prstGeom>
-          <a:noFill/>
-          <a:ln/>
-        </p:spPr>
-        <p:txBody>
-          <a:bodyPr wrap="square" lIns="0" tIns="0" rIns="0" bIns="0" rtlCol="0" anchor="t">
-            <a:normAutofit/>
-          </a:bodyPr>
-          <a:lstStyle/>
-          <a:p>
-            <a:pPr marL="0" indent="0" algn="l">
-              <a:lnSpc>
-                <a:spcPct val="104000"/>
-              </a:lnSpc>
-              <a:buNone/>
-            </a:pPr>
-            <a:r>
-              <a:rPr lang="en-US" sz="1500" b="1" dirty="0">
-                <a:solidFill>
-                  <a:srgbClr val="333F70"/>
-                </a:solidFill>
-                <a:latin typeface="Unbounded Bold" pitchFamily="34" charset="0"/>
-                <a:ea typeface="Unbounded Bold" pitchFamily="34" charset="-122"/>
-                <a:cs typeface="Unbounded Bold" pitchFamily="34" charset="-120"/>
-              </a:rPr>
-              <a:t>Limitations of Manual Computation</a:t>
-            </a:r>
-            <a:endParaRPr lang="en-US" sz="1500" dirty="0"/>
-          </a:p>
-        </p:txBody>
-      </p:sp>
-      <p:sp>
-        <p:nvSpPr>
-          <p:cNvPr id="10" name="Text 6"/>
-          <p:cNvSpPr/>
-          <p:nvPr/>
-        </p:nvSpPr>
-        <p:spPr>
-          <a:xfrm>
-            <a:off x="4582998" y="2228453"/>
-            <a:ext cx="3101798" cy="1441847"/>
-          </a:xfrm>
-          <a:prstGeom prst="rect">
-            <a:avLst/>
-          </a:prstGeom>
-          <a:noFill/>
-          <a:ln/>
-        </p:spPr>
-        <p:txBody>
-          <a:bodyPr wrap="square" lIns="0" tIns="0" rIns="0" bIns="0" rtlCol="0" anchor="t">
-            <a:normAutofit/>
-          </a:bodyPr>
-          <a:lstStyle/>
-          <a:p>
-            <a:pPr marL="0" indent="0" algn="l">
-              <a:lnSpc>
-                <a:spcPct val="129000"/>
-              </a:lnSpc>
-              <a:buNone/>
-            </a:pPr>
-            <a:r>
-              <a:rPr lang="en-US" sz="1200" dirty="0">
-                <a:solidFill>
-                  <a:srgbClr val="333F70"/>
-                </a:solidFill>
-                <a:latin typeface="Open Sans" pitchFamily="34" charset="0"/>
-                <a:ea typeface="Open Sans" pitchFamily="34" charset="-122"/>
-                <a:cs typeface="Open Sans" pitchFamily="34" charset="-120"/>
-              </a:rPr>
-              <a:t>Manual binary arithmetic is inherently error-prone and, more critically, fails to illuminate circuit design principles. A working hardware implementation is needed to bridge theoretical arithmetic with practical logic design.</a:t>
-            </a:r>
-            <a:endParaRPr lang="en-US" sz="1200" dirty="0"/>
-          </a:p>
-        </p:txBody>
-      </p:sp>
-      <p:pic>
-        <p:nvPicPr>
-          <p:cNvPr id="11" name="Image 2" descr="preencoded.png"/>
-          <p:cNvPicPr>
-            <a:picLocks noChangeAspect="1"/>
-          </p:cNvPicPr>
-          <p:nvPr/>
-        </p:nvPicPr>
-        <p:blipFill>
-          <a:blip>
-            <a:extLst>
-              <a:ext uri="{96DAC541-7B7A-43D3-8B79-37D633B846F1}">
-                <asvg:svgBlip xmlns:asvg="http://schemas.microsoft.com/office/drawing/2016/SVG/main" r:embed="rId3"/>
-              </a:ext>
-            </a:extLst>
-          </a:blip>
-          <a:stretch>
-            <a:fillRect/>
-          </a:stretch>
-        </p:blipFill>
-        <p:spPr>
-          <a:xfrm>
-            <a:off x="8004173" y="1482824"/>
-            <a:ext cx="3526047" cy="2844006"/>
-          </a:xfrm>
-          <a:prstGeom prst="rect">
-            <a:avLst/>
-          </a:prstGeom>
-        </p:spPr>
-      </p:pic>
-      <p:sp>
-        <p:nvSpPr>
-          <p:cNvPr id="12" name="Text 7"/>
-          <p:cNvSpPr/>
-          <p:nvPr/>
-        </p:nvSpPr>
-        <p:spPr>
-          <a:xfrm>
-            <a:off x="8254397" y="1656854"/>
-            <a:ext cx="3101798" cy="726579"/>
-          </a:xfrm>
-          <a:prstGeom prst="rect">
-            <a:avLst/>
-          </a:prstGeom>
-          <a:noFill/>
-          <a:ln/>
-        </p:spPr>
-        <p:txBody>
-          <a:bodyPr wrap="square" lIns="0" tIns="0" rIns="0" bIns="0" rtlCol="0" anchor="t">
-            <a:normAutofit/>
-          </a:bodyPr>
-          <a:lstStyle/>
-          <a:p>
-            <a:pPr marL="0" indent="0" algn="l">
-              <a:lnSpc>
-                <a:spcPct val="104000"/>
-              </a:lnSpc>
-              <a:buNone/>
-            </a:pPr>
-            <a:r>
-              <a:rPr lang="en-US" sz="1500" b="1" dirty="0">
-                <a:solidFill>
-                  <a:srgbClr val="333F70"/>
-                </a:solidFill>
-                <a:latin typeface="Unbounded Bold" pitchFamily="34" charset="0"/>
-                <a:ea typeface="Unbounded Bold" pitchFamily="34" charset="-122"/>
-                <a:cs typeface="Unbounded Bold" pitchFamily="34" charset="-120"/>
-              </a:rPr>
-              <a:t>Signed Number Representation Challenge</a:t>
-            </a:r>
-            <a:endParaRPr lang="en-US" sz="1500" dirty="0"/>
-          </a:p>
-        </p:txBody>
-      </p:sp>
-      <p:sp>
-        <p:nvSpPr>
-          <p:cNvPr id="13" name="Text 8"/>
-          <p:cNvSpPr/>
-          <p:nvPr/>
-        </p:nvSpPr>
-        <p:spPr>
-          <a:xfrm>
-            <a:off x="8254397" y="2470646"/>
-            <a:ext cx="3101798" cy="1682155"/>
-          </a:xfrm>
-          <a:prstGeom prst="rect">
-            <a:avLst/>
-          </a:prstGeom>
-          <a:noFill/>
-          <a:ln/>
-        </p:spPr>
-        <p:txBody>
-          <a:bodyPr wrap="square" lIns="0" tIns="0" rIns="0" bIns="0" rtlCol="0" anchor="t">
-            <a:normAutofit/>
-          </a:bodyPr>
-          <a:lstStyle/>
-          <a:p>
-            <a:pPr marL="0" indent="0" algn="l">
-              <a:lnSpc>
-                <a:spcPct val="129000"/>
-              </a:lnSpc>
-              <a:buNone/>
-            </a:pPr>
-            <a:r>
-              <a:rPr lang="en-US" sz="1200" dirty="0">
-                <a:solidFill>
-                  <a:srgbClr val="333F70"/>
-                </a:solidFill>
-                <a:latin typeface="Open Sans" pitchFamily="34" charset="0"/>
-                <a:ea typeface="Open Sans" pitchFamily="34" charset="-122"/>
-                <a:cs typeface="Open Sans" pitchFamily="34" charset="-120"/>
-              </a:rPr>
-              <a:t>Representing negative numbers within a fixed-width binary format requires careful encoding. </a:t>
-            </a:r>
-            <a:r>
-              <a:rPr lang="en-US" sz="1200" b="1" dirty="0">
-                <a:solidFill>
-                  <a:srgbClr val="333F70"/>
-                </a:solidFill>
-                <a:latin typeface="Open Sans Bold" pitchFamily="34" charset="0"/>
-                <a:ea typeface="Open Sans Bold" pitchFamily="34" charset="-122"/>
-                <a:cs typeface="Open Sans Bold" pitchFamily="34" charset="-120"/>
-              </a:rPr>
-              <a:t>Two's complement</a:t>
-            </a:r>
-            <a:r>
-              <a:rPr lang="en-US" sz="1200" dirty="0">
-                <a:solidFill>
-                  <a:srgbClr val="333F70"/>
-                </a:solidFill>
-                <a:latin typeface="Open Sans" pitchFamily="34" charset="0"/>
-                <a:ea typeface="Open Sans" pitchFamily="34" charset="-122"/>
-                <a:cs typeface="Open Sans" pitchFamily="34" charset="-120"/>
-              </a:rPr>
-              <a:t> is the industry-standard approach, but its correct implementation at the gate level demands systematic design and verification.</a:t>
-            </a:r>
-            <a:endParaRPr lang="en-US" sz="1200" dirty="0"/>
-          </a:p>
-        </p:txBody>
-      </p:sp>
-      <p:pic>
-        <p:nvPicPr>
-          <p:cNvPr id="14" name="Image 3" descr="preencoded.png"/>
-          <p:cNvPicPr>
-            <a:picLocks noChangeAspect="1"/>
-          </p:cNvPicPr>
-          <p:nvPr/>
-        </p:nvPicPr>
-        <p:blipFill>
-          <a:blip>
+          <a:blip r:embed="rId3">
             <a:extLst>
               <a:ext uri="{96DAC541-7B7A-43D3-8B79-37D633B846F1}">
                 <asvg:svgBlip xmlns:asvg="http://schemas.microsoft.com/office/drawing/2016/SVG/main" r:embed="rId4"/>
@@ -4717,8 +4836,8 @@
         </p:blipFill>
         <p:spPr>
           <a:xfrm>
-            <a:off x="661475" y="4490343"/>
-            <a:ext cx="5361647" cy="1880890"/>
+            <a:off x="4332774" y="1482824"/>
+            <a:ext cx="3526047" cy="2844006"/>
           </a:xfrm>
           <a:prstGeom prst="rect">
             <a:avLst/>
@@ -4727,14 +4846,14 @@
       </p:pic>
       <p:sp>
         <p:nvSpPr>
-          <p:cNvPr id="15" name="Text 9"/>
+          <p:cNvPr id="9" name="Text 5"/>
           <p:cNvSpPr/>
           <p:nvPr/>
         </p:nvSpPr>
         <p:spPr>
           <a:xfrm>
-            <a:off x="911698" y="4664373"/>
-            <a:ext cx="4937398" cy="484386"/>
+            <a:off x="4582998" y="1656854"/>
+            <a:ext cx="3101798" cy="484386"/>
           </a:xfrm>
           <a:prstGeom prst="rect">
             <a:avLst/>
@@ -4748,7 +4867,7 @@
           </a:bodyPr>
           <a:lstStyle/>
           <a:p>
-            <a:pPr marL="0" indent="0" algn="l">
+            <a:pPr algn="l" indent="0" marL="0">
               <a:lnSpc>
                 <a:spcPct val="104000"/>
               </a:lnSpc>
@@ -4763,7 +4882,7 @@
                 <a:ea typeface="Unbounded Bold" pitchFamily="34" charset="-122"/>
                 <a:cs typeface="Unbounded Bold" pitchFamily="34" charset="-120"/>
               </a:rPr>
-              <a:t>Overflow Detection in Fixed-Width Arithmetic</a:t>
+              <a:t>Limitations of Manual Computation</a:t>
             </a:r>
             <a:endParaRPr lang="en-US" sz="1500" dirty="0"/>
           </a:p>
@@ -4771,14 +4890,14 @@
       </p:sp>
       <p:sp>
         <p:nvSpPr>
-          <p:cNvPr id="16" name="Text 10"/>
+          <p:cNvPr id="10" name="Text 6"/>
           <p:cNvSpPr/>
           <p:nvPr/>
         </p:nvSpPr>
         <p:spPr>
           <a:xfrm>
-            <a:off x="911698" y="5235972"/>
-            <a:ext cx="4937398" cy="961231"/>
+            <a:off x="4582998" y="2228453"/>
+            <a:ext cx="3101798" cy="1441847"/>
           </a:xfrm>
           <a:prstGeom prst="rect">
             <a:avLst/>
@@ -4792,7 +4911,7 @@
           </a:bodyPr>
           <a:lstStyle/>
           <a:p>
-            <a:pPr marL="0" indent="0" algn="l">
+            <a:pPr algn="l" indent="0" marL="0">
               <a:lnSpc>
                 <a:spcPct val="129000"/>
               </a:lnSpc>
@@ -4807,29 +4926,7 @@
                 <a:ea typeface="Open Sans" pitchFamily="34" charset="-122"/>
                 <a:cs typeface="Open Sans" pitchFamily="34" charset="-120"/>
               </a:rPr>
-              <a:t>4-bit binary arithmetic operates within a constrained numeric range. Results that exceed this range produce </a:t>
-            </a:r>
-            <a:r>
-              <a:rPr lang="en-US" sz="1200" b="1" dirty="0">
-                <a:solidFill>
-                  <a:srgbClr val="333F70"/>
-                </a:solidFill>
-                <a:latin typeface="Open Sans Bold" pitchFamily="34" charset="0"/>
-                <a:ea typeface="Open Sans Bold" pitchFamily="34" charset="-122"/>
-                <a:cs typeface="Open Sans Bold" pitchFamily="34" charset="-120"/>
-              </a:rPr>
-              <a:t>silent errors</a:t>
-            </a:r>
-            <a:r>
-              <a:rPr lang="en-US" sz="1200" dirty="0">
-                <a:solidFill>
-                  <a:srgbClr val="333F70"/>
-                </a:solidFill>
-                <a:latin typeface="Open Sans" pitchFamily="34" charset="0"/>
-                <a:ea typeface="Open Sans" pitchFamily="34" charset="-122"/>
-                <a:cs typeface="Open Sans" pitchFamily="34" charset="-120"/>
-              </a:rPr>
-              <a:t> without explicit overflow detection logic. Detecting and flagging overflow is critical for arithmetic correctness.</a:t>
+              <a:t>Manual binary arithmetic is inherently error-prone and, more critically, fails to illuminate circuit design principles. A working hardware implementation is needed to bridge theoretical arithmetic with practical logic design.</a:t>
             </a:r>
             <a:endParaRPr lang="en-US" sz="1200" dirty="0"/>
           </a:p>
@@ -4837,17 +4934,17 @@
       </p:sp>
       <p:pic>
         <p:nvPicPr>
-          <p:cNvPr id="17" name="Image 4" descr="preencoded.png"/>
+          <p:cNvPr id="11" name="Image 2" descr="preencoded.png">    </p:cNvPr>
           <p:cNvPicPr>
             <a:picLocks noChangeAspect="1"/>
           </p:cNvPicPr>
           <p:nvPr/>
         </p:nvPicPr>
         <p:blipFill>
-          <a:blip>
+          <a:blip r:embed="rId5">
             <a:extLst>
               <a:ext uri="{96DAC541-7B7A-43D3-8B79-37D633B846F1}">
-                <asvg:svgBlip xmlns:asvg="http://schemas.microsoft.com/office/drawing/2016/SVG/main" r:embed="rId4"/>
+                <asvg:svgBlip xmlns:asvg="http://schemas.microsoft.com/office/drawing/2016/SVG/main" r:embed="rId6"/>
               </a:ext>
             </a:extLst>
           </a:blip>
@@ -4857,8 +4954,8 @@
         </p:blipFill>
         <p:spPr>
           <a:xfrm>
-            <a:off x="6168474" y="4490343"/>
-            <a:ext cx="5361746" cy="1880890"/>
+            <a:off x="8004173" y="1482824"/>
+            <a:ext cx="3526047" cy="2844006"/>
           </a:xfrm>
           <a:prstGeom prst="rect">
             <a:avLst/>
@@ -4867,56 +4964,14 @@
       </p:pic>
       <p:sp>
         <p:nvSpPr>
-          <p:cNvPr id="18" name="Text 11"/>
+          <p:cNvPr id="12" name="Text 7"/>
           <p:cNvSpPr/>
           <p:nvPr/>
         </p:nvSpPr>
         <p:spPr>
           <a:xfrm>
-            <a:off x="6418697" y="4664373"/>
-            <a:ext cx="4937498" cy="242193"/>
-          </a:xfrm>
-          <a:prstGeom prst="rect">
-            <a:avLst/>
-          </a:prstGeom>
-          <a:noFill/>
-          <a:ln/>
-        </p:spPr>
-        <p:txBody>
-          <a:bodyPr wrap="none" lIns="0" tIns="0" rIns="0" bIns="0" rtlCol="0" anchor="t"/>
-          <a:lstStyle/>
-          <a:p>
-            <a:pPr marL="0" indent="0" algn="l">
-              <a:lnSpc>
-                <a:spcPct val="104000"/>
-              </a:lnSpc>
-              <a:buNone/>
-            </a:pPr>
-            <a:r>
-              <a:rPr lang="en-US" sz="1500" b="1" dirty="0">
-                <a:solidFill>
-                  <a:srgbClr val="333F70"/>
-                </a:solidFill>
-                <a:latin typeface="Unbounded Bold" pitchFamily="34" charset="0"/>
-                <a:ea typeface="Unbounded Bold" pitchFamily="34" charset="-122"/>
-                <a:cs typeface="Unbounded Bold" pitchFamily="34" charset="-120"/>
-              </a:rPr>
-              <a:t>System Integration Complexity</a:t>
-            </a:r>
-            <a:endParaRPr lang="en-US" sz="1500" dirty="0"/>
-          </a:p>
-        </p:txBody>
-      </p:sp>
-      <p:sp>
-        <p:nvSpPr>
-          <p:cNvPr id="19" name="Text 12"/>
-          <p:cNvSpPr/>
-          <p:nvPr/>
-        </p:nvSpPr>
-        <p:spPr>
-          <a:xfrm>
-            <a:off x="6418697" y="4993779"/>
-            <a:ext cx="4937498" cy="961231"/>
+            <a:off x="8254397" y="1656854"/>
+            <a:ext cx="3101798" cy="726579"/>
           </a:xfrm>
           <a:prstGeom prst="rect">
             <a:avLst/>
@@ -4930,7 +4985,51 @@
           </a:bodyPr>
           <a:lstStyle/>
           <a:p>
-            <a:pPr marL="0" indent="0" algn="l">
+            <a:pPr algn="l" indent="0" marL="0">
+              <a:lnSpc>
+                <a:spcPct val="104000"/>
+              </a:lnSpc>
+              <a:buNone/>
+            </a:pPr>
+            <a:r>
+              <a:rPr lang="en-US" sz="1500" b="1" dirty="0">
+                <a:solidFill>
+                  <a:srgbClr val="333F70"/>
+                </a:solidFill>
+                <a:latin typeface="Unbounded Bold" pitchFamily="34" charset="0"/>
+                <a:ea typeface="Unbounded Bold" pitchFamily="34" charset="-122"/>
+                <a:cs typeface="Unbounded Bold" pitchFamily="34" charset="-120"/>
+              </a:rPr>
+              <a:t>Signed Number Representation Challenge</a:t>
+            </a:r>
+            <a:endParaRPr lang="en-US" sz="1500" dirty="0"/>
+          </a:p>
+        </p:txBody>
+      </p:sp>
+      <p:sp>
+        <p:nvSpPr>
+          <p:cNvPr id="13" name="Text 8"/>
+          <p:cNvSpPr/>
+          <p:nvPr/>
+        </p:nvSpPr>
+        <p:spPr>
+          <a:xfrm>
+            <a:off x="8254397" y="2470646"/>
+            <a:ext cx="3101798" cy="1682155"/>
+          </a:xfrm>
+          <a:prstGeom prst="rect">
+            <a:avLst/>
+          </a:prstGeom>
+          <a:noFill/>
+          <a:ln/>
+        </p:spPr>
+        <p:txBody>
+          <a:bodyPr wrap="square" lIns="0" tIns="0" rIns="0" bIns="0" rtlCol="0" anchor="t">
+            <a:normAutofit/>
+          </a:bodyPr>
+          <a:lstStyle/>
+          <a:p>
+            <a:pPr algn="l" indent="0" marL="0">
               <a:lnSpc>
                 <a:spcPct val="129000"/>
               </a:lnSpc>
@@ -4945,8 +5044,14 @@
                 <a:ea typeface="Open Sans" pitchFamily="34" charset="-122"/>
                 <a:cs typeface="Open Sans" pitchFamily="34" charset="-120"/>
               </a:rPr>
-              <a:t>Combining multiple full adders, mode-control logic, two's complement negation, and overflow detection into a single cohesive, correctly functioning system requires a </a:t>
-            </a:r>
+              <a:t>Representing negative numbers within a fixed-width binary format requires careful encoding. </a:t>
+            </a:r>
+            <a:pPr algn="l" indent="0" marL="0">
+              <a:lnSpc>
+                <a:spcPct val="129000"/>
+              </a:lnSpc>
+              <a:buNone/>
+            </a:pPr>
             <a:r>
               <a:rPr lang="en-US" sz="1200" b="1" dirty="0">
                 <a:solidFill>
@@ -4956,8 +5061,316 @@
                 <a:ea typeface="Open Sans Bold" pitchFamily="34" charset="-122"/>
                 <a:cs typeface="Open Sans Bold" pitchFamily="34" charset="-120"/>
               </a:rPr>
+              <a:t>Two's complement</a:t>
+            </a:r>
+            <a:pPr algn="l" indent="0" marL="0">
+              <a:lnSpc>
+                <a:spcPct val="129000"/>
+              </a:lnSpc>
+              <a:buNone/>
+            </a:pPr>
+            <a:r>
+              <a:rPr lang="en-US" sz="1200" dirty="0">
+                <a:solidFill>
+                  <a:srgbClr val="333F70"/>
+                </a:solidFill>
+                <a:latin typeface="Open Sans" pitchFamily="34" charset="0"/>
+                <a:ea typeface="Open Sans" pitchFamily="34" charset="-122"/>
+                <a:cs typeface="Open Sans" pitchFamily="34" charset="-120"/>
+              </a:rPr>
+              <a:t> is the industry-standard approach, but its correct implementation at the gate level demands systematic design and verification.</a:t>
+            </a:r>
+            <a:endParaRPr lang="en-US" sz="1200" dirty="0"/>
+          </a:p>
+        </p:txBody>
+      </p:sp>
+      <p:pic>
+        <p:nvPicPr>
+          <p:cNvPr id="14" name="Image 3" descr="preencoded.png">    </p:cNvPr>
+          <p:cNvPicPr>
+            <a:picLocks noChangeAspect="1"/>
+          </p:cNvPicPr>
+          <p:nvPr/>
+        </p:nvPicPr>
+        <p:blipFill>
+          <a:blip r:embed="rId7">
+            <a:extLst>
+              <a:ext uri="{96DAC541-7B7A-43D3-8B79-37D633B846F1}">
+                <asvg:svgBlip xmlns:asvg="http://schemas.microsoft.com/office/drawing/2016/SVG/main" r:embed="rId8"/>
+              </a:ext>
+            </a:extLst>
+          </a:blip>
+          <a:stretch>
+            <a:fillRect/>
+          </a:stretch>
+        </p:blipFill>
+        <p:spPr>
+          <a:xfrm>
+            <a:off x="661475" y="4490343"/>
+            <a:ext cx="5361647" cy="1880890"/>
+          </a:xfrm>
+          <a:prstGeom prst="rect">
+            <a:avLst/>
+          </a:prstGeom>
+        </p:spPr>
+      </p:pic>
+      <p:sp>
+        <p:nvSpPr>
+          <p:cNvPr id="15" name="Text 9"/>
+          <p:cNvSpPr/>
+          <p:nvPr/>
+        </p:nvSpPr>
+        <p:spPr>
+          <a:xfrm>
+            <a:off x="911698" y="4664373"/>
+            <a:ext cx="4937398" cy="484386"/>
+          </a:xfrm>
+          <a:prstGeom prst="rect">
+            <a:avLst/>
+          </a:prstGeom>
+          <a:noFill/>
+          <a:ln/>
+        </p:spPr>
+        <p:txBody>
+          <a:bodyPr wrap="square" lIns="0" tIns="0" rIns="0" bIns="0" rtlCol="0" anchor="t">
+            <a:normAutofit/>
+          </a:bodyPr>
+          <a:lstStyle/>
+          <a:p>
+            <a:pPr algn="l" indent="0" marL="0">
+              <a:lnSpc>
+                <a:spcPct val="104000"/>
+              </a:lnSpc>
+              <a:buNone/>
+            </a:pPr>
+            <a:r>
+              <a:rPr lang="en-US" sz="1500" b="1" dirty="0">
+                <a:solidFill>
+                  <a:srgbClr val="333F70"/>
+                </a:solidFill>
+                <a:latin typeface="Unbounded Bold" pitchFamily="34" charset="0"/>
+                <a:ea typeface="Unbounded Bold" pitchFamily="34" charset="-122"/>
+                <a:cs typeface="Unbounded Bold" pitchFamily="34" charset="-120"/>
+              </a:rPr>
+              <a:t>Overflow Detection in Fixed-Width Arithmetic</a:t>
+            </a:r>
+            <a:endParaRPr lang="en-US" sz="1500" dirty="0"/>
+          </a:p>
+        </p:txBody>
+      </p:sp>
+      <p:sp>
+        <p:nvSpPr>
+          <p:cNvPr id="16" name="Text 10"/>
+          <p:cNvSpPr/>
+          <p:nvPr/>
+        </p:nvSpPr>
+        <p:spPr>
+          <a:xfrm>
+            <a:off x="911698" y="5235972"/>
+            <a:ext cx="4937398" cy="961231"/>
+          </a:xfrm>
+          <a:prstGeom prst="rect">
+            <a:avLst/>
+          </a:prstGeom>
+          <a:noFill/>
+          <a:ln/>
+        </p:spPr>
+        <p:txBody>
+          <a:bodyPr wrap="square" lIns="0" tIns="0" rIns="0" bIns="0" rtlCol="0" anchor="t">
+            <a:normAutofit/>
+          </a:bodyPr>
+          <a:lstStyle/>
+          <a:p>
+            <a:pPr algn="l" indent="0" marL="0">
+              <a:lnSpc>
+                <a:spcPct val="129000"/>
+              </a:lnSpc>
+              <a:buNone/>
+            </a:pPr>
+            <a:r>
+              <a:rPr lang="en-US" sz="1200" dirty="0">
+                <a:solidFill>
+                  <a:srgbClr val="333F70"/>
+                </a:solidFill>
+                <a:latin typeface="Open Sans" pitchFamily="34" charset="0"/>
+                <a:ea typeface="Open Sans" pitchFamily="34" charset="-122"/>
+                <a:cs typeface="Open Sans" pitchFamily="34" charset="-120"/>
+              </a:rPr>
+              <a:t>4-bit binary arithmetic operates within a constrained numeric range. Results that exceed this range produce </a:t>
+            </a:r>
+            <a:pPr algn="l" indent="0" marL="0">
+              <a:lnSpc>
+                <a:spcPct val="129000"/>
+              </a:lnSpc>
+              <a:buNone/>
+            </a:pPr>
+            <a:r>
+              <a:rPr lang="en-US" sz="1200" b="1" dirty="0">
+                <a:solidFill>
+                  <a:srgbClr val="333F70"/>
+                </a:solidFill>
+                <a:latin typeface="Open Sans Bold" pitchFamily="34" charset="0"/>
+                <a:ea typeface="Open Sans Bold" pitchFamily="34" charset="-122"/>
+                <a:cs typeface="Open Sans Bold" pitchFamily="34" charset="-120"/>
+              </a:rPr>
+              <a:t>silent errors</a:t>
+            </a:r>
+            <a:pPr algn="l" indent="0" marL="0">
+              <a:lnSpc>
+                <a:spcPct val="129000"/>
+              </a:lnSpc>
+              <a:buNone/>
+            </a:pPr>
+            <a:r>
+              <a:rPr lang="en-US" sz="1200" dirty="0">
+                <a:solidFill>
+                  <a:srgbClr val="333F70"/>
+                </a:solidFill>
+                <a:latin typeface="Open Sans" pitchFamily="34" charset="0"/>
+                <a:ea typeface="Open Sans" pitchFamily="34" charset="-122"/>
+                <a:cs typeface="Open Sans" pitchFamily="34" charset="-120"/>
+              </a:rPr>
+              <a:t> without explicit overflow detection logic. Detecting and flagging overflow is critical for arithmetic correctness.</a:t>
+            </a:r>
+            <a:endParaRPr lang="en-US" sz="1200" dirty="0"/>
+          </a:p>
+        </p:txBody>
+      </p:sp>
+      <p:pic>
+        <p:nvPicPr>
+          <p:cNvPr id="17" name="Image 4" descr="preencoded.png">    </p:cNvPr>
+          <p:cNvPicPr>
+            <a:picLocks noChangeAspect="1"/>
+          </p:cNvPicPr>
+          <p:nvPr/>
+        </p:nvPicPr>
+        <p:blipFill>
+          <a:blip r:embed="rId9">
+            <a:extLst>
+              <a:ext uri="{96DAC541-7B7A-43D3-8B79-37D633B846F1}">
+                <asvg:svgBlip xmlns:asvg="http://schemas.microsoft.com/office/drawing/2016/SVG/main" r:embed="rId10"/>
+              </a:ext>
+            </a:extLst>
+          </a:blip>
+          <a:stretch>
+            <a:fillRect/>
+          </a:stretch>
+        </p:blipFill>
+        <p:spPr>
+          <a:xfrm>
+            <a:off x="6168474" y="4490343"/>
+            <a:ext cx="5361746" cy="1880890"/>
+          </a:xfrm>
+          <a:prstGeom prst="rect">
+            <a:avLst/>
+          </a:prstGeom>
+        </p:spPr>
+      </p:pic>
+      <p:sp>
+        <p:nvSpPr>
+          <p:cNvPr id="18" name="Text 11"/>
+          <p:cNvSpPr/>
+          <p:nvPr/>
+        </p:nvSpPr>
+        <p:spPr>
+          <a:xfrm>
+            <a:off x="6418697" y="4664373"/>
+            <a:ext cx="4937498" cy="242193"/>
+          </a:xfrm>
+          <a:prstGeom prst="rect">
+            <a:avLst/>
+          </a:prstGeom>
+          <a:noFill/>
+          <a:ln/>
+        </p:spPr>
+        <p:txBody>
+          <a:bodyPr wrap="none" lIns="0" tIns="0" rIns="0" bIns="0" rtlCol="0" anchor="t"/>
+          <a:lstStyle/>
+          <a:p>
+            <a:pPr algn="l" indent="0" marL="0">
+              <a:lnSpc>
+                <a:spcPct val="104000"/>
+              </a:lnSpc>
+              <a:buNone/>
+            </a:pPr>
+            <a:r>
+              <a:rPr lang="en-US" sz="1500" b="1" dirty="0">
+                <a:solidFill>
+                  <a:srgbClr val="333F70"/>
+                </a:solidFill>
+                <a:latin typeface="Unbounded Bold" pitchFamily="34" charset="0"/>
+                <a:ea typeface="Unbounded Bold" pitchFamily="34" charset="-122"/>
+                <a:cs typeface="Unbounded Bold" pitchFamily="34" charset="-120"/>
+              </a:rPr>
+              <a:t>System Integration Complexity</a:t>
+            </a:r>
+            <a:endParaRPr lang="en-US" sz="1500" dirty="0"/>
+          </a:p>
+        </p:txBody>
+      </p:sp>
+      <p:sp>
+        <p:nvSpPr>
+          <p:cNvPr id="19" name="Text 12"/>
+          <p:cNvSpPr/>
+          <p:nvPr/>
+        </p:nvSpPr>
+        <p:spPr>
+          <a:xfrm>
+            <a:off x="6418697" y="4993779"/>
+            <a:ext cx="4937498" cy="961231"/>
+          </a:xfrm>
+          <a:prstGeom prst="rect">
+            <a:avLst/>
+          </a:prstGeom>
+          <a:noFill/>
+          <a:ln/>
+        </p:spPr>
+        <p:txBody>
+          <a:bodyPr wrap="square" lIns="0" tIns="0" rIns="0" bIns="0" rtlCol="0" anchor="t">
+            <a:normAutofit/>
+          </a:bodyPr>
+          <a:lstStyle/>
+          <a:p>
+            <a:pPr algn="l" indent="0" marL="0">
+              <a:lnSpc>
+                <a:spcPct val="129000"/>
+              </a:lnSpc>
+              <a:buNone/>
+            </a:pPr>
+            <a:r>
+              <a:rPr lang="en-US" sz="1200" dirty="0">
+                <a:solidFill>
+                  <a:srgbClr val="333F70"/>
+                </a:solidFill>
+                <a:latin typeface="Open Sans" pitchFamily="34" charset="0"/>
+                <a:ea typeface="Open Sans" pitchFamily="34" charset="-122"/>
+                <a:cs typeface="Open Sans" pitchFamily="34" charset="-120"/>
+              </a:rPr>
+              <a:t>Combining multiple full adders, mode-control logic, two's complement negation, and overflow detection into a single cohesive, correctly functioning system requires a </a:t>
+            </a:r>
+            <a:pPr algn="l" indent="0" marL="0">
+              <a:lnSpc>
+                <a:spcPct val="129000"/>
+              </a:lnSpc>
+              <a:buNone/>
+            </a:pPr>
+            <a:r>
+              <a:rPr lang="en-US" sz="1200" b="1" dirty="0">
+                <a:solidFill>
+                  <a:srgbClr val="333F70"/>
+                </a:solidFill>
+                <a:latin typeface="Open Sans Bold" pitchFamily="34" charset="0"/>
+                <a:ea typeface="Open Sans Bold" pitchFamily="34" charset="-122"/>
+                <a:cs typeface="Open Sans Bold" pitchFamily="34" charset="-120"/>
+              </a:rPr>
               <a:t>systematic design methodology</a:t>
             </a:r>
+            <a:pPr algn="l" indent="0" marL="0">
+              <a:lnSpc>
+                <a:spcPct val="129000"/>
+              </a:lnSpc>
+              <a:buNone/>
+            </a:pPr>
             <a:r>
               <a:rPr lang="en-US" sz="1200" dirty="0">
                 <a:solidFill>
@@ -5041,7 +5454,7 @@
           <a:bodyPr wrap="none" lIns="0" tIns="0" rIns="0" bIns="0" rtlCol="0" anchor="t"/>
           <a:lstStyle/>
           <a:p>
-            <a:pPr marL="0" indent="0" algn="l">
+            <a:pPr algn="l" indent="0" marL="0">
               <a:lnSpc>
                 <a:spcPct val="96000"/>
               </a:lnSpc>
@@ -5083,7 +5496,7 @@
           <a:bodyPr wrap="none" lIns="0" tIns="0" rIns="0" bIns="0" rtlCol="0" anchor="t"/>
           <a:lstStyle/>
           <a:p>
-            <a:pPr marL="0" indent="0" algn="l">
+            <a:pPr algn="l" indent="0" marL="0">
               <a:lnSpc>
                 <a:spcPct val="104000"/>
               </a:lnSpc>
@@ -5152,7 +5565,7 @@
           <a:bodyPr wrap="none" lIns="0" tIns="0" rIns="0" bIns="0" rtlCol="0" anchor="ctr"/>
           <a:lstStyle/>
           <a:p>
-            <a:pPr marL="0" indent="0" algn="ctr">
+            <a:pPr algn="ctr" indent="0" marL="0">
               <a:lnSpc>
                 <a:spcPct val="100000"/>
               </a:lnSpc>
@@ -5182,7 +5595,7 @@
         <p:spPr>
           <a:xfrm>
             <a:off x="1198830" y="1784548"/>
-            <a:ext cx="4695311" cy="258465"/>
+            <a:ext cx="4808020" cy="258465"/>
           </a:xfrm>
           <a:prstGeom prst="rect">
             <a:avLst/>
@@ -5194,7 +5607,7 @@
           <a:bodyPr wrap="none" lIns="0" tIns="0" rIns="0" bIns="0" rtlCol="0" anchor="t"/>
           <a:lstStyle/>
           <a:p>
-            <a:pPr marL="0" indent="0" algn="l">
+            <a:pPr algn="l" indent="0" marL="0">
               <a:lnSpc>
                 <a:spcPct val="104000"/>
               </a:lnSpc>
@@ -5224,7 +5637,7 @@
         <p:spPr>
           <a:xfrm>
             <a:off x="1198830" y="2208312"/>
-            <a:ext cx="4695311" cy="793849"/>
+            <a:ext cx="4808020" cy="529233"/>
           </a:xfrm>
           <a:prstGeom prst="rect">
             <a:avLst/>
@@ -5238,7 +5651,7 @@
           </a:bodyPr>
           <a:lstStyle/>
           <a:p>
-            <a:pPr marL="0" indent="0" algn="l">
+            <a:pPr algn="l" indent="0" marL="0">
               <a:lnSpc>
                 <a:spcPct val="133000"/>
               </a:lnSpc>
@@ -5253,7 +5666,7 @@
                 <a:ea typeface="Open Sans" pitchFamily="34" charset="-122"/>
                 <a:cs typeface="Open Sans" pitchFamily="34" charset="-120"/>
               </a:rPr>
-              <a:t>Design a complete 4-bit adder/subtractor circuit built entirely from fundamental logic gates: AND, OR, NOT, NAND, NOR, XOR, and XNOR.</a:t>
+              <a:t>Construct a 4-bit ripple-carry adder/subtractor at the gate level using elementary logic gates (XOR, AND, OR).</a:t>
             </a:r>
             <a:endParaRPr lang="en-US" sz="1300" dirty="0"/>
           </a:p>
@@ -5267,7 +5680,7 @@
         </p:nvSpPr>
         <p:spPr>
           <a:xfrm>
-            <a:off x="661475" y="3332857"/>
+            <a:off x="661475" y="3068241"/>
             <a:ext cx="372061" cy="372070"/>
           </a:xfrm>
           <a:prstGeom prst="roundRect">
@@ -5294,7 +5707,7 @@
         </p:nvSpPr>
         <p:spPr>
           <a:xfrm>
-            <a:off x="723485" y="3363863"/>
+            <a:off x="723485" y="3099246"/>
             <a:ext cx="248041" cy="310059"/>
           </a:xfrm>
           <a:prstGeom prst="rect">
@@ -5307,7 +5720,7 @@
           <a:bodyPr wrap="none" lIns="0" tIns="0" rIns="0" bIns="0" rtlCol="0" anchor="ctr"/>
           <a:lstStyle/>
           <a:p>
-            <a:pPr marL="0" indent="0" algn="ctr">
+            <a:pPr algn="ctr" indent="0" marL="0">
               <a:lnSpc>
                 <a:spcPct val="100000"/>
               </a:lnSpc>
@@ -5336,8 +5749,8 @@
         </p:nvSpPr>
         <p:spPr>
           <a:xfrm>
-            <a:off x="1198830" y="3389709"/>
-            <a:ext cx="4695311" cy="258465"/>
+            <a:off x="1198830" y="3125093"/>
+            <a:ext cx="4808020" cy="258465"/>
           </a:xfrm>
           <a:prstGeom prst="rect">
             <a:avLst/>
@@ -5349,7 +5762,7 @@
           <a:bodyPr wrap="none" lIns="0" tIns="0" rIns="0" bIns="0" rtlCol="0" anchor="t"/>
           <a:lstStyle/>
           <a:p>
-            <a:pPr marL="0" indent="0" algn="l">
+            <a:pPr algn="l" indent="0" marL="0">
               <a:lnSpc>
                 <a:spcPct val="104000"/>
               </a:lnSpc>
@@ -5378,8 +5791,8 @@
         </p:nvSpPr>
         <p:spPr>
           <a:xfrm>
-            <a:off x="1198830" y="3813473"/>
-            <a:ext cx="4695311" cy="793849"/>
+            <a:off x="1198830" y="3548856"/>
+            <a:ext cx="4808020" cy="793849"/>
           </a:xfrm>
           <a:prstGeom prst="rect">
             <a:avLst/>
@@ -5393,7 +5806,7 @@
           </a:bodyPr>
           <a:lstStyle/>
           <a:p>
-            <a:pPr marL="0" indent="0" algn="l">
+            <a:pPr algn="l" indent="0" marL="0">
               <a:lnSpc>
                 <a:spcPct val="133000"/>
               </a:lnSpc>
@@ -5422,7 +5835,7 @@
         </p:nvSpPr>
         <p:spPr>
           <a:xfrm>
-            <a:off x="661475" y="4938018"/>
+            <a:off x="661475" y="4673402"/>
             <a:ext cx="372061" cy="372070"/>
           </a:xfrm>
           <a:prstGeom prst="roundRect">
@@ -5449,7 +5862,7 @@
         </p:nvSpPr>
         <p:spPr>
           <a:xfrm>
-            <a:off x="723485" y="4969024"/>
+            <a:off x="723485" y="4704407"/>
             <a:ext cx="248041" cy="310059"/>
           </a:xfrm>
           <a:prstGeom prst="rect">
@@ -5462,7 +5875,7 @@
           <a:bodyPr wrap="none" lIns="0" tIns="0" rIns="0" bIns="0" rtlCol="0" anchor="ctr"/>
           <a:lstStyle/>
           <a:p>
-            <a:pPr marL="0" indent="0" algn="ctr">
+            <a:pPr algn="ctr" indent="0" marL="0">
               <a:lnSpc>
                 <a:spcPct val="100000"/>
               </a:lnSpc>
@@ -5491,8 +5904,8 @@
         </p:nvSpPr>
         <p:spPr>
           <a:xfrm>
-            <a:off x="1198830" y="4994870"/>
-            <a:ext cx="4695311" cy="258465"/>
+            <a:off x="1198830" y="4730254"/>
+            <a:ext cx="4808020" cy="258465"/>
           </a:xfrm>
           <a:prstGeom prst="rect">
             <a:avLst/>
@@ -5504,7 +5917,7 @@
           <a:bodyPr wrap="none" lIns="0" tIns="0" rIns="0" bIns="0" rtlCol="0" anchor="t"/>
           <a:lstStyle/>
           <a:p>
-            <a:pPr marL="0" indent="0" algn="l">
+            <a:pPr algn="l" indent="0" marL="0">
               <a:lnSpc>
                 <a:spcPct val="104000"/>
               </a:lnSpc>
@@ -5533,8 +5946,8 @@
         </p:nvSpPr>
         <p:spPr>
           <a:xfrm>
-            <a:off x="1198830" y="5418634"/>
-            <a:ext cx="4695311" cy="793849"/>
+            <a:off x="1198830" y="5154017"/>
+            <a:ext cx="4808020" cy="793849"/>
           </a:xfrm>
           <a:prstGeom prst="rect">
             <a:avLst/>
@@ -5548,7 +5961,7 @@
           </a:bodyPr>
           <a:lstStyle/>
           <a:p>
-            <a:pPr marL="0" indent="0" algn="l">
+            <a:pPr algn="l" indent="0" marL="0">
               <a:lnSpc>
                 <a:spcPct val="133000"/>
               </a:lnSpc>
@@ -5577,7 +5990,7 @@
         </p:nvSpPr>
         <p:spPr>
           <a:xfrm>
-            <a:off x="6303904" y="1727696"/>
+            <a:off x="6416614" y="1727696"/>
             <a:ext cx="372061" cy="372070"/>
           </a:xfrm>
           <a:prstGeom prst="roundRect">
@@ -5604,7 +6017,7 @@
         </p:nvSpPr>
         <p:spPr>
           <a:xfrm>
-            <a:off x="6365914" y="1758702"/>
+            <a:off x="6478624" y="1758702"/>
             <a:ext cx="248041" cy="310059"/>
           </a:xfrm>
           <a:prstGeom prst="rect">
@@ -5617,7 +6030,7 @@
           <a:bodyPr wrap="none" lIns="0" tIns="0" rIns="0" bIns="0" rtlCol="0" anchor="ctr"/>
           <a:lstStyle/>
           <a:p>
-            <a:pPr marL="0" indent="0" algn="ctr">
+            <a:pPr algn="ctr" indent="0" marL="0">
               <a:lnSpc>
                 <a:spcPct val="100000"/>
               </a:lnSpc>
@@ -5646,8 +6059,8 @@
         </p:nvSpPr>
         <p:spPr>
           <a:xfrm>
-            <a:off x="6841259" y="1784548"/>
-            <a:ext cx="4695311" cy="258465"/>
+            <a:off x="6953969" y="1784548"/>
+            <a:ext cx="4582502" cy="258465"/>
           </a:xfrm>
           <a:prstGeom prst="rect">
             <a:avLst/>
@@ -5659,7 +6072,7 @@
           <a:bodyPr wrap="none" lIns="0" tIns="0" rIns="0" bIns="0" rtlCol="0" anchor="t"/>
           <a:lstStyle/>
           <a:p>
-            <a:pPr marL="0" indent="0" algn="l">
+            <a:pPr algn="l" indent="0" marL="0">
               <a:lnSpc>
                 <a:spcPct val="104000"/>
               </a:lnSpc>
@@ -5688,8 +6101,8 @@
         </p:nvSpPr>
         <p:spPr>
           <a:xfrm>
-            <a:off x="6841259" y="2208312"/>
-            <a:ext cx="4695311" cy="793849"/>
+            <a:off x="6953969" y="2208312"/>
+            <a:ext cx="4582502" cy="793849"/>
           </a:xfrm>
           <a:prstGeom prst="rect">
             <a:avLst/>
@@ -5703,7 +6116,7 @@
           </a:bodyPr>
           <a:lstStyle/>
           <a:p>
-            <a:pPr marL="0" indent="0" algn="l">
+            <a:pPr algn="l" indent="0" marL="0">
               <a:lnSpc>
                 <a:spcPct val="133000"/>
               </a:lnSpc>
@@ -5718,7 +6131,7 @@
                 <a:ea typeface="Open Sans" pitchFamily="34" charset="-122"/>
                 <a:cs typeface="Open Sans" pitchFamily="34" charset="-120"/>
               </a:rPr>
-              <a:t>Build and simulate the full system in a digital logic simulator (Logisim or Digital), observing signal behavior across all gate levels.</a:t>
+              <a:t>Build and simulate the full system in a digital logic simulator (Logisim), observing signal behavior across all gate levels.</a:t>
             </a:r>
             <a:endParaRPr lang="en-US" sz="1300" dirty="0"/>
           </a:p>
@@ -5732,7 +6145,7 @@
         </p:nvSpPr>
         <p:spPr>
           <a:xfrm>
-            <a:off x="6303904" y="3332857"/>
+            <a:off x="6416614" y="3332857"/>
             <a:ext cx="372061" cy="372070"/>
           </a:xfrm>
           <a:prstGeom prst="roundRect">
@@ -5759,7 +6172,7 @@
         </p:nvSpPr>
         <p:spPr>
           <a:xfrm>
-            <a:off x="6365914" y="3363863"/>
+            <a:off x="6478624" y="3363863"/>
             <a:ext cx="248041" cy="310059"/>
           </a:xfrm>
           <a:prstGeom prst="rect">
@@ -5772,7 +6185,7 @@
           <a:bodyPr wrap="none" lIns="0" tIns="0" rIns="0" bIns="0" rtlCol="0" anchor="ctr"/>
           <a:lstStyle/>
           <a:p>
-            <a:pPr marL="0" indent="0" algn="ctr">
+            <a:pPr algn="ctr" indent="0" marL="0">
               <a:lnSpc>
                 <a:spcPct val="100000"/>
               </a:lnSpc>
@@ -5801,8 +6214,8 @@
         </p:nvSpPr>
         <p:spPr>
           <a:xfrm>
-            <a:off x="6841259" y="3389709"/>
-            <a:ext cx="4695311" cy="258465"/>
+            <a:off x="6953969" y="3389709"/>
+            <a:ext cx="4582502" cy="258465"/>
           </a:xfrm>
           <a:prstGeom prst="rect">
             <a:avLst/>
@@ -5814,7 +6227,7 @@
           <a:bodyPr wrap="none" lIns="0" tIns="0" rIns="0" bIns="0" rtlCol="0" anchor="t"/>
           <a:lstStyle/>
           <a:p>
-            <a:pPr marL="0" indent="0" algn="l">
+            <a:pPr algn="l" indent="0" marL="0">
               <a:lnSpc>
                 <a:spcPct val="104000"/>
               </a:lnSpc>
@@ -5843,8 +6256,8 @@
         </p:nvSpPr>
         <p:spPr>
           <a:xfrm>
-            <a:off x="6841259" y="3813473"/>
-            <a:ext cx="4695311" cy="793849"/>
+            <a:off x="6953969" y="3813473"/>
+            <a:ext cx="4582502" cy="793849"/>
           </a:xfrm>
           <a:prstGeom prst="rect">
             <a:avLst/>
@@ -5858,7 +6271,7 @@
           </a:bodyPr>
           <a:lstStyle/>
           <a:p>
-            <a:pPr marL="0" indent="0" algn="l">
+            <a:pPr algn="l" indent="0" marL="0">
               <a:lnSpc>
                 <a:spcPct val="133000"/>
               </a:lnSpc>
@@ -5887,7 +6300,7 @@
         </p:nvSpPr>
         <p:spPr>
           <a:xfrm>
-            <a:off x="6303904" y="4938018"/>
+            <a:off x="6416614" y="4938018"/>
             <a:ext cx="372061" cy="372070"/>
           </a:xfrm>
           <a:prstGeom prst="roundRect">
@@ -5914,7 +6327,7 @@
         </p:nvSpPr>
         <p:spPr>
           <a:xfrm>
-            <a:off x="6365914" y="4969024"/>
+            <a:off x="6478624" y="4969024"/>
             <a:ext cx="248041" cy="310059"/>
           </a:xfrm>
           <a:prstGeom prst="rect">
@@ -5927,7 +6340,7 @@
           <a:bodyPr wrap="none" lIns="0" tIns="0" rIns="0" bIns="0" rtlCol="0" anchor="ctr"/>
           <a:lstStyle/>
           <a:p>
-            <a:pPr marL="0" indent="0" algn="ctr">
+            <a:pPr algn="ctr" indent="0" marL="0">
               <a:lnSpc>
                 <a:spcPct val="100000"/>
               </a:lnSpc>
@@ -5956,8 +6369,8 @@
         </p:nvSpPr>
         <p:spPr>
           <a:xfrm>
-            <a:off x="6841259" y="4994870"/>
-            <a:ext cx="4695311" cy="258465"/>
+            <a:off x="6953969" y="4994870"/>
+            <a:ext cx="4582502" cy="258465"/>
           </a:xfrm>
           <a:prstGeom prst="rect">
             <a:avLst/>
@@ -5969,7 +6382,7 @@
           <a:bodyPr wrap="none" lIns="0" tIns="0" rIns="0" bIns="0" rtlCol="0" anchor="t"/>
           <a:lstStyle/>
           <a:p>
-            <a:pPr marL="0" indent="0" algn="l">
+            <a:pPr algn="l" indent="0" marL="0">
               <a:lnSpc>
                 <a:spcPct val="104000"/>
               </a:lnSpc>
@@ -5998,8 +6411,8 @@
         </p:nvSpPr>
         <p:spPr>
           <a:xfrm>
-            <a:off x="6841259" y="5418634"/>
-            <a:ext cx="4695311" cy="793849"/>
+            <a:off x="6953969" y="5418634"/>
+            <a:ext cx="4582502" cy="793849"/>
           </a:xfrm>
           <a:prstGeom prst="rect">
             <a:avLst/>
@@ -6013,7 +6426,7 @@
           </a:bodyPr>
           <a:lstStyle/>
           <a:p>
-            <a:pPr marL="0" indent="0" algn="l">
+            <a:pPr algn="l" indent="0" marL="0">
               <a:lnSpc>
                 <a:spcPct val="133000"/>
               </a:lnSpc>
@@ -6102,7 +6515,7 @@
           <a:bodyPr wrap="none" lIns="0" tIns="0" rIns="0" bIns="0" rtlCol="0" anchor="t"/>
           <a:lstStyle/>
           <a:p>
-            <a:pPr marL="0" indent="0" algn="l">
+            <a:pPr algn="l" indent="0" marL="0">
               <a:lnSpc>
                 <a:spcPct val="96000"/>
               </a:lnSpc>
@@ -6144,7 +6557,7 @@
           <a:bodyPr wrap="none" lIns="0" tIns="0" rIns="0" bIns="0" rtlCol="0" anchor="t"/>
           <a:lstStyle/>
           <a:p>
-            <a:pPr marL="0" indent="0" algn="l">
+            <a:pPr algn="l" indent="0" marL="0">
               <a:lnSpc>
                 <a:spcPct val="104000"/>
               </a:lnSpc>
@@ -6186,7 +6599,7 @@
           <a:bodyPr wrap="none" lIns="0" tIns="0" rIns="0" bIns="0" rtlCol="0" anchor="t"/>
           <a:lstStyle/>
           <a:p>
-            <a:pPr marL="0" indent="0" algn="l">
+            <a:pPr algn="l" indent="0" marL="0">
               <a:lnSpc>
                 <a:spcPct val="104000"/>
               </a:lnSpc>
@@ -6230,7 +6643,7 @@
           </a:bodyPr>
           <a:lstStyle/>
           <a:p>
-            <a:pPr marL="0" indent="0" algn="l">
+            <a:pPr algn="l" indent="0" marL="0">
               <a:lnSpc>
                 <a:spcPct val="124000"/>
               </a:lnSpc>
@@ -6247,6 +6660,12 @@
               </a:rPr>
               <a:t>The </a:t>
             </a:r>
+            <a:pPr algn="l" indent="0" marL="0">
+              <a:lnSpc>
+                <a:spcPct val="124000"/>
+              </a:lnSpc>
+              <a:buNone/>
+            </a:pPr>
             <a:r>
               <a:rPr lang="en-US" sz="1100" b="1" dirty="0">
                 <a:solidFill>
@@ -6258,6 +6677,12 @@
               </a:rPr>
               <a:t>ripple-carry adder (RCA)</a:t>
             </a:r>
+            <a:pPr algn="l" indent="0" marL="0">
+              <a:lnSpc>
+                <a:spcPct val="124000"/>
+              </a:lnSpc>
+              <a:buNone/>
+            </a:pPr>
             <a:r>
               <a:rPr lang="en-US" sz="1100" dirty="0">
                 <a:solidFill>
@@ -6294,7 +6719,7 @@
           <a:bodyPr wrap="none" lIns="0" tIns="0" rIns="0" bIns="0" rtlCol="0" anchor="t"/>
           <a:lstStyle/>
           <a:p>
-            <a:pPr marL="0" indent="0" algn="l">
+            <a:pPr algn="l" indent="0" marL="0">
               <a:lnSpc>
                 <a:spcPct val="104000"/>
               </a:lnSpc>
@@ -6338,7 +6763,7 @@
           </a:bodyPr>
           <a:lstStyle/>
           <a:p>
-            <a:pPr marL="0" indent="0" algn="l">
+            <a:pPr algn="l" indent="0" marL="0">
               <a:lnSpc>
                 <a:spcPct val="124000"/>
               </a:lnSpc>
@@ -6355,6 +6780,12 @@
               </a:rPr>
               <a:t>Carry-lookahead adders (CLA)</a:t>
             </a:r>
+            <a:pPr algn="l" indent="0" marL="0">
+              <a:lnSpc>
+                <a:spcPct val="124000"/>
+              </a:lnSpc>
+              <a:buNone/>
+            </a:pPr>
             <a:r>
               <a:rPr lang="en-US" sz="1100" dirty="0">
                 <a:solidFill>
@@ -6364,7 +6795,7 @@
                 <a:ea typeface="Open Sans" pitchFamily="34" charset="-122"/>
                 <a:cs typeface="Open Sans" pitchFamily="34" charset="-120"/>
               </a:rPr>
-              <a:t> overcome RCA latency by computing carry signals in parallel using generate and propagate signals. This reduces critical path delay to O(log n) at the cost of substantially greater gate complexity — typically impractical for manual gate-level educational design.</a:t>
+              <a:t> overcome RCA latency by computing carry signals in parallel using generate and propagate signals. This reduces critical path delay to O(log n) at the cost of substantially greater gate complexity — typically impractical for manual gate-level edu</a:t>
             </a:r>
             <a:endParaRPr lang="en-US" sz="1100" dirty="0"/>
           </a:p>
@@ -6391,7 +6822,7 @@
           <a:bodyPr wrap="none" lIns="0" tIns="0" rIns="0" bIns="0" rtlCol="0" anchor="t"/>
           <a:lstStyle/>
           <a:p>
-            <a:pPr marL="0" indent="0" algn="l">
+            <a:pPr algn="l" indent="0" marL="0">
               <a:lnSpc>
                 <a:spcPct val="104000"/>
               </a:lnSpc>
@@ -6435,7 +6866,7 @@
           </a:bodyPr>
           <a:lstStyle/>
           <a:p>
-            <a:pPr marL="0" indent="0" algn="l">
+            <a:pPr algn="l" indent="0" marL="0">
               <a:lnSpc>
                 <a:spcPct val="124000"/>
               </a:lnSpc>
@@ -6499,7 +6930,7 @@
           <a:bodyPr wrap="none" lIns="0" tIns="0" rIns="0" bIns="0" rtlCol="0" anchor="t"/>
           <a:lstStyle/>
           <a:p>
-            <a:pPr marL="0" indent="0" algn="l">
+            <a:pPr algn="l" indent="0" marL="0">
               <a:lnSpc>
                 <a:spcPct val="104000"/>
               </a:lnSpc>
@@ -6522,7 +6953,7 @@
       </p:sp>
       <p:graphicFrame>
         <p:nvGraphicFramePr>
-          <p:cNvPr id="13" name="Table 0"/>
+          <p:cNvPr id="6" name="Table 0"/>
           <p:cNvGraphicFramePr>
             <a:graphicFrameLocks noGrp="1"/>
           </p:cNvGraphicFramePr>
@@ -6543,27 +6974,9 @@
             <a:tbl>
               <a:tblPr/>
               <a:tblGrid>
-                <a:gridCol w="1540233">
-                  <a:extLst>
-                    <a:ext uri="{9D8B030D-6E8A-4147-A177-3AD203B41FA5}">
-                      <a16:colId xmlns:a16="http://schemas.microsoft.com/office/drawing/2014/main" val="20000"/>
-                    </a:ext>
-                  </a:extLst>
-                </a:gridCol>
-                <a:gridCol w="1540233">
-                  <a:extLst>
-                    <a:ext uri="{9D8B030D-6E8A-4147-A177-3AD203B41FA5}">
-                      <a16:colId xmlns:a16="http://schemas.microsoft.com/office/drawing/2014/main" val="20001"/>
-                    </a:ext>
-                  </a:extLst>
-                </a:gridCol>
-                <a:gridCol w="1540233">
-                  <a:extLst>
-                    <a:ext uri="{9D8B030D-6E8A-4147-A177-3AD203B41FA5}">
-                      <a16:colId xmlns:a16="http://schemas.microsoft.com/office/drawing/2014/main" val="20002"/>
-                    </a:ext>
-                  </a:extLst>
-                </a:gridCol>
+                <a:gridCol w="1540233"/>
+                <a:gridCol w="1540233"/>
+                <a:gridCol w="1540233"/>
               </a:tblGrid>
               <a:tr h="373748">
                 <a:tc>
@@ -6571,7 +6984,7 @@
                     <a:bodyPr/>
                     <a:lstStyle/>
                     <a:p>
-                      <a:pPr marL="0" indent="0">
+                      <a:pPr indent="0" marL="0">
                         <a:buNone/>
                       </a:pPr>
                       <a:r>
@@ -6639,7 +7052,7 @@
                     <a:bodyPr/>
                     <a:lstStyle/>
                     <a:p>
-                      <a:pPr marL="0" indent="0">
+                      <a:pPr indent="0" marL="0">
                         <a:buNone/>
                       </a:pPr>
                       <a:r>
@@ -6707,7 +7120,7 @@
                     <a:bodyPr/>
                     <a:lstStyle/>
                     <a:p>
-                      <a:pPr marL="0" indent="0">
+                      <a:pPr indent="0" marL="0">
                         <a:buNone/>
                       </a:pPr>
                       <a:r>
@@ -6770,11 +7183,6 @@
                     </a:solidFill>
                   </a:tcPr>
                 </a:tc>
-                <a:extLst>
-                  <a:ext uri="{0D108BD9-81ED-4DB2-BD59-A6C34878D82A}">
-                    <a16:rowId xmlns:a16="http://schemas.microsoft.com/office/drawing/2014/main" val="10000"/>
-                  </a:ext>
-                </a:extLst>
               </a:tr>
               <a:tr h="376923">
                 <a:tc>
@@ -6782,7 +7190,7 @@
                     <a:bodyPr/>
                     <a:lstStyle/>
                     <a:p>
-                      <a:pPr marL="0" indent="0">
+                      <a:pPr indent="0" marL="0">
                         <a:buNone/>
                       </a:pPr>
                       <a:r>
@@ -6850,7 +7258,7 @@
                     <a:bodyPr/>
                     <a:lstStyle/>
                     <a:p>
-                      <a:pPr marL="0" indent="0">
+                      <a:pPr indent="0" marL="0">
                         <a:buNone/>
                       </a:pPr>
                       <a:r>
@@ -6918,7 +7326,7 @@
                     <a:bodyPr/>
                     <a:lstStyle/>
                     <a:p>
-                      <a:pPr marL="0" indent="0">
+                      <a:pPr indent="0" marL="0">
                         <a:buNone/>
                       </a:pPr>
                       <a:r>
@@ -6981,11 +7389,6 @@
                     </a:solidFill>
                   </a:tcPr>
                 </a:tc>
-                <a:extLst>
-                  <a:ext uri="{0D108BD9-81ED-4DB2-BD59-A6C34878D82A}">
-                    <a16:rowId xmlns:a16="http://schemas.microsoft.com/office/drawing/2014/main" val="10001"/>
-                  </a:ext>
-                </a:extLst>
               </a:tr>
               <a:tr h="376923">
                 <a:tc>
@@ -6993,7 +7396,7 @@
                     <a:bodyPr/>
                     <a:lstStyle/>
                     <a:p>
-                      <a:pPr marL="0" indent="0">
+                      <a:pPr indent="0" marL="0">
                         <a:buNone/>
                       </a:pPr>
                       <a:r>
@@ -7061,7 +7464,7 @@
                     <a:bodyPr/>
                     <a:lstStyle/>
                     <a:p>
-                      <a:pPr marL="0" indent="0">
+                      <a:pPr indent="0" marL="0">
                         <a:buNone/>
                       </a:pPr>
                       <a:r>
@@ -7129,7 +7532,7 @@
                     <a:bodyPr/>
                     <a:lstStyle/>
                     <a:p>
-                      <a:pPr marL="0" indent="0">
+                      <a:pPr indent="0" marL="0">
                         <a:buNone/>
                       </a:pPr>
                       <a:r>
@@ -7192,11 +7595,6 @@
                     </a:solidFill>
                   </a:tcPr>
                 </a:tc>
-                <a:extLst>
-                  <a:ext uri="{0D108BD9-81ED-4DB2-BD59-A6C34878D82A}">
-                    <a16:rowId xmlns:a16="http://schemas.microsoft.com/office/drawing/2014/main" val="10002"/>
-                  </a:ext>
-                </a:extLst>
               </a:tr>
               <a:tr h="373748">
                 <a:tc>
@@ -7204,7 +7602,7 @@
                     <a:bodyPr/>
                     <a:lstStyle/>
                     <a:p>
-                      <a:pPr marL="0" indent="0">
+                      <a:pPr indent="0" marL="0">
                         <a:buNone/>
                       </a:pPr>
                       <a:r>
@@ -7272,7 +7670,7 @@
                     <a:bodyPr/>
                     <a:lstStyle/>
                     <a:p>
-                      <a:pPr marL="0" indent="0">
+                      <a:pPr indent="0" marL="0">
                         <a:buNone/>
                       </a:pPr>
                       <a:r>
@@ -7340,7 +7738,7 @@
                     <a:bodyPr/>
                     <a:lstStyle/>
                     <a:p>
-                      <a:pPr marL="0" indent="0">
+                      <a:pPr indent="0" marL="0">
                         <a:buNone/>
                       </a:pPr>
                       <a:r>
@@ -7403,11 +7801,6 @@
                     </a:solidFill>
                   </a:tcPr>
                 </a:tc>
-                <a:extLst>
-                  <a:ext uri="{0D108BD9-81ED-4DB2-BD59-A6C34878D82A}">
-                    <a16:rowId xmlns:a16="http://schemas.microsoft.com/office/drawing/2014/main" val="10003"/>
-                  </a:ext>
-                </a:extLst>
               </a:tr>
             </a:tbl>
           </a:graphicData>
@@ -7434,7 +7827,7 @@
           <a:bodyPr wrap="none" lIns="0" tIns="0" rIns="0" bIns="0" rtlCol="0" anchor="t"/>
           <a:lstStyle/>
           <a:p>
-            <a:pPr marL="0" indent="0" algn="l">
+            <a:pPr algn="l" indent="0" marL="0">
               <a:lnSpc>
                 <a:spcPct val="104000"/>
               </a:lnSpc>
@@ -7478,7 +7871,7 @@
           </a:bodyPr>
           <a:lstStyle/>
           <a:p>
-            <a:pPr marL="0" indent="0" algn="l">
+            <a:pPr algn="l" indent="0" marL="0">
               <a:lnSpc>
                 <a:spcPct val="124000"/>
               </a:lnSpc>
@@ -7495,6 +7888,12 @@
               </a:rPr>
               <a:t>The </a:t>
             </a:r>
+            <a:pPr algn="l" indent="0" marL="0">
+              <a:lnSpc>
+                <a:spcPct val="124000"/>
+              </a:lnSpc>
+              <a:buNone/>
+            </a:pPr>
             <a:r>
               <a:rPr lang="en-US" sz="1100" b="1" dirty="0">
                 <a:solidFill>
@@ -7506,6 +7905,12 @@
               </a:rPr>
               <a:t>4-bit width</a:t>
             </a:r>
+            <a:pPr algn="l" indent="0" marL="0">
+              <a:lnSpc>
+                <a:spcPct val="124000"/>
+              </a:lnSpc>
+              <a:buNone/>
+            </a:pPr>
             <a:r>
               <a:rPr lang="en-US" sz="1100" dirty="0">
                 <a:solidFill>
@@ -7545,14 +7950,14 @@
       </p:sp>
       <p:pic>
         <p:nvPicPr>
-          <p:cNvPr id="17" name="Image 0" descr="preencoded.png"/>
+          <p:cNvPr id="17" name="Image 0" descr="preencoded.png">    </p:cNvPr>
           <p:cNvPicPr>
             <a:picLocks noChangeAspect="1"/>
           </p:cNvPicPr>
           <p:nvPr/>
         </p:nvPicPr>
         <p:blipFill>
-          <a:blip r:embed="rId3"/>
+          <a:blip r:embed="rId1"/>
           <a:stretch>
             <a:fillRect/>
           </a:stretch>
@@ -7590,7 +7995,7 @@
           </a:bodyPr>
           <a:lstStyle/>
           <a:p>
-            <a:pPr marL="0" indent="0" algn="l">
+            <a:pPr algn="l" indent="0" marL="0">
               <a:lnSpc>
                 <a:spcPct val="124000"/>
               </a:lnSpc>
@@ -7679,7 +8084,7 @@
           <a:bodyPr wrap="none" lIns="0" tIns="0" rIns="0" bIns="0" rtlCol="0" anchor="t"/>
           <a:lstStyle/>
           <a:p>
-            <a:pPr marL="0" indent="0" algn="l">
+            <a:pPr algn="l" indent="0" marL="0">
               <a:lnSpc>
                 <a:spcPct val="96000"/>
               </a:lnSpc>
@@ -7721,7 +8126,7 @@
           <a:bodyPr wrap="none" lIns="0" tIns="0" rIns="0" bIns="0" rtlCol="0" anchor="t"/>
           <a:lstStyle/>
           <a:p>
-            <a:pPr marL="0" indent="0" algn="l">
+            <a:pPr algn="l" indent="0" marL="0">
               <a:lnSpc>
                 <a:spcPct val="104000"/>
               </a:lnSpc>
@@ -7751,7 +8156,7 @@
         <p:spPr>
           <a:xfrm>
             <a:off x="661475" y="871934"/>
-            <a:ext cx="11728209" cy="206746"/>
+            <a:ext cx="10868745" cy="129183"/>
           </a:xfrm>
           <a:prstGeom prst="rect">
             <a:avLst/>
@@ -7763,7 +8168,7 @@
           <a:bodyPr wrap="none" lIns="0" tIns="0" rIns="0" bIns="0" rtlCol="0" anchor="t"/>
           <a:lstStyle/>
           <a:p>
-            <a:pPr marL="0" indent="0" algn="l">
+            <a:pPr algn="l" indent="0" marL="0">
               <a:lnSpc>
                 <a:spcPct val="104000"/>
               </a:lnSpc>
@@ -7793,7 +8198,7 @@
         <p:spPr>
           <a:xfrm>
             <a:off x="661475" y="1063129"/>
-            <a:ext cx="10868745" cy="132438"/>
+            <a:ext cx="11478330" cy="99120"/>
           </a:xfrm>
           <a:prstGeom prst="rect">
             <a:avLst/>
@@ -7805,14 +8210,14 @@
           <a:bodyPr wrap="none" lIns="0" tIns="0" rIns="0" bIns="0" rtlCol="0" anchor="t"/>
           <a:lstStyle/>
           <a:p>
-            <a:pPr marL="0" indent="0" algn="l">
+            <a:pPr algn="l" indent="0" marL="0">
               <a:lnSpc>
                 <a:spcPct val="100000"/>
               </a:lnSpc>
               <a:buNone/>
             </a:pPr>
             <a:r>
-              <a:rPr lang="en-US" sz="700" dirty="0">
+              <a:rPr lang="en-US" sz="650" dirty="0">
                 <a:solidFill>
                   <a:srgbClr val="333F70"/>
                 </a:solidFill>
@@ -7822,8 +8227,14 @@
               </a:rPr>
               <a:t>The proposed system is a </a:t>
             </a:r>
-            <a:r>
-              <a:rPr lang="en-US" sz="700" b="1" dirty="0">
+            <a:pPr algn="l" indent="0" marL="0">
+              <a:lnSpc>
+                <a:spcPct val="100000"/>
+              </a:lnSpc>
+              <a:buNone/>
+            </a:pPr>
+            <a:r>
+              <a:rPr lang="en-US" sz="650" b="1" dirty="0">
                 <a:solidFill>
                   <a:srgbClr val="333F70"/>
                 </a:solidFill>
@@ -7833,8 +8244,14 @@
               </a:rPr>
               <a:t>4-bit binary arithmetic calculator</a:t>
             </a:r>
-            <a:r>
-              <a:rPr lang="en-US" sz="700" dirty="0">
+            <a:pPr algn="l" indent="0" marL="0">
+              <a:lnSpc>
+                <a:spcPct val="100000"/>
+              </a:lnSpc>
+              <a:buNone/>
+            </a:pPr>
+            <a:r>
+              <a:rPr lang="en-US" sz="650" dirty="0">
                 <a:solidFill>
                   <a:srgbClr val="333F70"/>
                 </a:solidFill>
@@ -7844,7 +8261,7 @@
               </a:rPr>
               <a:t> that accepts two signed 4-bit operands and a 1-bit mode control signal, performs addition or subtraction using a unified adder/subtractor circuit, and outputs a 4-bit result plus a 1-bit overflow flag.</a:t>
             </a:r>
-            <a:endParaRPr lang="en-US" sz="700" dirty="0"/>
+            <a:endParaRPr lang="en-US" sz="650" dirty="0"/>
           </a:p>
         </p:txBody>
       </p:sp>
@@ -7856,8 +8273,8 @@
         </p:nvSpPr>
         <p:spPr>
           <a:xfrm>
-            <a:off x="661475" y="1208682"/>
-            <a:ext cx="5841836" cy="1284933"/>
+            <a:off x="661475" y="1208683"/>
+            <a:ext cx="5413736" cy="802878"/>
           </a:xfrm>
           <a:prstGeom prst="roundRect">
             <a:avLst>
@@ -7883,8 +8300,8 @@
         </p:nvSpPr>
         <p:spPr>
           <a:xfrm>
-            <a:off x="750471" y="1297682"/>
-            <a:ext cx="5649767" cy="206746"/>
+            <a:off x="750472" y="1297682"/>
+            <a:ext cx="5235742" cy="129183"/>
           </a:xfrm>
           <a:prstGeom prst="rect">
             <a:avLst/>
@@ -7896,14 +8313,14 @@
           <a:bodyPr wrap="none" lIns="0" tIns="0" rIns="0" bIns="0" rtlCol="0" anchor="t"/>
           <a:lstStyle/>
           <a:p>
-            <a:pPr marL="0" indent="0" algn="l">
+            <a:pPr algn="l" indent="0" marL="0">
               <a:lnSpc>
                 <a:spcPct val="104000"/>
               </a:lnSpc>
               <a:buNone/>
             </a:pPr>
             <a:r>
-              <a:rPr lang="en-US" sz="1000" b="1" dirty="0">
+              <a:rPr lang="en-US" sz="800" b="1" dirty="0">
                 <a:solidFill>
                   <a:srgbClr val="333F70"/>
                 </a:solidFill>
@@ -7925,8 +8342,8 @@
         </p:nvSpPr>
         <p:spPr>
           <a:xfrm>
-            <a:off x="750471" y="1451670"/>
-            <a:ext cx="5649767" cy="753620"/>
+            <a:off x="750472" y="1451670"/>
+            <a:ext cx="5235742" cy="470892"/>
           </a:xfrm>
           <a:prstGeom prst="rect">
             <a:avLst/>
@@ -7938,7 +8355,7 @@
           <a:bodyPr wrap="square" lIns="0" tIns="0" rIns="0" bIns="0" rtlCol="0" anchor="t"/>
           <a:lstStyle/>
           <a:p>
-            <a:pPr marL="0" indent="0" algn="l">
+            <a:pPr algn="l" indent="0" marL="0">
               <a:lnSpc>
                 <a:spcPct val="100000"/>
               </a:lnSpc>
@@ -7948,7 +8365,7 @@
               <a:buNone/>
             </a:pPr>
             <a:r>
-              <a:rPr lang="en-US" sz="800" b="1" dirty="0">
+              <a:rPr lang="en-US" sz="650" b="1" dirty="0">
                 <a:solidFill>
                   <a:srgbClr val="333F70"/>
                 </a:solidFill>
@@ -7958,8 +8375,17 @@
               </a:rPr>
               <a:t>A[3:0]</a:t>
             </a:r>
-            <a:r>
-              <a:rPr lang="en-US" sz="800" dirty="0">
+            <a:pPr algn="l" indent="0" marL="0">
+              <a:lnSpc>
+                <a:spcPct val="100000"/>
+              </a:lnSpc>
+              <a:spcAft>
+                <a:spcPts val="150"/>
+              </a:spcAft>
+              <a:buNone/>
+            </a:pPr>
+            <a:r>
+              <a:rPr lang="en-US" sz="650" dirty="0">
                 <a:solidFill>
                   <a:srgbClr val="333F70"/>
                 </a:solidFill>
@@ -7969,10 +8395,10 @@
               </a:rPr>
               <a:t> — First 4-bit operand</a:t>
             </a:r>
-            <a:endParaRPr lang="en-US" sz="800" dirty="0"/>
-          </a:p>
-          <a:p>
-            <a:pPr marL="0" indent="0" algn="l">
+            <a:endParaRPr lang="en-US" sz="650" dirty="0"/>
+          </a:p>
+          <a:p>
+            <a:pPr algn="l" indent="0" marL="0">
               <a:lnSpc>
                 <a:spcPct val="100000"/>
               </a:lnSpc>
@@ -7982,7 +8408,7 @@
               <a:buNone/>
             </a:pPr>
             <a:r>
-              <a:rPr lang="en-US" sz="800" b="1" dirty="0">
+              <a:rPr lang="en-US" sz="650" b="1" dirty="0">
                 <a:solidFill>
                   <a:srgbClr val="333F70"/>
                 </a:solidFill>
@@ -7992,8 +8418,17 @@
               </a:rPr>
               <a:t>B[3:0]</a:t>
             </a:r>
-            <a:r>
-              <a:rPr lang="en-US" sz="800" dirty="0">
+            <a:pPr algn="l" indent="0" marL="0">
+              <a:lnSpc>
+                <a:spcPct val="100000"/>
+              </a:lnSpc>
+              <a:spcAft>
+                <a:spcPts val="150"/>
+              </a:spcAft>
+              <a:buNone/>
+            </a:pPr>
+            <a:r>
+              <a:rPr lang="en-US" sz="650" dirty="0">
                 <a:solidFill>
                   <a:srgbClr val="333F70"/>
                 </a:solidFill>
@@ -8003,10 +8438,10 @@
               </a:rPr>
               <a:t> — Second 4-bit operand</a:t>
             </a:r>
-            <a:endParaRPr lang="en-US" sz="800" dirty="0"/>
-          </a:p>
-          <a:p>
-            <a:pPr marL="0" indent="0" algn="l">
+            <a:endParaRPr lang="en-US" sz="650" dirty="0"/>
+          </a:p>
+          <a:p>
+            <a:pPr algn="l" indent="0" marL="0">
               <a:lnSpc>
                 <a:spcPct val="100000"/>
               </a:lnSpc>
@@ -8016,7 +8451,7 @@
               <a:buNone/>
             </a:pPr>
             <a:r>
-              <a:rPr lang="en-US" sz="800" b="1" dirty="0">
+              <a:rPr lang="en-US" sz="650" b="1" dirty="0">
                 <a:solidFill>
                   <a:srgbClr val="333F70"/>
                 </a:solidFill>
@@ -8026,8 +8461,17 @@
               </a:rPr>
               <a:t>Mode</a:t>
             </a:r>
-            <a:r>
-              <a:rPr lang="en-US" sz="800" dirty="0">
+            <a:pPr algn="l" indent="0" marL="0">
+              <a:lnSpc>
+                <a:spcPct val="100000"/>
+              </a:lnSpc>
+              <a:spcAft>
+                <a:spcPts val="150"/>
+              </a:spcAft>
+              <a:buNone/>
+            </a:pPr>
+            <a:r>
+              <a:rPr lang="en-US" sz="650" dirty="0">
                 <a:solidFill>
                   <a:srgbClr val="333F70"/>
                 </a:solidFill>
@@ -8037,17 +8481,17 @@
               </a:rPr>
               <a:t> — Control bit: 0 = Add, 1 = Subtract</a:t>
             </a:r>
-            <a:endParaRPr lang="en-US" sz="800" dirty="0"/>
-          </a:p>
-          <a:p>
-            <a:pPr marL="0" indent="0" algn="l">
+            <a:endParaRPr lang="en-US" sz="650" dirty="0"/>
+          </a:p>
+          <a:p>
+            <a:pPr algn="l" indent="0" marL="0">
               <a:lnSpc>
                 <a:spcPct val="100000"/>
               </a:lnSpc>
               <a:buNone/>
             </a:pPr>
             <a:r>
-              <a:rPr lang="en-US" sz="800" dirty="0">
+              <a:rPr lang="en-US" sz="650" dirty="0">
                 <a:solidFill>
                   <a:srgbClr val="333F70"/>
                 </a:solidFill>
@@ -8057,8 +8501,14 @@
               </a:rPr>
               <a:t>Signed range: </a:t>
             </a:r>
-            <a:r>
-              <a:rPr lang="en-US" sz="800" b="1" dirty="0">
+            <a:pPr algn="l" indent="0" marL="0">
+              <a:lnSpc>
+                <a:spcPct val="100000"/>
+              </a:lnSpc>
+              <a:buNone/>
+            </a:pPr>
+            <a:r>
+              <a:rPr lang="en-US" sz="650" b="1" dirty="0">
                 <a:solidFill>
                   <a:srgbClr val="333F70"/>
                 </a:solidFill>
@@ -8068,8 +8518,14 @@
               </a:rPr>
               <a:t>−8 to +7</a:t>
             </a:r>
-            <a:r>
-              <a:rPr lang="en-US" sz="800" dirty="0">
+            <a:pPr algn="l" indent="0" marL="0">
+              <a:lnSpc>
+                <a:spcPct val="100000"/>
+              </a:lnSpc>
+              <a:buNone/>
+            </a:pPr>
+            <a:r>
+              <a:rPr lang="en-US" sz="650" dirty="0">
                 <a:solidFill>
                   <a:srgbClr val="333F70"/>
                 </a:solidFill>
@@ -8079,7 +8535,7 @@
               </a:rPr>
               <a:t> (two's complement)</a:t>
             </a:r>
-            <a:endParaRPr lang="en-US" sz="800" dirty="0"/>
+            <a:endParaRPr lang="en-US" sz="650" dirty="0"/>
           </a:p>
         </p:txBody>
       </p:sp>
@@ -8091,8 +8547,8 @@
         </p:nvSpPr>
         <p:spPr>
           <a:xfrm>
-            <a:off x="6116484" y="1208682"/>
-            <a:ext cx="5841836" cy="1284933"/>
+            <a:off x="6116484" y="1208683"/>
+            <a:ext cx="5413736" cy="802878"/>
           </a:xfrm>
           <a:prstGeom prst="roundRect">
             <a:avLst>
@@ -8118,8 +8574,8 @@
         </p:nvSpPr>
         <p:spPr>
           <a:xfrm>
-            <a:off x="6205480" y="1297682"/>
-            <a:ext cx="5649767" cy="206746"/>
+            <a:off x="6205481" y="1297682"/>
+            <a:ext cx="5235742" cy="129183"/>
           </a:xfrm>
           <a:prstGeom prst="rect">
             <a:avLst/>
@@ -8131,14 +8587,14 @@
           <a:bodyPr wrap="none" lIns="0" tIns="0" rIns="0" bIns="0" rtlCol="0" anchor="t"/>
           <a:lstStyle/>
           <a:p>
-            <a:pPr marL="0" indent="0" algn="l">
+            <a:pPr algn="l" indent="0" marL="0">
               <a:lnSpc>
                 <a:spcPct val="104000"/>
               </a:lnSpc>
               <a:buNone/>
             </a:pPr>
             <a:r>
-              <a:rPr lang="en-US" sz="1000" b="1" dirty="0">
+              <a:rPr lang="en-US" sz="800" b="1" dirty="0">
                 <a:solidFill>
                   <a:srgbClr val="333F70"/>
                 </a:solidFill>
@@ -8160,8 +8616,8 @@
         </p:nvSpPr>
         <p:spPr>
           <a:xfrm>
-            <a:off x="6205480" y="1451670"/>
-            <a:ext cx="5663844" cy="513404"/>
+            <a:off x="6205481" y="1451670"/>
+            <a:ext cx="5235742" cy="198239"/>
           </a:xfrm>
           <a:prstGeom prst="rect">
             <a:avLst/>
@@ -8175,14 +8631,14 @@
           </a:bodyPr>
           <a:lstStyle/>
           <a:p>
-            <a:pPr marL="0" indent="0" algn="l">
+            <a:pPr algn="l" indent="0" marL="0">
               <a:lnSpc>
                 <a:spcPct val="100000"/>
               </a:lnSpc>
               <a:buNone/>
             </a:pPr>
             <a:r>
-              <a:rPr lang="en-US" sz="1000" dirty="0">
+              <a:rPr lang="en-US" sz="650" dirty="0">
                 <a:solidFill>
                   <a:srgbClr val="333F70"/>
                 </a:solidFill>
@@ -8192,8 +8648,14 @@
               </a:rPr>
               <a:t>Subtraction is computed as </a:t>
             </a:r>
-            <a:r>
-              <a:rPr lang="en-US" sz="1000" b="1" dirty="0">
+            <a:pPr algn="l" indent="0" marL="0">
+              <a:lnSpc>
+                <a:spcPct val="100000"/>
+              </a:lnSpc>
+              <a:buNone/>
+            </a:pPr>
+            <a:r>
+              <a:rPr lang="en-US" sz="650" b="1" dirty="0">
                 <a:solidFill>
                   <a:srgbClr val="333F70"/>
                 </a:solidFill>
@@ -8203,8 +8665,14 @@
               </a:rPr>
               <a:t>A − B = A + (−B)</a:t>
             </a:r>
-            <a:r>
-              <a:rPr lang="en-US" sz="1000" dirty="0">
+            <a:pPr algn="l" indent="0" marL="0">
+              <a:lnSpc>
+                <a:spcPct val="100000"/>
+              </a:lnSpc>
+              <a:buNone/>
+            </a:pPr>
+            <a:r>
+              <a:rPr lang="en-US" sz="650" dirty="0">
                 <a:solidFill>
                   <a:srgbClr val="333F70"/>
                 </a:solidFill>
@@ -8214,7 +8682,7 @@
               </a:rPr>
               <a:t>. Negation of B is achieved by XOR-ing each bit of B with the Mode signal, then injecting Mode as the initial carry-in — a clean one-circuit solution for both operations.</a:t>
             </a:r>
-            <a:endParaRPr lang="en-US" sz="1000" dirty="0"/>
+            <a:endParaRPr lang="en-US" sz="650" dirty="0"/>
           </a:p>
         </p:txBody>
       </p:sp>
@@ -8227,7 +8695,7 @@
         <p:spPr>
           <a:xfrm>
             <a:off x="661475" y="2052836"/>
-            <a:ext cx="5841836" cy="1086604"/>
+            <a:ext cx="5413736" cy="678954"/>
           </a:xfrm>
           <a:prstGeom prst="roundRect">
             <a:avLst>
@@ -8253,8 +8721,8 @@
         </p:nvSpPr>
         <p:spPr>
           <a:xfrm>
-            <a:off x="750471" y="2141835"/>
-            <a:ext cx="5649767" cy="206746"/>
+            <a:off x="750472" y="2141835"/>
+            <a:ext cx="5235742" cy="129183"/>
           </a:xfrm>
           <a:prstGeom prst="rect">
             <a:avLst/>
@@ -8266,14 +8734,14 @@
           <a:bodyPr wrap="none" lIns="0" tIns="0" rIns="0" bIns="0" rtlCol="0" anchor="t"/>
           <a:lstStyle/>
           <a:p>
-            <a:pPr marL="0" indent="0" algn="l">
+            <a:pPr algn="l" indent="0" marL="0">
               <a:lnSpc>
                 <a:spcPct val="104000"/>
               </a:lnSpc>
               <a:buNone/>
             </a:pPr>
             <a:r>
-              <a:rPr lang="en-US" sz="1100" b="1" dirty="0">
+              <a:rPr lang="en-US" sz="800" b="1" dirty="0">
                 <a:solidFill>
                   <a:srgbClr val="333F70"/>
                 </a:solidFill>
@@ -8295,8 +8763,8 @@
         </p:nvSpPr>
         <p:spPr>
           <a:xfrm>
-            <a:off x="704629" y="2377770"/>
-            <a:ext cx="5238972" cy="584909"/>
+            <a:off x="750472" y="2295823"/>
+            <a:ext cx="5235742" cy="322163"/>
           </a:xfrm>
           <a:prstGeom prst="rect">
             <a:avLst/>
@@ -8306,11 +8774,11 @@
         </p:spPr>
         <p:txBody>
           <a:bodyPr wrap="square" lIns="0" tIns="0" rIns="0" bIns="0" rtlCol="0" anchor="t">
-            <a:noAutofit/>
+            <a:normAutofit/>
           </a:bodyPr>
           <a:lstStyle/>
           <a:p>
-            <a:pPr marL="0" indent="0" algn="l">
+            <a:pPr algn="l" indent="0" marL="0">
               <a:lnSpc>
                 <a:spcPct val="100000"/>
               </a:lnSpc>
@@ -8320,7 +8788,7 @@
               <a:buNone/>
             </a:pPr>
             <a:r>
-              <a:rPr lang="en-US" sz="1000" dirty="0">
+              <a:rPr lang="en-US" sz="650" dirty="0">
                 <a:solidFill>
                   <a:srgbClr val="333F70"/>
                 </a:solidFill>
@@ -8330,8 +8798,17 @@
               </a:rPr>
               <a:t>A dedicated XOR gate compares the </a:t>
             </a:r>
-            <a:r>
-              <a:rPr lang="en-US" sz="1000" b="1" dirty="0">
+            <a:pPr algn="l" indent="0" marL="0">
+              <a:lnSpc>
+                <a:spcPct val="100000"/>
+              </a:lnSpc>
+              <a:spcAft>
+                <a:spcPts val="150"/>
+              </a:spcAft>
+              <a:buNone/>
+            </a:pPr>
+            <a:r>
+              <a:rPr lang="en-US" sz="650" b="1" dirty="0">
                 <a:solidFill>
                   <a:srgbClr val="333F70"/>
                 </a:solidFill>
@@ -8341,8 +8818,17 @@
               </a:rPr>
               <a:t>carry-in and carry-out of the MSB</a:t>
             </a:r>
-            <a:r>
-              <a:rPr lang="en-US" sz="1000" dirty="0">
+            <a:pPr algn="l" indent="0" marL="0">
+              <a:lnSpc>
+                <a:spcPct val="100000"/>
+              </a:lnSpc>
+              <a:spcAft>
+                <a:spcPts val="150"/>
+              </a:spcAft>
+              <a:buNone/>
+            </a:pPr>
+            <a:r>
+              <a:rPr lang="en-US" sz="650" dirty="0">
                 <a:solidFill>
                   <a:srgbClr val="333F70"/>
                 </a:solidFill>
@@ -8350,41 +8836,19 @@
                 <a:ea typeface="Open Sans" pitchFamily="34" charset="-122"/>
                 <a:cs typeface="Open Sans" pitchFamily="34" charset="-120"/>
               </a:rPr>
-              <a:t> (bit 3) stage. </a:t>
-            </a:r>
-          </a:p>
-          <a:p>
-            <a:pPr marL="0" indent="0" algn="l">
+              <a:t> (bit 3) stage. Overflow flag is asserted when these differ — indicating the result has exceeded the signed representable range.</a:t>
+            </a:r>
+            <a:endParaRPr lang="en-US" sz="650" dirty="0"/>
+          </a:p>
+          <a:p>
+            <a:pPr algn="l" indent="0" marL="0">
               <a:lnSpc>
                 <a:spcPct val="100000"/>
               </a:lnSpc>
-              <a:spcAft>
-                <a:spcPts val="150"/>
-              </a:spcAft>
-              <a:buNone/>
-            </a:pPr>
-            <a:r>
-              <a:rPr lang="en-US" sz="1000" dirty="0">
-                <a:solidFill>
-                  <a:srgbClr val="333F70"/>
-                </a:solidFill>
-                <a:latin typeface="Open Sans" pitchFamily="34" charset="0"/>
-                <a:ea typeface="Open Sans" pitchFamily="34" charset="-122"/>
-                <a:cs typeface="Open Sans" pitchFamily="34" charset="-120"/>
-              </a:rPr>
-              <a:t>Overflowing flag is asserted when these differ — indicating the result has exceeded the signed representable range.</a:t>
-            </a:r>
-            <a:endParaRPr lang="en-US" sz="1000" dirty="0"/>
-          </a:p>
-          <a:p>
-            <a:pPr marL="0" indent="0" algn="l">
-              <a:lnSpc>
-                <a:spcPct val="100000"/>
-              </a:lnSpc>
-              <a:buNone/>
-            </a:pPr>
-            <a:r>
-              <a:rPr lang="en-US" sz="1000" b="1" dirty="0">
+              <a:buNone/>
+            </a:pPr>
+            <a:r>
+              <a:rPr lang="en-US" sz="650" b="1" dirty="0">
                 <a:solidFill>
                   <a:srgbClr val="333F70"/>
                 </a:solidFill>
@@ -8394,7 +8858,7 @@
               </a:rPr>
               <a:t>OVF = Cin,MSB XOR Cout,MSB</a:t>
             </a:r>
-            <a:endParaRPr lang="en-US" sz="1000" dirty="0"/>
+            <a:endParaRPr lang="en-US" sz="650" dirty="0"/>
           </a:p>
         </p:txBody>
       </p:sp>
@@ -8407,7 +8871,7 @@
         <p:spPr>
           <a:xfrm>
             <a:off x="6116484" y="2052836"/>
-            <a:ext cx="5841836" cy="1086604"/>
+            <a:ext cx="5413736" cy="678954"/>
           </a:xfrm>
           <a:prstGeom prst="roundRect">
             <a:avLst>
@@ -8424,13 +8888,6 @@
             <a:prstDash val="solid"/>
           </a:ln>
         </p:spPr>
-        <p:txBody>
-          <a:bodyPr/>
-          <a:lstStyle/>
-          <a:p>
-            <a:endParaRPr lang="en-IN" dirty="0"/>
-          </a:p>
-        </p:txBody>
       </p:sp>
       <p:sp>
         <p:nvSpPr>
@@ -8440,8 +8897,8 @@
         </p:nvSpPr>
         <p:spPr>
           <a:xfrm>
-            <a:off x="6205480" y="2141835"/>
-            <a:ext cx="5649767" cy="206746"/>
+            <a:off x="6205481" y="2141835"/>
+            <a:ext cx="5235742" cy="129183"/>
           </a:xfrm>
           <a:prstGeom prst="rect">
             <a:avLst/>
@@ -8453,14 +8910,14 @@
           <a:bodyPr wrap="none" lIns="0" tIns="0" rIns="0" bIns="0" rtlCol="0" anchor="t"/>
           <a:lstStyle/>
           <a:p>
-            <a:pPr marL="0" indent="0" algn="l">
+            <a:pPr algn="l" indent="0" marL="0">
               <a:lnSpc>
                 <a:spcPct val="104000"/>
               </a:lnSpc>
               <a:buNone/>
             </a:pPr>
             <a:r>
-              <a:rPr lang="en-US" sz="1050" b="1" dirty="0">
+              <a:rPr lang="en-US" sz="800" b="1" dirty="0">
                 <a:solidFill>
                   <a:srgbClr val="333F70"/>
                 </a:solidFill>
@@ -8482,8 +8939,8 @@
         </p:nvSpPr>
         <p:spPr>
           <a:xfrm>
-            <a:off x="6212518" y="2407388"/>
-            <a:ext cx="5649767" cy="555291"/>
+            <a:off x="6205481" y="2295823"/>
+            <a:ext cx="5235742" cy="346968"/>
           </a:xfrm>
           <a:prstGeom prst="rect">
             <a:avLst/>
@@ -8495,7 +8952,7 @@
           <a:bodyPr wrap="square" lIns="0" tIns="0" rIns="0" bIns="0" rtlCol="0" anchor="t"/>
           <a:lstStyle/>
           <a:p>
-            <a:pPr marL="0" indent="0" algn="l">
+            <a:pPr algn="l" indent="0" marL="0">
               <a:lnSpc>
                 <a:spcPct val="100000"/>
               </a:lnSpc>
@@ -8505,7 +8962,7 @@
               <a:buNone/>
             </a:pPr>
             <a:r>
-              <a:rPr lang="en-US" sz="1000" b="1" dirty="0">
+              <a:rPr lang="en-US" sz="650" b="1" dirty="0">
                 <a:solidFill>
                   <a:srgbClr val="333F70"/>
                 </a:solidFill>
@@ -8515,8 +8972,17 @@
               </a:rPr>
               <a:t>Result[3:0]</a:t>
             </a:r>
-            <a:r>
-              <a:rPr lang="en-US" sz="1000" dirty="0">
+            <a:pPr algn="l" indent="0" marL="0">
+              <a:lnSpc>
+                <a:spcPct val="100000"/>
+              </a:lnSpc>
+              <a:spcAft>
+                <a:spcPts val="150"/>
+              </a:spcAft>
+              <a:buNone/>
+            </a:pPr>
+            <a:r>
+              <a:rPr lang="en-US" sz="650" dirty="0">
                 <a:solidFill>
                   <a:srgbClr val="333F70"/>
                 </a:solidFill>
@@ -8526,10 +8992,10 @@
               </a:rPr>
               <a:t> — 4-bit arithmetic result</a:t>
             </a:r>
-            <a:endParaRPr lang="en-US" sz="1000" dirty="0"/>
-          </a:p>
-          <a:p>
-            <a:pPr marL="0" indent="0" algn="l">
+            <a:endParaRPr lang="en-US" sz="650" dirty="0"/>
+          </a:p>
+          <a:p>
+            <a:pPr algn="l" indent="0" marL="0">
               <a:lnSpc>
                 <a:spcPct val="100000"/>
               </a:lnSpc>
@@ -8539,7 +9005,7 @@
               <a:buNone/>
             </a:pPr>
             <a:r>
-              <a:rPr lang="en-US" sz="1000" b="1" dirty="0">
+              <a:rPr lang="en-US" sz="650" b="1" dirty="0">
                 <a:solidFill>
                   <a:srgbClr val="333F70"/>
                 </a:solidFill>
@@ -8549,8 +9015,17 @@
               </a:rPr>
               <a:t>OVF</a:t>
             </a:r>
-            <a:r>
-              <a:rPr lang="en-US" sz="1000" dirty="0">
+            <a:pPr algn="l" indent="0" marL="0">
+              <a:lnSpc>
+                <a:spcPct val="100000"/>
+              </a:lnSpc>
+              <a:spcAft>
+                <a:spcPts val="150"/>
+              </a:spcAft>
+              <a:buNone/>
+            </a:pPr>
+            <a:r>
+              <a:rPr lang="en-US" sz="650" dirty="0">
                 <a:solidFill>
                   <a:srgbClr val="333F70"/>
                 </a:solidFill>
@@ -8558,10 +9033,19 @@
                 <a:ea typeface="Open Sans" pitchFamily="34" charset="-122"/>
                 <a:cs typeface="Open Sans" pitchFamily="34" charset="-120"/>
               </a:rPr>
-              <a:t> — 1-bit overflow </a:t>
-            </a:r>
-            <a:r>
-              <a:rPr lang="en-US" sz="1200" dirty="0">
+              <a:t> — 1-bit overflow flag</a:t>
+            </a:r>
+            <a:endParaRPr lang="en-US" sz="650" dirty="0"/>
+          </a:p>
+          <a:p>
+            <a:pPr algn="l" indent="0" marL="0">
+              <a:lnSpc>
+                <a:spcPct val="100000"/>
+              </a:lnSpc>
+              <a:buNone/>
+            </a:pPr>
+            <a:r>
+              <a:rPr lang="en-US" sz="650" dirty="0">
                 <a:solidFill>
                   <a:srgbClr val="333F70"/>
                 </a:solidFill>
@@ -8569,26 +9053,6 @@
                 <a:ea typeface="Open Sans" pitchFamily="34" charset="-122"/>
                 <a:cs typeface="Open Sans" pitchFamily="34" charset="-120"/>
               </a:rPr>
-              <a:t>flag</a:t>
-            </a:r>
-            <a:endParaRPr lang="en-US" sz="1200" dirty="0"/>
-          </a:p>
-          <a:p>
-            <a:pPr marL="0" indent="0" algn="l">
-              <a:lnSpc>
-                <a:spcPct val="100000"/>
-              </a:lnSpc>
-              <a:buNone/>
-            </a:pPr>
-            <a:r>
-              <a:rPr lang="en-US" sz="1000" dirty="0">
-                <a:solidFill>
-                  <a:srgbClr val="333F70"/>
-                </a:solidFill>
-                <a:latin typeface="Open Sans" pitchFamily="34" charset="0"/>
-                <a:ea typeface="Open Sans" pitchFamily="34" charset="-122"/>
-                <a:cs typeface="Open Sans" pitchFamily="34" charset="-120"/>
-              </a:rPr>
               <a:t>Gate-level implementation using Boolean sum-of-products expressions throughout</a:t>
             </a:r>
             <a:endParaRPr lang="en-US" sz="650" dirty="0"/>
@@ -8597,22 +9061,22 @@
       </p:sp>
       <p:pic>
         <p:nvPicPr>
-          <p:cNvPr id="19" name="Image 0" descr="preencoded.png"/>
+          <p:cNvPr id="19" name="Image 0" descr="preencoded.png">    </p:cNvPr>
           <p:cNvPicPr>
             <a:picLocks noChangeAspect="1"/>
           </p:cNvPicPr>
           <p:nvPr/>
         </p:nvPicPr>
         <p:blipFill>
-          <a:blip r:embed="rId3"/>
+          <a:blip r:embed="rId1"/>
           <a:stretch>
             <a:fillRect/>
           </a:stretch>
         </p:blipFill>
         <p:spPr>
           <a:xfrm>
-            <a:off x="661475" y="2975794"/>
-            <a:ext cx="9488365" cy="4091671"/>
+            <a:off x="706221" y="2778224"/>
+            <a:ext cx="10779153" cy="4648299"/>
           </a:xfrm>
           <a:prstGeom prst="rect">
             <a:avLst/>
@@ -8627,7 +9091,7 @@
         </p:nvSpPr>
         <p:spPr>
           <a:xfrm>
-            <a:off x="1290320" y="6308007"/>
+            <a:off x="1431583" y="6545032"/>
             <a:ext cx="2445408" cy="305684"/>
           </a:xfrm>
           <a:prstGeom prst="rect">
@@ -8640,7 +9104,7 @@
           <a:bodyPr wrap="none" lIns="0" tIns="0" rIns="0" bIns="0" rtlCol="0" anchor="t"/>
           <a:lstStyle/>
           <a:p>
-            <a:pPr marL="0" indent="0" algn="l">
+            <a:pPr algn="l" indent="0" marL="0">
               <a:lnSpc>
                 <a:spcPct val="104000"/>
               </a:lnSpc>
@@ -8669,7 +9133,7 @@
         </p:nvSpPr>
         <p:spPr>
           <a:xfrm>
-            <a:off x="1290320" y="5310263"/>
+            <a:off x="1431583" y="5469026"/>
             <a:ext cx="2445408" cy="305684"/>
           </a:xfrm>
           <a:prstGeom prst="rect">
@@ -8682,7 +9146,7 @@
           <a:bodyPr wrap="none" lIns="0" tIns="0" rIns="0" bIns="0" rtlCol="0" anchor="t"/>
           <a:lstStyle/>
           <a:p>
-            <a:pPr marL="0" indent="0" algn="l">
+            <a:pPr algn="l" indent="0" marL="0">
               <a:lnSpc>
                 <a:spcPct val="104000"/>
               </a:lnSpc>
@@ -8711,7 +9175,7 @@
         </p:nvSpPr>
         <p:spPr>
           <a:xfrm>
-            <a:off x="1290320" y="4312520"/>
+            <a:off x="1431583" y="4403889"/>
             <a:ext cx="2445408" cy="305683"/>
           </a:xfrm>
           <a:prstGeom prst="rect">
@@ -8724,7 +9188,7 @@
           <a:bodyPr wrap="none" lIns="0" tIns="0" rIns="0" bIns="0" rtlCol="0" anchor="t"/>
           <a:lstStyle/>
           <a:p>
-            <a:pPr marL="0" indent="0" algn="l">
+            <a:pPr algn="l" indent="0" marL="0">
               <a:lnSpc>
                 <a:spcPct val="104000"/>
               </a:lnSpc>
@@ -8753,8 +9217,8 @@
         </p:nvSpPr>
         <p:spPr>
           <a:xfrm>
-            <a:off x="1290320" y="3267344"/>
-            <a:ext cx="2586671" cy="443326"/>
+            <a:off x="1431583" y="3327882"/>
+            <a:ext cx="2445408" cy="305684"/>
           </a:xfrm>
           <a:prstGeom prst="rect">
             <a:avLst/>
@@ -8766,7 +9230,7 @@
           <a:bodyPr wrap="none" lIns="0" tIns="0" rIns="0" bIns="0" rtlCol="0" anchor="t"/>
           <a:lstStyle/>
           <a:p>
-            <a:pPr marL="0" indent="0" algn="l">
+            <a:pPr algn="l" indent="0" marL="0">
               <a:lnSpc>
                 <a:spcPct val="104000"/>
               </a:lnSpc>
@@ -8855,7 +9319,7 @@
           <a:bodyPr wrap="none" lIns="0" tIns="0" rIns="0" bIns="0" rtlCol="0" anchor="t"/>
           <a:lstStyle/>
           <a:p>
-            <a:pPr marL="0" indent="0" algn="l">
+            <a:pPr algn="l" indent="0" marL="0">
               <a:lnSpc>
                 <a:spcPct val="96000"/>
               </a:lnSpc>
@@ -8897,7 +9361,7 @@
           <a:bodyPr wrap="none" lIns="0" tIns="0" rIns="0" bIns="0" rtlCol="0" anchor="t"/>
           <a:lstStyle/>
           <a:p>
-            <a:pPr marL="0" indent="0" algn="l">
+            <a:pPr algn="l" indent="0" marL="0">
               <a:lnSpc>
                 <a:spcPct val="104000"/>
               </a:lnSpc>
@@ -8939,7 +9403,7 @@
           <a:bodyPr wrap="none" lIns="0" tIns="0" rIns="0" bIns="0" rtlCol="0" anchor="t"/>
           <a:lstStyle/>
           <a:p>
-            <a:pPr marL="0" indent="0" algn="l">
+            <a:pPr algn="l" indent="0" marL="0">
               <a:lnSpc>
                 <a:spcPct val="104000"/>
               </a:lnSpc>
@@ -8981,7 +9445,7 @@
           <a:bodyPr wrap="none" lIns="0" tIns="0" rIns="0" bIns="0" rtlCol="0" anchor="ctr"/>
           <a:lstStyle/>
           <a:p>
-            <a:pPr marL="0" indent="0" algn="l">
+            <a:pPr algn="l" indent="0" marL="0">
               <a:lnSpc>
                 <a:spcPct val="100000"/>
               </a:lnSpc>
@@ -9043,7 +9507,7 @@
           <a:bodyPr wrap="none" lIns="0" tIns="0" rIns="0" bIns="0" rtlCol="0" anchor="t"/>
           <a:lstStyle/>
           <a:p>
-            <a:pPr marL="0" indent="0" algn="l">
+            <a:pPr algn="l" indent="0" marL="0">
               <a:lnSpc>
                 <a:spcPct val="104000"/>
               </a:lnSpc>
@@ -9087,7 +9551,7 @@
           </a:bodyPr>
           <a:lstStyle/>
           <a:p>
-            <a:pPr marL="0" indent="0" algn="l">
+            <a:pPr algn="l" indent="0" marL="0">
               <a:lnSpc>
                 <a:spcPct val="112000"/>
               </a:lnSpc>
@@ -9104,6 +9568,12 @@
               </a:rPr>
               <a:t>Two 4-bit input registers hold operands </a:t>
             </a:r>
+            <a:pPr algn="l" indent="0" marL="0">
+              <a:lnSpc>
+                <a:spcPct val="112000"/>
+              </a:lnSpc>
+              <a:buNone/>
+            </a:pPr>
             <a:r>
               <a:rPr lang="en-US" sz="850" b="1" dirty="0">
                 <a:solidFill>
@@ -9115,6 +9585,12 @@
               </a:rPr>
               <a:t>A[3:0]</a:t>
             </a:r>
+            <a:pPr algn="l" indent="0" marL="0">
+              <a:lnSpc>
+                <a:spcPct val="112000"/>
+              </a:lnSpc>
+              <a:buNone/>
+            </a:pPr>
             <a:r>
               <a:rPr lang="en-US" sz="850" dirty="0">
                 <a:solidFill>
@@ -9126,6 +9602,12 @@
               </a:rPr>
               <a:t> and </a:t>
             </a:r>
+            <a:pPr algn="l" indent="0" marL="0">
+              <a:lnSpc>
+                <a:spcPct val="112000"/>
+              </a:lnSpc>
+              <a:buNone/>
+            </a:pPr>
             <a:r>
               <a:rPr lang="en-US" sz="850" b="1" dirty="0">
                 <a:solidFill>
@@ -9137,6 +9619,12 @@
               </a:rPr>
               <a:t>B[3:0]</a:t>
             </a:r>
+            <a:pPr algn="l" indent="0" marL="0">
+              <a:lnSpc>
+                <a:spcPct val="112000"/>
+              </a:lnSpc>
+              <a:buNone/>
+            </a:pPr>
             <a:r>
               <a:rPr lang="en-US" sz="850" dirty="0">
                 <a:solidFill>
@@ -9148,6 +9636,12 @@
               </a:rPr>
               <a:t>. A single </a:t>
             </a:r>
+            <a:pPr algn="l" indent="0" marL="0">
+              <a:lnSpc>
+                <a:spcPct val="112000"/>
+              </a:lnSpc>
+              <a:buNone/>
+            </a:pPr>
             <a:r>
               <a:rPr lang="en-US" sz="850" b="1" dirty="0">
                 <a:solidFill>
@@ -9159,6 +9653,12 @@
               </a:rPr>
               <a:t>Mode</a:t>
             </a:r>
+            <a:pPr algn="l" indent="0" marL="0">
+              <a:lnSpc>
+                <a:spcPct val="112000"/>
+              </a:lnSpc>
+              <a:buNone/>
+            </a:pPr>
             <a:r>
               <a:rPr lang="en-US" sz="850" dirty="0">
                 <a:solidFill>
@@ -9195,7 +9695,7 @@
           <a:bodyPr wrap="none" lIns="0" tIns="0" rIns="0" bIns="0" rtlCol="0" anchor="ctr"/>
           <a:lstStyle/>
           <a:p>
-            <a:pPr marL="0" indent="0" algn="l">
+            <a:pPr algn="l" indent="0" marL="0">
               <a:lnSpc>
                 <a:spcPct val="100000"/>
               </a:lnSpc>
@@ -9257,7 +9757,7 @@
           <a:bodyPr wrap="none" lIns="0" tIns="0" rIns="0" bIns="0" rtlCol="0" anchor="t"/>
           <a:lstStyle/>
           <a:p>
-            <a:pPr marL="0" indent="0" algn="l">
+            <a:pPr algn="l" indent="0" marL="0">
               <a:lnSpc>
                 <a:spcPct val="104000"/>
               </a:lnSpc>
@@ -9301,7 +9801,7 @@
           </a:bodyPr>
           <a:lstStyle/>
           <a:p>
-            <a:pPr marL="0" indent="0" algn="l">
+            <a:pPr algn="l" indent="0" marL="0">
               <a:lnSpc>
                 <a:spcPct val="112000"/>
               </a:lnSpc>
@@ -9318,6 +9818,12 @@
               </a:rPr>
               <a:t>Four XOR gates on B inputs: each </a:t>
             </a:r>
+            <a:pPr algn="l" indent="0" marL="0">
+              <a:lnSpc>
+                <a:spcPct val="112000"/>
+              </a:lnSpc>
+              <a:buNone/>
+            </a:pPr>
             <a:r>
               <a:rPr lang="en-US" sz="850" b="1" dirty="0">
                 <a:solidFill>
@@ -9329,6 +9835,12 @@
               </a:rPr>
               <a:t>B[i] XOR Mode</a:t>
             </a:r>
+            <a:pPr algn="l" indent="0" marL="0">
+              <a:lnSpc>
+                <a:spcPct val="112000"/>
+              </a:lnSpc>
+              <a:buNone/>
+            </a:pPr>
             <a:r>
               <a:rPr lang="en-US" sz="850" dirty="0">
                 <a:solidFill>
@@ -9365,7 +9877,7 @@
           <a:bodyPr wrap="none" lIns="0" tIns="0" rIns="0" bIns="0" rtlCol="0" anchor="ctr"/>
           <a:lstStyle/>
           <a:p>
-            <a:pPr marL="0" indent="0" algn="l">
+            <a:pPr algn="l" indent="0" marL="0">
               <a:lnSpc>
                 <a:spcPct val="100000"/>
               </a:lnSpc>
@@ -9427,7 +9939,7 @@
           <a:bodyPr wrap="none" lIns="0" tIns="0" rIns="0" bIns="0" rtlCol="0" anchor="t"/>
           <a:lstStyle/>
           <a:p>
-            <a:pPr marL="0" indent="0" algn="l">
+            <a:pPr algn="l" indent="0" marL="0">
               <a:lnSpc>
                 <a:spcPct val="104000"/>
               </a:lnSpc>
@@ -9471,7 +9983,7 @@
           </a:bodyPr>
           <a:lstStyle/>
           <a:p>
-            <a:pPr marL="0" indent="0" algn="l">
+            <a:pPr algn="l" indent="0" marL="0">
               <a:lnSpc>
                 <a:spcPct val="112000"/>
               </a:lnSpc>
@@ -9513,7 +10025,7 @@
           <a:bodyPr wrap="none" lIns="0" tIns="0" rIns="0" bIns="0" rtlCol="0" anchor="ctr"/>
           <a:lstStyle/>
           <a:p>
-            <a:pPr marL="0" indent="0" algn="l">
+            <a:pPr algn="l" indent="0" marL="0">
               <a:lnSpc>
                 <a:spcPct val="100000"/>
               </a:lnSpc>
@@ -9575,7 +10087,7 @@
           <a:bodyPr wrap="none" lIns="0" tIns="0" rIns="0" bIns="0" rtlCol="0" anchor="t"/>
           <a:lstStyle/>
           <a:p>
-            <a:pPr marL="0" indent="0" algn="l">
+            <a:pPr algn="l" indent="0" marL="0">
               <a:lnSpc>
                 <a:spcPct val="104000"/>
               </a:lnSpc>
@@ -9619,7 +10131,7 @@
           </a:bodyPr>
           <a:lstStyle/>
           <a:p>
-            <a:pPr marL="0" indent="0" algn="l">
+            <a:pPr algn="l" indent="0" marL="0">
               <a:lnSpc>
                 <a:spcPct val="112000"/>
               </a:lnSpc>
@@ -9636,6 +10148,12 @@
               </a:rPr>
               <a:t>Single XOR gate: </a:t>
             </a:r>
+            <a:pPr algn="l" indent="0" marL="0">
+              <a:lnSpc>
+                <a:spcPct val="112000"/>
+              </a:lnSpc>
+              <a:buNone/>
+            </a:pPr>
             <a:r>
               <a:rPr lang="en-US" sz="850" b="1" dirty="0">
                 <a:solidFill>
@@ -9647,6 +10165,12 @@
               </a:rPr>
               <a:t>OVF = Cin,3 XOR Cout,3</a:t>
             </a:r>
+            <a:pPr algn="l" indent="0" marL="0">
+              <a:lnSpc>
+                <a:spcPct val="112000"/>
+              </a:lnSpc>
+              <a:buNone/>
+            </a:pPr>
             <a:r>
               <a:rPr lang="en-US" sz="850" dirty="0">
                 <a:solidFill>
@@ -9683,7 +10207,7 @@
           <a:bodyPr wrap="none" lIns="0" tIns="0" rIns="0" bIns="0" rtlCol="0" anchor="ctr"/>
           <a:lstStyle/>
           <a:p>
-            <a:pPr marL="0" indent="0" algn="l">
+            <a:pPr algn="l" indent="0" marL="0">
               <a:lnSpc>
                 <a:spcPct val="100000"/>
               </a:lnSpc>
@@ -9745,7 +10269,7 @@
           <a:bodyPr wrap="none" lIns="0" tIns="0" rIns="0" bIns="0" rtlCol="0" anchor="t"/>
           <a:lstStyle/>
           <a:p>
-            <a:pPr marL="0" indent="0" algn="l">
+            <a:pPr algn="l" indent="0" marL="0">
               <a:lnSpc>
                 <a:spcPct val="104000"/>
               </a:lnSpc>
@@ -9787,7 +10311,7 @@
           <a:bodyPr wrap="none" lIns="0" tIns="0" rIns="0" bIns="0" rtlCol="0" anchor="t"/>
           <a:lstStyle/>
           <a:p>
-            <a:pPr marL="0" indent="0" algn="l">
+            <a:pPr algn="l" indent="0" marL="0">
               <a:lnSpc>
                 <a:spcPct val="112000"/>
               </a:lnSpc>
@@ -9804,6 +10328,12 @@
               </a:rPr>
               <a:t>4-bit result </a:t>
             </a:r>
+            <a:pPr algn="l" indent="0" marL="0">
+              <a:lnSpc>
+                <a:spcPct val="112000"/>
+              </a:lnSpc>
+              <a:buNone/>
+            </a:pPr>
             <a:r>
               <a:rPr lang="en-US" sz="850" b="1" dirty="0">
                 <a:solidFill>
@@ -9815,6 +10345,12 @@
               </a:rPr>
               <a:t>S[3:0]</a:t>
             </a:r>
+            <a:pPr algn="l" indent="0" marL="0">
+              <a:lnSpc>
+                <a:spcPct val="112000"/>
+              </a:lnSpc>
+              <a:buNone/>
+            </a:pPr>
             <a:r>
               <a:rPr lang="en-US" sz="850" dirty="0">
                 <a:solidFill>
@@ -9826,6 +10362,12 @@
               </a:rPr>
               <a:t> and 1-bit overflow flag </a:t>
             </a:r>
+            <a:pPr algn="l" indent="0" marL="0">
+              <a:lnSpc>
+                <a:spcPct val="112000"/>
+              </a:lnSpc>
+              <a:buNone/>
+            </a:pPr>
             <a:r>
               <a:rPr lang="en-US" sz="850" b="1" dirty="0">
                 <a:solidFill>
@@ -9837,6 +10379,12 @@
               </a:rPr>
               <a:t>OVF</a:t>
             </a:r>
+            <a:pPr algn="l" indent="0" marL="0">
+              <a:lnSpc>
+                <a:spcPct val="112000"/>
+              </a:lnSpc>
+              <a:buNone/>
+            </a:pPr>
             <a:r>
               <a:rPr lang="en-US" sz="850" dirty="0">
                 <a:solidFill>
@@ -9873,7 +10421,7 @@
           <a:bodyPr wrap="none" lIns="0" tIns="0" rIns="0" bIns="0" rtlCol="0" anchor="t"/>
           <a:lstStyle/>
           <a:p>
-            <a:pPr marL="0" indent="0" algn="l">
+            <a:pPr algn="l" indent="0" marL="0">
               <a:lnSpc>
                 <a:spcPct val="104000"/>
               </a:lnSpc>
@@ -9896,7 +10444,7 @@
       </p:sp>
       <p:graphicFrame>
         <p:nvGraphicFramePr>
-          <p:cNvPr id="27" name="Table 0"/>
+          <p:cNvPr id="8" name="Table 0"/>
           <p:cNvGraphicFramePr>
             <a:graphicFrameLocks noGrp="1"/>
           </p:cNvGraphicFramePr>
@@ -9910,34 +10458,16 @@
         </p:nvGraphicFramePr>
         <p:xfrm>
           <a:off x="5683505" y="1538784"/>
-          <a:ext cx="5852967" cy="2430202"/>
+          <a:ext cx="9143771" cy="914400"/>
         </p:xfrm>
         <a:graphic>
           <a:graphicData uri="http://schemas.openxmlformats.org/drawingml/2006/table">
             <a:tbl>
               <a:tblPr/>
               <a:tblGrid>
-                <a:gridCol w="1950989">
-                  <a:extLst>
-                    <a:ext uri="{9D8B030D-6E8A-4147-A177-3AD203B41FA5}">
-                      <a16:colId xmlns:a16="http://schemas.microsoft.com/office/drawing/2014/main" val="20000"/>
-                    </a:ext>
-                  </a:extLst>
-                </a:gridCol>
-                <a:gridCol w="1950989">
-                  <a:extLst>
-                    <a:ext uri="{9D8B030D-6E8A-4147-A177-3AD203B41FA5}">
-                      <a16:colId xmlns:a16="http://schemas.microsoft.com/office/drawing/2014/main" val="20001"/>
-                    </a:ext>
-                  </a:extLst>
-                </a:gridCol>
-                <a:gridCol w="1950989">
-                  <a:extLst>
-                    <a:ext uri="{9D8B030D-6E8A-4147-A177-3AD203B41FA5}">
-                      <a16:colId xmlns:a16="http://schemas.microsoft.com/office/drawing/2014/main" val="20002"/>
-                    </a:ext>
-                  </a:extLst>
-                </a:gridCol>
+                <a:gridCol w="1950989"/>
+                <a:gridCol w="1950989"/>
+                <a:gridCol w="1950989"/>
               </a:tblGrid>
               <a:tr h="263022">
                 <a:tc>
@@ -9945,7 +10475,7 @@
                     <a:bodyPr/>
                     <a:lstStyle/>
                     <a:p>
-                      <a:pPr marL="0" indent="0">
+                      <a:pPr indent="0" marL="0">
                         <a:buNone/>
                       </a:pPr>
                       <a:r>
@@ -10013,7 +10543,7 @@
                     <a:bodyPr/>
                     <a:lstStyle/>
                     <a:p>
-                      <a:pPr marL="0" indent="0">
+                      <a:pPr indent="0" marL="0">
                         <a:buNone/>
                       </a:pPr>
                       <a:r>
@@ -10081,7 +10611,7 @@
                     <a:bodyPr/>
                     <a:lstStyle/>
                     <a:p>
-                      <a:pPr marL="0" indent="0">
+                      <a:pPr indent="0" marL="0">
                         <a:buNone/>
                       </a:pPr>
                       <a:r>
@@ -10144,11 +10674,6 @@
                     </a:solidFill>
                   </a:tcPr>
                 </a:tc>
-                <a:extLst>
-                  <a:ext uri="{0D108BD9-81ED-4DB2-BD59-A6C34878D82A}">
-                    <a16:rowId xmlns:a16="http://schemas.microsoft.com/office/drawing/2014/main" val="10000"/>
-                  </a:ext>
-                </a:extLst>
               </a:tr>
               <a:tr h="266197">
                 <a:tc>
@@ -10156,7 +10681,7 @@
                     <a:bodyPr/>
                     <a:lstStyle/>
                     <a:p>
-                      <a:pPr marL="0" indent="0">
+                      <a:pPr indent="0" marL="0">
                         <a:buNone/>
                       </a:pPr>
                       <a:r>
@@ -10221,7 +10746,7 @@
                     <a:bodyPr/>
                     <a:lstStyle/>
                     <a:p>
-                      <a:pPr marL="0" indent="0">
+                      <a:pPr indent="0" marL="0">
                         <a:buNone/>
                       </a:pPr>
                       <a:r>
@@ -10286,7 +10811,7 @@
                     <a:bodyPr/>
                     <a:lstStyle/>
                     <a:p>
-                      <a:pPr marL="0" indent="0">
+                      <a:pPr indent="0" marL="0">
                         <a:buNone/>
                       </a:pPr>
                       <a:r>
@@ -10346,11 +10871,6 @@
                     </a:lnB>
                   </a:tcPr>
                 </a:tc>
-                <a:extLst>
-                  <a:ext uri="{0D108BD9-81ED-4DB2-BD59-A6C34878D82A}">
-                    <a16:rowId xmlns:a16="http://schemas.microsoft.com/office/drawing/2014/main" val="10001"/>
-                  </a:ext>
-                </a:extLst>
               </a:tr>
               <a:tr h="266197">
                 <a:tc>
@@ -10358,7 +10878,7 @@
                     <a:bodyPr/>
                     <a:lstStyle/>
                     <a:p>
-                      <a:pPr marL="0" indent="0">
+                      <a:pPr indent="0" marL="0">
                         <a:buNone/>
                       </a:pPr>
                       <a:r>
@@ -10423,7 +10943,7 @@
                     <a:bodyPr/>
                     <a:lstStyle/>
                     <a:p>
-                      <a:pPr marL="0" indent="0">
+                      <a:pPr indent="0" marL="0">
                         <a:buNone/>
                       </a:pPr>
                       <a:r>
@@ -10488,7 +11008,7 @@
                     <a:bodyPr/>
                     <a:lstStyle/>
                     <a:p>
-                      <a:pPr marL="0" indent="0">
+                      <a:pPr indent="0" marL="0">
                         <a:buNone/>
                       </a:pPr>
                       <a:r>
@@ -10548,11 +11068,6 @@
                     </a:lnB>
                   </a:tcPr>
                 </a:tc>
-                <a:extLst>
-                  <a:ext uri="{0D108BD9-81ED-4DB2-BD59-A6C34878D82A}">
-                    <a16:rowId xmlns:a16="http://schemas.microsoft.com/office/drawing/2014/main" val="10002"/>
-                  </a:ext>
-                </a:extLst>
               </a:tr>
               <a:tr h="266197">
                 <a:tc>
@@ -10560,7 +11075,7 @@
                     <a:bodyPr/>
                     <a:lstStyle/>
                     <a:p>
-                      <a:pPr marL="0" indent="0">
+                      <a:pPr indent="0" marL="0">
                         <a:buNone/>
                       </a:pPr>
                       <a:r>
@@ -10625,7 +11140,7 @@
                     <a:bodyPr/>
                     <a:lstStyle/>
                     <a:p>
-                      <a:pPr marL="0" indent="0">
+                      <a:pPr indent="0" marL="0">
                         <a:buNone/>
                       </a:pPr>
                       <a:r>
@@ -10690,7 +11205,7 @@
                     <a:bodyPr/>
                     <a:lstStyle/>
                     <a:p>
-                      <a:pPr marL="0" indent="0">
+                      <a:pPr indent="0" marL="0">
                         <a:buNone/>
                       </a:pPr>
                       <a:r>
@@ -10750,11 +11265,6 @@
                     </a:lnB>
                   </a:tcPr>
                 </a:tc>
-                <a:extLst>
-                  <a:ext uri="{0D108BD9-81ED-4DB2-BD59-A6C34878D82A}">
-                    <a16:rowId xmlns:a16="http://schemas.microsoft.com/office/drawing/2014/main" val="10003"/>
-                  </a:ext>
-                </a:extLst>
               </a:tr>
               <a:tr h="419685">
                 <a:tc>
@@ -10762,7 +11272,7 @@
                     <a:bodyPr/>
                     <a:lstStyle/>
                     <a:p>
-                      <a:pPr marL="0" indent="0">
+                      <a:pPr indent="0" marL="0">
                         <a:buNone/>
                       </a:pPr>
                       <a:r>
@@ -10827,7 +11337,7 @@
                     <a:bodyPr/>
                     <a:lstStyle/>
                     <a:p>
-                      <a:pPr marL="0" indent="0">
+                      <a:pPr indent="0" marL="0">
                         <a:buNone/>
                       </a:pPr>
                       <a:r>
@@ -10892,7 +11402,7 @@
                     <a:bodyPr/>
                     <a:lstStyle/>
                     <a:p>
-                      <a:pPr marL="0" indent="0">
+                      <a:pPr indent="0" marL="0">
                         <a:buNone/>
                       </a:pPr>
                       <a:r>
@@ -10952,11 +11462,6 @@
                     </a:lnB>
                   </a:tcPr>
                 </a:tc>
-                <a:extLst>
-                  <a:ext uri="{0D108BD9-81ED-4DB2-BD59-A6C34878D82A}">
-                    <a16:rowId xmlns:a16="http://schemas.microsoft.com/office/drawing/2014/main" val="10004"/>
-                  </a:ext>
-                </a:extLst>
               </a:tr>
               <a:tr h="419685">
                 <a:tc>
@@ -10964,7 +11469,7 @@
                     <a:bodyPr/>
                     <a:lstStyle/>
                     <a:p>
-                      <a:pPr marL="0" indent="0">
+                      <a:pPr indent="0" marL="0">
                         <a:buNone/>
                       </a:pPr>
                       <a:r>
@@ -11029,7 +11534,7 @@
                     <a:bodyPr/>
                     <a:lstStyle/>
                     <a:p>
-                      <a:pPr marL="0" indent="0">
+                      <a:pPr indent="0" marL="0">
                         <a:buNone/>
                       </a:pPr>
                       <a:r>
@@ -11094,7 +11599,7 @@
                     <a:bodyPr/>
                     <a:lstStyle/>
                     <a:p>
-                      <a:pPr marL="0" indent="0">
+                      <a:pPr indent="0" marL="0">
                         <a:buNone/>
                       </a:pPr>
                       <a:r>
@@ -11154,11 +11659,6 @@
                     </a:lnB>
                   </a:tcPr>
                 </a:tc>
-                <a:extLst>
-                  <a:ext uri="{0D108BD9-81ED-4DB2-BD59-A6C34878D82A}">
-                    <a16:rowId xmlns:a16="http://schemas.microsoft.com/office/drawing/2014/main" val="10005"/>
-                  </a:ext>
-                </a:extLst>
               </a:tr>
               <a:tr h="266197">
                 <a:tc>
@@ -11166,7 +11666,7 @@
                     <a:bodyPr/>
                     <a:lstStyle/>
                     <a:p>
-                      <a:pPr marL="0" indent="0">
+                      <a:pPr indent="0" marL="0">
                         <a:buNone/>
                       </a:pPr>
                       <a:r>
@@ -11231,7 +11731,7 @@
                     <a:bodyPr/>
                     <a:lstStyle/>
                     <a:p>
-                      <a:pPr marL="0" indent="0">
+                      <a:pPr indent="0" marL="0">
                         <a:buNone/>
                       </a:pPr>
                       <a:r>
@@ -11296,7 +11796,7 @@
                     <a:bodyPr/>
                     <a:lstStyle/>
                     <a:p>
-                      <a:pPr marL="0" indent="0">
+                      <a:pPr indent="0" marL="0">
                         <a:buNone/>
                       </a:pPr>
                       <a:r>
@@ -11356,11 +11856,6 @@
                     </a:lnB>
                   </a:tcPr>
                 </a:tc>
-                <a:extLst>
-                  <a:ext uri="{0D108BD9-81ED-4DB2-BD59-A6C34878D82A}">
-                    <a16:rowId xmlns:a16="http://schemas.microsoft.com/office/drawing/2014/main" val="10006"/>
-                  </a:ext>
-                </a:extLst>
               </a:tr>
               <a:tr h="263022">
                 <a:tc>
@@ -11368,7 +11863,7 @@
                     <a:bodyPr/>
                     <a:lstStyle/>
                     <a:p>
-                      <a:pPr marL="0" indent="0">
+                      <a:pPr indent="0" marL="0">
                         <a:buNone/>
                       </a:pPr>
                       <a:r>
@@ -11433,7 +11928,7 @@
                     <a:bodyPr/>
                     <a:lstStyle/>
                     <a:p>
-                      <a:pPr marL="0" indent="0">
+                      <a:pPr indent="0" marL="0">
                         <a:buNone/>
                       </a:pPr>
                       <a:r>
@@ -11498,7 +11993,7 @@
                     <a:bodyPr/>
                     <a:lstStyle/>
                     <a:p>
-                      <a:pPr marL="0" indent="0">
+                      <a:pPr indent="0" marL="0">
                         <a:buNone/>
                       </a:pPr>
                       <a:r>
@@ -11558,11 +12053,6 @@
                     </a:lnB>
                   </a:tcPr>
                 </a:tc>
-                <a:extLst>
-                  <a:ext uri="{0D108BD9-81ED-4DB2-BD59-A6C34878D82A}">
-                    <a16:rowId xmlns:a16="http://schemas.microsoft.com/office/drawing/2014/main" val="10007"/>
-                  </a:ext>
-                </a:extLst>
               </a:tr>
             </a:tbl>
           </a:graphicData>
@@ -11592,14 +12082,14 @@
       </p:sp>
       <p:pic>
         <p:nvPicPr>
-          <p:cNvPr id="29" name="Image 0" descr="preencoded.png"/>
+          <p:cNvPr id="29" name="Image 0" descr="preencoded.png">    </p:cNvPr>
           <p:cNvPicPr>
             <a:picLocks noChangeAspect="1"/>
           </p:cNvPicPr>
           <p:nvPr/>
         </p:nvPicPr>
         <p:blipFill>
-          <a:blip r:embed="rId3"/>
+          <a:blip r:embed="rId1"/>
           <a:stretch>
             <a:fillRect/>
           </a:stretch>
@@ -11637,7 +12127,7 @@
           </a:bodyPr>
           <a:lstStyle/>
           <a:p>
-            <a:pPr marL="0" indent="0" algn="l">
+            <a:pPr algn="l" indent="0" marL="0">
               <a:lnSpc>
                 <a:spcPct val="112000"/>
               </a:lnSpc>
@@ -11726,7 +12216,7 @@
           <a:bodyPr wrap="none" lIns="0" tIns="0" rIns="0" bIns="0" rtlCol="0" anchor="t"/>
           <a:lstStyle/>
           <a:p>
-            <a:pPr marL="0" indent="0" algn="l">
+            <a:pPr algn="l" indent="0" marL="0">
               <a:lnSpc>
                 <a:spcPct val="96000"/>
               </a:lnSpc>
@@ -11768,7 +12258,7 @@
           <a:bodyPr wrap="none" lIns="0" tIns="0" rIns="0" bIns="0" rtlCol="0" anchor="t"/>
           <a:lstStyle/>
           <a:p>
-            <a:pPr marL="0" indent="0" algn="l">
+            <a:pPr algn="l" indent="0" marL="0">
               <a:lnSpc>
                 <a:spcPct val="104000"/>
               </a:lnSpc>
@@ -11791,17 +12281,17 @@
       </p:sp>
       <p:pic>
         <p:nvPicPr>
-          <p:cNvPr id="5" name="Image 0" descr="preencoded.png"/>
+          <p:cNvPr id="5" name="Image 0" descr="preencoded.png">    </p:cNvPr>
           <p:cNvPicPr>
             <a:picLocks noChangeAspect="1"/>
           </p:cNvPicPr>
           <p:nvPr/>
         </p:nvPicPr>
         <p:blipFill>
-          <a:blip>
+          <a:blip r:embed="rId1">
             <a:extLst>
               <a:ext uri="{96DAC541-7B7A-43D3-8B79-37D633B846F1}">
-                <asvg:svgBlip xmlns:asvg="http://schemas.microsoft.com/office/drawing/2016/SVG/main" r:embed="rId3"/>
+                <asvg:svgBlip xmlns:asvg="http://schemas.microsoft.com/office/drawing/2016/SVG/main" r:embed="rId2"/>
               </a:ext>
             </a:extLst>
           </a:blip>
@@ -11840,7 +12330,7 @@
           <a:bodyPr wrap="none" lIns="0" tIns="0" rIns="0" bIns="0" rtlCol="0" anchor="ctr"/>
           <a:lstStyle/>
           <a:p>
-            <a:pPr marL="0" indent="0" algn="ctr">
+            <a:pPr algn="ctr" indent="0" marL="0">
               <a:lnSpc>
                 <a:spcPct val="100000"/>
               </a:lnSpc>
@@ -11882,7 +12372,7 @@
           <a:bodyPr wrap="none" lIns="0" tIns="0" rIns="0" bIns="0" rtlCol="0" anchor="t"/>
           <a:lstStyle/>
           <a:p>
-            <a:pPr marL="0" indent="0" algn="l">
+            <a:pPr algn="l" indent="0" marL="0">
               <a:lnSpc>
                 <a:spcPct val="104000"/>
               </a:lnSpc>
@@ -11926,7 +12416,7 @@
           </a:bodyPr>
           <a:lstStyle/>
           <a:p>
-            <a:pPr marL="0" indent="0" algn="l">
+            <a:pPr algn="l" indent="0" marL="0">
               <a:lnSpc>
                 <a:spcPct val="106000"/>
               </a:lnSpc>
@@ -11949,194 +12439,14 @@
       </p:sp>
       <p:pic>
         <p:nvPicPr>
-          <p:cNvPr id="9" name="Image 1" descr="preencoded.png"/>
+          <p:cNvPr id="9" name="Image 1" descr="preencoded.png">    </p:cNvPr>
           <p:cNvPicPr>
             <a:picLocks noChangeAspect="1"/>
           </p:cNvPicPr>
           <p:nvPr/>
         </p:nvPicPr>
         <p:blipFill>
-          <a:blip>
-            <a:extLst>
-              <a:ext uri="{96DAC541-7B7A-43D3-8B79-37D633B846F1}">
-                <asvg:svgBlip xmlns:asvg="http://schemas.microsoft.com/office/drawing/2016/SVG/main" r:embed="rId3"/>
-              </a:ext>
-            </a:extLst>
-          </a:blip>
-          <a:stretch>
-            <a:fillRect/>
-          </a:stretch>
-        </p:blipFill>
-        <p:spPr>
-          <a:xfrm>
-            <a:off x="3347855" y="1141016"/>
-            <a:ext cx="2628239" cy="1063625"/>
-          </a:xfrm>
-          <a:prstGeom prst="rect">
-            <a:avLst/>
-          </a:prstGeom>
-        </p:spPr>
-      </p:pic>
-      <p:sp>
-        <p:nvSpPr>
-          <p:cNvPr id="10" name="Text 6"/>
-          <p:cNvSpPr/>
-          <p:nvPr/>
-        </p:nvSpPr>
-        <p:spPr>
-          <a:xfrm>
-            <a:off x="4588356" y="1205805"/>
-            <a:ext cx="147237" cy="184051"/>
-          </a:xfrm>
-          <a:prstGeom prst="rect">
-            <a:avLst/>
-          </a:prstGeom>
-          <a:noFill/>
-          <a:ln/>
-        </p:spPr>
-        <p:txBody>
-          <a:bodyPr wrap="none" lIns="0" tIns="0" rIns="0" bIns="0" rtlCol="0" anchor="ctr"/>
-          <a:lstStyle/>
-          <a:p>
-            <a:pPr marL="0" indent="0" algn="ctr">
-              <a:lnSpc>
-                <a:spcPct val="100000"/>
-              </a:lnSpc>
-              <a:buNone/>
-            </a:pPr>
-            <a:r>
-              <a:rPr lang="en-US" sz="1150" b="1" dirty="0">
-                <a:solidFill>
-                  <a:srgbClr val="333F70"/>
-                </a:solidFill>
-                <a:latin typeface="Unbounded Bold" pitchFamily="34" charset="0"/>
-                <a:ea typeface="Unbounded Bold" pitchFamily="34" charset="-122"/>
-                <a:cs typeface="Unbounded Bold" pitchFamily="34" charset="-120"/>
-              </a:rPr>
-              <a:t>2</a:t>
-            </a:r>
-            <a:endParaRPr lang="en-US" sz="1150" dirty="0"/>
-          </a:p>
-        </p:txBody>
-      </p:sp>
-      <p:sp>
-        <p:nvSpPr>
-          <p:cNvPr id="11" name="Text 7"/>
-          <p:cNvSpPr/>
-          <p:nvPr/>
-        </p:nvSpPr>
-        <p:spPr>
-          <a:xfrm>
-            <a:off x="3458679" y="1506538"/>
-            <a:ext cx="2406590" cy="153392"/>
-          </a:xfrm>
-          <a:prstGeom prst="rect">
-            <a:avLst/>
-          </a:prstGeom>
-          <a:noFill/>
-          <a:ln/>
-        </p:spPr>
-        <p:txBody>
-          <a:bodyPr wrap="none" lIns="0" tIns="0" rIns="0" bIns="0" rtlCol="0" anchor="t"/>
-          <a:lstStyle/>
-          <a:p>
-            <a:pPr marL="0" indent="0" algn="l">
-              <a:lnSpc>
-                <a:spcPct val="104000"/>
-              </a:lnSpc>
-              <a:buNone/>
-            </a:pPr>
-            <a:r>
-              <a:rPr lang="en-US" sz="950" b="1" dirty="0">
-                <a:solidFill>
-                  <a:srgbClr val="333F70"/>
-                </a:solidFill>
-                <a:latin typeface="Unbounded Bold" pitchFamily="34" charset="0"/>
-                <a:ea typeface="Unbounded Bold" pitchFamily="34" charset="-122"/>
-                <a:cs typeface="Unbounded Bold" pitchFamily="34" charset="-120"/>
-              </a:rPr>
-              <a:t>Truth Tables</a:t>
-            </a:r>
-            <a:endParaRPr lang="en-US" sz="950" dirty="0"/>
-          </a:p>
-        </p:txBody>
-      </p:sp>
-      <p:sp>
-        <p:nvSpPr>
-          <p:cNvPr id="12" name="Text 8"/>
-          <p:cNvSpPr/>
-          <p:nvPr/>
-        </p:nvSpPr>
-        <p:spPr>
-          <a:xfrm>
-            <a:off x="3458679" y="1718171"/>
-            <a:ext cx="2406590" cy="375642"/>
-          </a:xfrm>
-          <a:prstGeom prst="rect">
-            <a:avLst/>
-          </a:prstGeom>
-          <a:noFill/>
-          <a:ln/>
-        </p:spPr>
-        <p:txBody>
-          <a:bodyPr wrap="square" lIns="0" tIns="0" rIns="0" bIns="0" rtlCol="0" anchor="t">
-            <a:normAutofit/>
-          </a:bodyPr>
-          <a:lstStyle/>
-          <a:p>
-            <a:pPr marL="0" indent="0" algn="l">
-              <a:lnSpc>
-                <a:spcPct val="106000"/>
-              </a:lnSpc>
-              <a:buNone/>
-            </a:pPr>
-            <a:r>
-              <a:rPr lang="en-US" sz="750" dirty="0">
-                <a:solidFill>
-                  <a:srgbClr val="333F70"/>
-                </a:solidFill>
-                <a:latin typeface="Open Sans" pitchFamily="34" charset="0"/>
-                <a:ea typeface="Open Sans" pitchFamily="34" charset="-122"/>
-                <a:cs typeface="Open Sans" pitchFamily="34" charset="-120"/>
-              </a:rPr>
-              <a:t>Derive truth tables for the half adder (2 inputs → Sum, Carry) and full adder (3 inputs: A, B, Cin → Sum, Cout). Full adder: 2³ = </a:t>
-            </a:r>
-            <a:r>
-              <a:rPr lang="en-US" sz="750" b="1" dirty="0">
-                <a:solidFill>
-                  <a:srgbClr val="333F70"/>
-                </a:solidFill>
-                <a:latin typeface="Open Sans Bold" pitchFamily="34" charset="0"/>
-                <a:ea typeface="Open Sans Bold" pitchFamily="34" charset="-122"/>
-                <a:cs typeface="Open Sans Bold" pitchFamily="34" charset="-120"/>
-              </a:rPr>
-              <a:t>8 rows</a:t>
-            </a:r>
-            <a:r>
-              <a:rPr lang="en-US" sz="750" dirty="0">
-                <a:solidFill>
-                  <a:srgbClr val="333F70"/>
-                </a:solidFill>
-                <a:latin typeface="Open Sans" pitchFamily="34" charset="0"/>
-                <a:ea typeface="Open Sans" pitchFamily="34" charset="-122"/>
-                <a:cs typeface="Open Sans" pitchFamily="34" charset="-120"/>
-              </a:rPr>
-              <a:t>.</a:t>
-            </a:r>
-            <a:endParaRPr lang="en-US" sz="750" dirty="0"/>
-          </a:p>
-        </p:txBody>
-      </p:sp>
-      <p:pic>
-        <p:nvPicPr>
-          <p:cNvPr id="13" name="Image 2" descr="preencoded.png"/>
-          <p:cNvPicPr>
-            <a:picLocks noChangeAspect="1"/>
-          </p:cNvPicPr>
-          <p:nvPr/>
-        </p:nvPicPr>
-        <p:blipFill>
-          <a:blip>
+          <a:blip r:embed="rId3">
             <a:extLst>
               <a:ext uri="{96DAC541-7B7A-43D3-8B79-37D633B846F1}">
                 <asvg:svgBlip xmlns:asvg="http://schemas.microsoft.com/office/drawing/2016/SVG/main" r:embed="rId4"/>
@@ -12149,8 +12459,8 @@
         </p:blipFill>
         <p:spPr>
           <a:xfrm>
-            <a:off x="661475" y="2262882"/>
-            <a:ext cx="2628140" cy="1188839"/>
+            <a:off x="3347855" y="1141016"/>
+            <a:ext cx="2628239" cy="1063625"/>
           </a:xfrm>
           <a:prstGeom prst="rect">
             <a:avLst/>
@@ -12159,13 +12469,13 @@
       </p:pic>
       <p:sp>
         <p:nvSpPr>
-          <p:cNvPr id="14" name="Text 9"/>
+          <p:cNvPr id="10" name="Text 6"/>
           <p:cNvSpPr/>
           <p:nvPr/>
         </p:nvSpPr>
         <p:spPr>
           <a:xfrm>
-            <a:off x="1901877" y="2327672"/>
+            <a:off x="4588356" y="1205805"/>
             <a:ext cx="147237" cy="184051"/>
           </a:xfrm>
           <a:prstGeom prst="rect">
@@ -12178,7 +12488,7 @@
           <a:bodyPr wrap="none" lIns="0" tIns="0" rIns="0" bIns="0" rtlCol="0" anchor="ctr"/>
           <a:lstStyle/>
           <a:p>
-            <a:pPr marL="0" indent="0" algn="ctr">
+            <a:pPr algn="ctr" indent="0" marL="0">
               <a:lnSpc>
                 <a:spcPct val="100000"/>
               </a:lnSpc>
@@ -12193,7 +12503,7 @@
                 <a:ea typeface="Unbounded Bold" pitchFamily="34" charset="-122"/>
                 <a:cs typeface="Unbounded Bold" pitchFamily="34" charset="-120"/>
               </a:rPr>
-              <a:t>3</a:t>
+              <a:t>2</a:t>
             </a:r>
             <a:endParaRPr lang="en-US" sz="1150" dirty="0"/>
           </a:p>
@@ -12201,14 +12511,14 @@
       </p:sp>
       <p:sp>
         <p:nvSpPr>
-          <p:cNvPr id="15" name="Text 10"/>
+          <p:cNvPr id="11" name="Text 7"/>
           <p:cNvSpPr/>
           <p:nvPr/>
         </p:nvSpPr>
         <p:spPr>
           <a:xfrm>
-            <a:off x="772299" y="2628404"/>
-            <a:ext cx="2406491" cy="153392"/>
+            <a:off x="3458679" y="1506538"/>
+            <a:ext cx="2406590" cy="153392"/>
           </a:xfrm>
           <a:prstGeom prst="rect">
             <a:avLst/>
@@ -12220,7 +12530,7 @@
           <a:bodyPr wrap="none" lIns="0" tIns="0" rIns="0" bIns="0" rtlCol="0" anchor="t"/>
           <a:lstStyle/>
           <a:p>
-            <a:pPr marL="0" indent="0" algn="l">
+            <a:pPr algn="l" indent="0" marL="0">
               <a:lnSpc>
                 <a:spcPct val="104000"/>
               </a:lnSpc>
@@ -12235,7 +12545,7 @@
                 <a:ea typeface="Unbounded Bold" pitchFamily="34" charset="-122"/>
                 <a:cs typeface="Unbounded Bold" pitchFamily="34" charset="-120"/>
               </a:rPr>
-              <a:t>Boolean Expressions</a:t>
+              <a:t>Truth Tables</a:t>
             </a:r>
             <a:endParaRPr lang="en-US" sz="950" dirty="0"/>
           </a:p>
@@ -12243,14 +12553,14 @@
       </p:sp>
       <p:sp>
         <p:nvSpPr>
-          <p:cNvPr id="16" name="Text 11"/>
+          <p:cNvPr id="12" name="Text 8"/>
           <p:cNvSpPr/>
           <p:nvPr/>
         </p:nvSpPr>
         <p:spPr>
           <a:xfrm>
-            <a:off x="772299" y="2840038"/>
-            <a:ext cx="2406491" cy="375642"/>
+            <a:off x="3458679" y="1718171"/>
+            <a:ext cx="2406590" cy="375642"/>
           </a:xfrm>
           <a:prstGeom prst="rect">
             <a:avLst/>
@@ -12264,7 +12574,7 @@
           </a:bodyPr>
           <a:lstStyle/>
           <a:p>
-            <a:pPr marL="0" indent="0" algn="l">
+            <a:pPr algn="l" indent="0" marL="0">
               <a:lnSpc>
                 <a:spcPct val="106000"/>
               </a:lnSpc>
@@ -12279,8 +12589,14 @@
                 <a:ea typeface="Open Sans" pitchFamily="34" charset="-122"/>
                 <a:cs typeface="Open Sans" pitchFamily="34" charset="-120"/>
               </a:rPr>
-              <a:t>Convert truth tables to </a:t>
-            </a:r>
+              <a:t>Derive truth tables for the half adder (2 inputs → Sum, Carry) and full adder (3 inputs: A, B, Cin → Sum, Cout). Full adder: 2³ = </a:t>
+            </a:r>
+            <a:pPr algn="l" indent="0" marL="0">
+              <a:lnSpc>
+                <a:spcPct val="106000"/>
+              </a:lnSpc>
+              <a:buNone/>
+            </a:pPr>
             <a:r>
               <a:rPr lang="en-US" sz="750" b="1" dirty="0">
                 <a:solidFill>
@@ -12290,8 +12606,14 @@
                 <a:ea typeface="Open Sans Bold" pitchFamily="34" charset="-122"/>
                 <a:cs typeface="Open Sans Bold" pitchFamily="34" charset="-120"/>
               </a:rPr>
-              <a:t>sum-of-products (SOP)</a:t>
-            </a:r>
+              <a:t>8 rows</a:t>
+            </a:r>
+            <a:pPr algn="l" indent="0" marL="0">
+              <a:lnSpc>
+                <a:spcPct val="106000"/>
+              </a:lnSpc>
+              <a:buNone/>
+            </a:pPr>
             <a:r>
               <a:rPr lang="en-US" sz="750" dirty="0">
                 <a:solidFill>
@@ -12301,7 +12623,7 @@
                 <a:ea typeface="Open Sans" pitchFamily="34" charset="-122"/>
                 <a:cs typeface="Open Sans" pitchFamily="34" charset="-120"/>
               </a:rPr>
-              <a:t> expressions. Full adder: Sum = A⊕B⊕Cin; Cout = AB + BCin + ACin.</a:t>
+              <a:t>.</a:t>
             </a:r>
             <a:endParaRPr lang="en-US" sz="750" dirty="0"/>
           </a:p>
@@ -12309,17 +12631,17 @@
       </p:sp>
       <p:pic>
         <p:nvPicPr>
-          <p:cNvPr id="17" name="Image 3" descr="preencoded.png"/>
+          <p:cNvPr id="13" name="Image 2" descr="preencoded.png">    </p:cNvPr>
           <p:cNvPicPr>
             <a:picLocks noChangeAspect="1"/>
           </p:cNvPicPr>
           <p:nvPr/>
         </p:nvPicPr>
         <p:blipFill>
-          <a:blip>
+          <a:blip r:embed="rId5">
             <a:extLst>
               <a:ext uri="{96DAC541-7B7A-43D3-8B79-37D633B846F1}">
-                <asvg:svgBlip xmlns:asvg="http://schemas.microsoft.com/office/drawing/2016/SVG/main" r:embed="rId4"/>
+                <asvg:svgBlip xmlns:asvg="http://schemas.microsoft.com/office/drawing/2016/SVG/main" r:embed="rId6"/>
               </a:ext>
             </a:extLst>
           </a:blip>
@@ -12329,8 +12651,8 @@
         </p:blipFill>
         <p:spPr>
           <a:xfrm>
-            <a:off x="3347855" y="2262882"/>
-            <a:ext cx="2628239" cy="1188839"/>
+            <a:off x="661475" y="2262882"/>
+            <a:ext cx="2628140" cy="1188839"/>
           </a:xfrm>
           <a:prstGeom prst="rect">
             <a:avLst/>
@@ -12339,13 +12661,13 @@
       </p:pic>
       <p:sp>
         <p:nvSpPr>
-          <p:cNvPr id="18" name="Text 12"/>
+          <p:cNvPr id="14" name="Text 9"/>
           <p:cNvSpPr/>
           <p:nvPr/>
         </p:nvSpPr>
         <p:spPr>
           <a:xfrm>
-            <a:off x="4588356" y="2327672"/>
+            <a:off x="1901877" y="2327672"/>
             <a:ext cx="147237" cy="184051"/>
           </a:xfrm>
           <a:prstGeom prst="rect">
@@ -12358,7 +12680,7 @@
           <a:bodyPr wrap="none" lIns="0" tIns="0" rIns="0" bIns="0" rtlCol="0" anchor="ctr"/>
           <a:lstStyle/>
           <a:p>
-            <a:pPr marL="0" indent="0" algn="ctr">
+            <a:pPr algn="ctr" indent="0" marL="0">
               <a:lnSpc>
                 <a:spcPct val="100000"/>
               </a:lnSpc>
@@ -12373,7 +12695,7 @@
                 <a:ea typeface="Unbounded Bold" pitchFamily="34" charset="-122"/>
                 <a:cs typeface="Unbounded Bold" pitchFamily="34" charset="-120"/>
               </a:rPr>
-              <a:t>4</a:t>
+              <a:t>3</a:t>
             </a:r>
             <a:endParaRPr lang="en-US" sz="1150" dirty="0"/>
           </a:p>
@@ -12381,14 +12703,14 @@
       </p:sp>
       <p:sp>
         <p:nvSpPr>
-          <p:cNvPr id="19" name="Text 13"/>
+          <p:cNvPr id="15" name="Text 10"/>
           <p:cNvSpPr/>
           <p:nvPr/>
         </p:nvSpPr>
         <p:spPr>
           <a:xfrm>
-            <a:off x="3458679" y="2628404"/>
-            <a:ext cx="2406590" cy="153392"/>
+            <a:off x="772299" y="2628404"/>
+            <a:ext cx="2406491" cy="153392"/>
           </a:xfrm>
           <a:prstGeom prst="rect">
             <a:avLst/>
@@ -12400,7 +12722,7 @@
           <a:bodyPr wrap="none" lIns="0" tIns="0" rIns="0" bIns="0" rtlCol="0" anchor="t"/>
           <a:lstStyle/>
           <a:p>
-            <a:pPr marL="0" indent="0" algn="l">
+            <a:pPr algn="l" indent="0" marL="0">
               <a:lnSpc>
                 <a:spcPct val="104000"/>
               </a:lnSpc>
@@ -12415,7 +12737,7 @@
                 <a:ea typeface="Unbounded Bold" pitchFamily="34" charset="-122"/>
                 <a:cs typeface="Unbounded Bold" pitchFamily="34" charset="-120"/>
               </a:rPr>
-              <a:t>Gate-Level Circuits</a:t>
+              <a:t>Boolean Expressions</a:t>
             </a:r>
             <a:endParaRPr lang="en-US" sz="950" dirty="0"/>
           </a:p>
@@ -12423,14 +12745,14 @@
       </p:sp>
       <p:sp>
         <p:nvSpPr>
-          <p:cNvPr id="20" name="Text 14"/>
+          <p:cNvPr id="16" name="Text 11"/>
           <p:cNvSpPr/>
           <p:nvPr/>
         </p:nvSpPr>
         <p:spPr>
           <a:xfrm>
-            <a:off x="3458679" y="2840038"/>
-            <a:ext cx="2406590" cy="500856"/>
+            <a:off x="772299" y="2840038"/>
+            <a:ext cx="2406491" cy="375642"/>
           </a:xfrm>
           <a:prstGeom prst="rect">
             <a:avLst/>
@@ -12444,7 +12766,7 @@
           </a:bodyPr>
           <a:lstStyle/>
           <a:p>
-            <a:pPr marL="0" indent="0" algn="l">
+            <a:pPr algn="l" indent="0" marL="0">
               <a:lnSpc>
                 <a:spcPct val="106000"/>
               </a:lnSpc>
@@ -12459,7 +12781,41 @@
                 <a:ea typeface="Open Sans" pitchFamily="34" charset="-122"/>
                 <a:cs typeface="Open Sans" pitchFamily="34" charset="-120"/>
               </a:rPr>
-              <a:t>Implement SOP expressions using AND, OR, and NOT gates. Recognize XOR gate patterns to simplify the sum output. Draw schematic for each sub-circuit.</a:t>
+              <a:t>Convert truth tables to </a:t>
+            </a:r>
+            <a:pPr algn="l" indent="0" marL="0">
+              <a:lnSpc>
+                <a:spcPct val="106000"/>
+              </a:lnSpc>
+              <a:buNone/>
+            </a:pPr>
+            <a:r>
+              <a:rPr lang="en-US" sz="750" b="1" dirty="0">
+                <a:solidFill>
+                  <a:srgbClr val="333F70"/>
+                </a:solidFill>
+                <a:latin typeface="Open Sans Bold" pitchFamily="34" charset="0"/>
+                <a:ea typeface="Open Sans Bold" pitchFamily="34" charset="-122"/>
+                <a:cs typeface="Open Sans Bold" pitchFamily="34" charset="-120"/>
+              </a:rPr>
+              <a:t>sum-of-products (SOP)</a:t>
+            </a:r>
+            <a:pPr algn="l" indent="0" marL="0">
+              <a:lnSpc>
+                <a:spcPct val="106000"/>
+              </a:lnSpc>
+              <a:buNone/>
+            </a:pPr>
+            <a:r>
+              <a:rPr lang="en-US" sz="750" dirty="0">
+                <a:solidFill>
+                  <a:srgbClr val="333F70"/>
+                </a:solidFill>
+                <a:latin typeface="Open Sans" pitchFamily="34" charset="0"/>
+                <a:ea typeface="Open Sans" pitchFamily="34" charset="-122"/>
+                <a:cs typeface="Open Sans" pitchFamily="34" charset="-120"/>
+              </a:rPr>
+              <a:t> expressions. Full adder: Sum = A⊕B⊕Cin; Cout = AB + BCin + ACin.</a:t>
             </a:r>
             <a:endParaRPr lang="en-US" sz="750" dirty="0"/>
           </a:p>
@@ -12467,17 +12823,17 @@
       </p:sp>
       <p:pic>
         <p:nvPicPr>
-          <p:cNvPr id="21" name="Image 4" descr="preencoded.png"/>
+          <p:cNvPr id="17" name="Image 3" descr="preencoded.png">    </p:cNvPr>
           <p:cNvPicPr>
             <a:picLocks noChangeAspect="1"/>
           </p:cNvPicPr>
           <p:nvPr/>
         </p:nvPicPr>
         <p:blipFill>
-          <a:blip>
+          <a:blip r:embed="rId7">
             <a:extLst>
               <a:ext uri="{96DAC541-7B7A-43D3-8B79-37D633B846F1}">
-                <asvg:svgBlip xmlns:asvg="http://schemas.microsoft.com/office/drawing/2016/SVG/main" r:embed="rId5"/>
+                <asvg:svgBlip xmlns:asvg="http://schemas.microsoft.com/office/drawing/2016/SVG/main" r:embed="rId8"/>
               </a:ext>
             </a:extLst>
           </a:blip>
@@ -12487,8 +12843,8 @@
         </p:blipFill>
         <p:spPr>
           <a:xfrm>
-            <a:off x="6221951" y="1141016"/>
-            <a:ext cx="5314619" cy="938411"/>
+            <a:off x="3347855" y="2262882"/>
+            <a:ext cx="2628239" cy="1188839"/>
           </a:xfrm>
           <a:prstGeom prst="rect">
             <a:avLst/>
@@ -12497,13 +12853,13 @@
       </p:pic>
       <p:sp>
         <p:nvSpPr>
-          <p:cNvPr id="22" name="Text 15"/>
+          <p:cNvPr id="18" name="Text 12"/>
           <p:cNvSpPr/>
           <p:nvPr/>
         </p:nvSpPr>
         <p:spPr>
           <a:xfrm>
-            <a:off x="8805642" y="1205805"/>
+            <a:off x="4588356" y="2327672"/>
             <a:ext cx="147237" cy="184051"/>
           </a:xfrm>
           <a:prstGeom prst="rect">
@@ -12516,7 +12872,7 @@
           <a:bodyPr wrap="none" lIns="0" tIns="0" rIns="0" bIns="0" rtlCol="0" anchor="ctr"/>
           <a:lstStyle/>
           <a:p>
-            <a:pPr marL="0" indent="0" algn="ctr">
+            <a:pPr algn="ctr" indent="0" marL="0">
               <a:lnSpc>
                 <a:spcPct val="100000"/>
               </a:lnSpc>
@@ -12531,7 +12887,7 @@
                 <a:ea typeface="Unbounded Bold" pitchFamily="34" charset="-122"/>
                 <a:cs typeface="Unbounded Bold" pitchFamily="34" charset="-120"/>
               </a:rPr>
-              <a:t>1</a:t>
+              <a:t>4</a:t>
             </a:r>
             <a:endParaRPr lang="en-US" sz="1150" dirty="0"/>
           </a:p>
@@ -12539,14 +12895,14 @@
       </p:sp>
       <p:sp>
         <p:nvSpPr>
-          <p:cNvPr id="23" name="Text 16"/>
+          <p:cNvPr id="19" name="Text 13"/>
           <p:cNvSpPr/>
           <p:nvPr/>
         </p:nvSpPr>
         <p:spPr>
           <a:xfrm>
-            <a:off x="6332776" y="1506538"/>
-            <a:ext cx="5092969" cy="153392"/>
+            <a:off x="3458679" y="2628404"/>
+            <a:ext cx="2406590" cy="153392"/>
           </a:xfrm>
           <a:prstGeom prst="rect">
             <a:avLst/>
@@ -12558,7 +12914,7 @@
           <a:bodyPr wrap="none" lIns="0" tIns="0" rIns="0" bIns="0" rtlCol="0" anchor="t"/>
           <a:lstStyle/>
           <a:p>
-            <a:pPr marL="0" indent="0" algn="l">
+            <a:pPr algn="l" indent="0" marL="0">
               <a:lnSpc>
                 <a:spcPct val="104000"/>
               </a:lnSpc>
@@ -12573,7 +12929,7 @@
                 <a:ea typeface="Unbounded Bold" pitchFamily="34" charset="-122"/>
                 <a:cs typeface="Unbounded Bold" pitchFamily="34" charset="-120"/>
               </a:rPr>
-              <a:t>4-Bit Adder Construction</a:t>
+              <a:t>Gate-Level Circuits</a:t>
             </a:r>
             <a:endParaRPr lang="en-US" sz="950" dirty="0"/>
           </a:p>
@@ -12581,14 +12937,14 @@
       </p:sp>
       <p:sp>
         <p:nvSpPr>
-          <p:cNvPr id="24" name="Text 17"/>
+          <p:cNvPr id="20" name="Text 14"/>
           <p:cNvSpPr/>
           <p:nvPr/>
         </p:nvSpPr>
         <p:spPr>
           <a:xfrm>
-            <a:off x="6332776" y="1718171"/>
-            <a:ext cx="5092969" cy="250428"/>
+            <a:off x="3458679" y="2840038"/>
+            <a:ext cx="2406590" cy="500856"/>
           </a:xfrm>
           <a:prstGeom prst="rect">
             <a:avLst/>
@@ -12602,7 +12958,7 @@
           </a:bodyPr>
           <a:lstStyle/>
           <a:p>
-            <a:pPr marL="0" indent="0" algn="l">
+            <a:pPr algn="l" indent="0" marL="0">
               <a:lnSpc>
                 <a:spcPct val="106000"/>
               </a:lnSpc>
@@ -12617,7 +12973,7 @@
                 <a:ea typeface="Open Sans" pitchFamily="34" charset="-122"/>
                 <a:cs typeface="Open Sans" pitchFamily="34" charset="-120"/>
               </a:rPr>
-              <a:t>Cascade four full adders (FA-0 to FA-3). Insert XOR gates on all B inputs: B'[i] = B[i] XOR Mode. Feed Mode into Cin of FA-0.</a:t>
+              <a:t>Implement SOP expressions using AND, OR, and NOT gates. Recognize XOR gate patterns to simplify the sum output. Draw schematic for each sub-circuit.</a:t>
             </a:r>
             <a:endParaRPr lang="en-US" sz="750" dirty="0"/>
           </a:p>
@@ -12625,17 +12981,17 @@
       </p:sp>
       <p:pic>
         <p:nvPicPr>
-          <p:cNvPr id="25" name="Image 5" descr="preencoded.png"/>
+          <p:cNvPr id="21" name="Image 4" descr="preencoded.png">    </p:cNvPr>
           <p:cNvPicPr>
             <a:picLocks noChangeAspect="1"/>
           </p:cNvPicPr>
           <p:nvPr/>
         </p:nvPicPr>
         <p:blipFill>
-          <a:blip>
+          <a:blip r:embed="rId9">
             <a:extLst>
               <a:ext uri="{96DAC541-7B7A-43D3-8B79-37D633B846F1}">
-                <asvg:svgBlip xmlns:asvg="http://schemas.microsoft.com/office/drawing/2016/SVG/main" r:embed="rId5"/>
+                <asvg:svgBlip xmlns:asvg="http://schemas.microsoft.com/office/drawing/2016/SVG/main" r:embed="rId10"/>
               </a:ext>
             </a:extLst>
           </a:blip>
@@ -12645,7 +13001,7 @@
         </p:blipFill>
         <p:spPr>
           <a:xfrm>
-            <a:off x="6221951" y="2137668"/>
+            <a:off x="6221951" y="1141016"/>
             <a:ext cx="5314619" cy="938411"/>
           </a:xfrm>
           <a:prstGeom prst="rect">
@@ -12655,13 +13011,13 @@
       </p:pic>
       <p:sp>
         <p:nvSpPr>
-          <p:cNvPr id="26" name="Text 18"/>
+          <p:cNvPr id="22" name="Text 15"/>
           <p:cNvSpPr/>
           <p:nvPr/>
         </p:nvSpPr>
         <p:spPr>
           <a:xfrm>
-            <a:off x="8805642" y="2202458"/>
+            <a:off x="8805642" y="1205805"/>
             <a:ext cx="147237" cy="184051"/>
           </a:xfrm>
           <a:prstGeom prst="rect">
@@ -12674,7 +13030,7 @@
           <a:bodyPr wrap="none" lIns="0" tIns="0" rIns="0" bIns="0" rtlCol="0" anchor="ctr"/>
           <a:lstStyle/>
           <a:p>
-            <a:pPr marL="0" indent="0" algn="ctr">
+            <a:pPr algn="ctr" indent="0" marL="0">
               <a:lnSpc>
                 <a:spcPct val="100000"/>
               </a:lnSpc>
@@ -12689,7 +13045,7 @@
                 <a:ea typeface="Unbounded Bold" pitchFamily="34" charset="-122"/>
                 <a:cs typeface="Unbounded Bold" pitchFamily="34" charset="-120"/>
               </a:rPr>
-              <a:t>2</a:t>
+              <a:t>1</a:t>
             </a:r>
             <a:endParaRPr lang="en-US" sz="1150" dirty="0"/>
           </a:p>
@@ -12697,13 +13053,13 @@
       </p:sp>
       <p:sp>
         <p:nvSpPr>
-          <p:cNvPr id="27" name="Text 19"/>
+          <p:cNvPr id="23" name="Text 16"/>
           <p:cNvSpPr/>
           <p:nvPr/>
         </p:nvSpPr>
         <p:spPr>
           <a:xfrm>
-            <a:off x="6332776" y="2503190"/>
+            <a:off x="6332776" y="1506538"/>
             <a:ext cx="5092969" cy="153392"/>
           </a:xfrm>
           <a:prstGeom prst="rect">
@@ -12716,7 +13072,7 @@
           <a:bodyPr wrap="none" lIns="0" tIns="0" rIns="0" bIns="0" rtlCol="0" anchor="t"/>
           <a:lstStyle/>
           <a:p>
-            <a:pPr marL="0" indent="0" algn="l">
+            <a:pPr algn="l" indent="0" marL="0">
               <a:lnSpc>
                 <a:spcPct val="104000"/>
               </a:lnSpc>
@@ -12731,7 +13087,7 @@
                 <a:ea typeface="Unbounded Bold" pitchFamily="34" charset="-122"/>
                 <a:cs typeface="Unbounded Bold" pitchFamily="34" charset="-120"/>
               </a:rPr>
-              <a:t>Overflow Detection Addition</a:t>
+              <a:t>4-Bit Adder Construction</a:t>
             </a:r>
             <a:endParaRPr lang="en-US" sz="950" dirty="0"/>
           </a:p>
@@ -12739,13 +13095,13 @@
       </p:sp>
       <p:sp>
         <p:nvSpPr>
-          <p:cNvPr id="28" name="Text 20"/>
+          <p:cNvPr id="24" name="Text 17"/>
           <p:cNvSpPr/>
           <p:nvPr/>
         </p:nvSpPr>
         <p:spPr>
           <a:xfrm>
-            <a:off x="6332776" y="2714823"/>
+            <a:off x="6332776" y="1718171"/>
             <a:ext cx="5092969" cy="250428"/>
           </a:xfrm>
           <a:prstGeom prst="rect">
@@ -12760,7 +13116,7 @@
           </a:bodyPr>
           <a:lstStyle/>
           <a:p>
-            <a:pPr marL="0" indent="0" algn="l">
+            <a:pPr algn="l" indent="0" marL="0">
               <a:lnSpc>
                 <a:spcPct val="106000"/>
               </a:lnSpc>
@@ -12775,7 +13131,7 @@
                 <a:ea typeface="Open Sans" pitchFamily="34" charset="-122"/>
                 <a:cs typeface="Open Sans" pitchFamily="34" charset="-120"/>
               </a:rPr>
-              <a:t>Connect a single XOR gate: OVF = Cin,3 XOR Cout,3. Wire carry signals from FA-2 output and FA-3 output to this gate.</a:t>
+              <a:t>Cascade four full adders (FA-0 to FA-3). Insert XOR gates on all B inputs: B'[i] = B[i] XOR Mode. Feed Mode into Cin of FA-0.</a:t>
             </a:r>
             <a:endParaRPr lang="en-US" sz="750" dirty="0"/>
           </a:p>
@@ -12783,17 +13139,17 @@
       </p:sp>
       <p:pic>
         <p:nvPicPr>
-          <p:cNvPr id="29" name="Image 6" descr="preencoded.png"/>
+          <p:cNvPr id="25" name="Image 5" descr="preencoded.png">    </p:cNvPr>
           <p:cNvPicPr>
             <a:picLocks noChangeAspect="1"/>
           </p:cNvPicPr>
           <p:nvPr/>
         </p:nvPicPr>
         <p:blipFill>
-          <a:blip>
+          <a:blip r:embed="rId11">
             <a:extLst>
               <a:ext uri="{96DAC541-7B7A-43D3-8B79-37D633B846F1}">
-                <asvg:svgBlip xmlns:asvg="http://schemas.microsoft.com/office/drawing/2016/SVG/main" r:embed="rId5"/>
+                <asvg:svgBlip xmlns:asvg="http://schemas.microsoft.com/office/drawing/2016/SVG/main" r:embed="rId12"/>
               </a:ext>
             </a:extLst>
           </a:blip>
@@ -12803,7 +13159,7 @@
         </p:blipFill>
         <p:spPr>
           <a:xfrm>
-            <a:off x="6221951" y="3134320"/>
+            <a:off x="6221951" y="2137668"/>
             <a:ext cx="5314619" cy="938411"/>
           </a:xfrm>
           <a:prstGeom prst="rect">
@@ -12813,13 +13169,13 @@
       </p:pic>
       <p:sp>
         <p:nvSpPr>
-          <p:cNvPr id="30" name="Text 21"/>
+          <p:cNvPr id="26" name="Text 18"/>
           <p:cNvSpPr/>
           <p:nvPr/>
         </p:nvSpPr>
         <p:spPr>
           <a:xfrm>
-            <a:off x="8805642" y="3199110"/>
+            <a:off x="8805642" y="2202458"/>
             <a:ext cx="147237" cy="184051"/>
           </a:xfrm>
           <a:prstGeom prst="rect">
@@ -12832,7 +13188,7 @@
           <a:bodyPr wrap="none" lIns="0" tIns="0" rIns="0" bIns="0" rtlCol="0" anchor="ctr"/>
           <a:lstStyle/>
           <a:p>
-            <a:pPr marL="0" indent="0" algn="ctr">
+            <a:pPr algn="ctr" indent="0" marL="0">
               <a:lnSpc>
                 <a:spcPct val="100000"/>
               </a:lnSpc>
@@ -12847,7 +13203,7 @@
                 <a:ea typeface="Unbounded Bold" pitchFamily="34" charset="-122"/>
                 <a:cs typeface="Unbounded Bold" pitchFamily="34" charset="-120"/>
               </a:rPr>
-              <a:t>3</a:t>
+              <a:t>2</a:t>
             </a:r>
             <a:endParaRPr lang="en-US" sz="1150" dirty="0"/>
           </a:p>
@@ -12855,13 +13211,13 @@
       </p:sp>
       <p:sp>
         <p:nvSpPr>
-          <p:cNvPr id="31" name="Text 22"/>
+          <p:cNvPr id="27" name="Text 19"/>
           <p:cNvSpPr/>
           <p:nvPr/>
         </p:nvSpPr>
         <p:spPr>
           <a:xfrm>
-            <a:off x="6332776" y="3499842"/>
+            <a:off x="6332776" y="2503190"/>
             <a:ext cx="5092969" cy="153392"/>
           </a:xfrm>
           <a:prstGeom prst="rect">
@@ -12874,7 +13230,7 @@
           <a:bodyPr wrap="none" lIns="0" tIns="0" rIns="0" bIns="0" rtlCol="0" anchor="t"/>
           <a:lstStyle/>
           <a:p>
-            <a:pPr marL="0" indent="0" algn="l">
+            <a:pPr algn="l" indent="0" marL="0">
               <a:lnSpc>
                 <a:spcPct val="104000"/>
               </a:lnSpc>
@@ -12889,7 +13245,7 @@
                 <a:ea typeface="Unbounded Bold" pitchFamily="34" charset="-122"/>
                 <a:cs typeface="Unbounded Bold" pitchFamily="34" charset="-120"/>
               </a:rPr>
-              <a:t>Simulation &amp; Testing</a:t>
+              <a:t>Overflow Detection Addition</a:t>
             </a:r>
             <a:endParaRPr lang="en-US" sz="950" dirty="0"/>
           </a:p>
@@ -12897,13 +13253,13 @@
       </p:sp>
       <p:sp>
         <p:nvSpPr>
-          <p:cNvPr id="32" name="Text 23"/>
+          <p:cNvPr id="28" name="Text 20"/>
           <p:cNvSpPr/>
           <p:nvPr/>
         </p:nvSpPr>
         <p:spPr>
           <a:xfrm>
-            <a:off x="6332776" y="3711476"/>
+            <a:off x="6332776" y="2714823"/>
             <a:ext cx="5092969" cy="250428"/>
           </a:xfrm>
           <a:prstGeom prst="rect">
@@ -12918,7 +13274,7 @@
           </a:bodyPr>
           <a:lstStyle/>
           <a:p>
-            <a:pPr marL="0" indent="0" algn="l">
+            <a:pPr algn="l" indent="0" marL="0">
               <a:lnSpc>
                 <a:spcPct val="106000"/>
               </a:lnSpc>
@@ -12933,8 +13289,172 @@
                 <a:ea typeface="Open Sans" pitchFamily="34" charset="-122"/>
                 <a:cs typeface="Open Sans" pitchFamily="34" charset="-120"/>
               </a:rPr>
+              <a:t>Connect a single XOR gate: OVF = Cin,3 XOR Cout,3. Wire carry signals from FA-2 output and FA-3 output to this gate.</a:t>
+            </a:r>
+            <a:endParaRPr lang="en-US" sz="750" dirty="0"/>
+          </a:p>
+        </p:txBody>
+      </p:sp>
+      <p:pic>
+        <p:nvPicPr>
+          <p:cNvPr id="29" name="Image 6" descr="preencoded.png">    </p:cNvPr>
+          <p:cNvPicPr>
+            <a:picLocks noChangeAspect="1"/>
+          </p:cNvPicPr>
+          <p:nvPr/>
+        </p:nvPicPr>
+        <p:blipFill>
+          <a:blip r:embed="rId13">
+            <a:extLst>
+              <a:ext uri="{96DAC541-7B7A-43D3-8B79-37D633B846F1}">
+                <asvg:svgBlip xmlns:asvg="http://schemas.microsoft.com/office/drawing/2016/SVG/main" r:embed="rId14"/>
+              </a:ext>
+            </a:extLst>
+          </a:blip>
+          <a:stretch>
+            <a:fillRect/>
+          </a:stretch>
+        </p:blipFill>
+        <p:spPr>
+          <a:xfrm>
+            <a:off x="6221951" y="3134320"/>
+            <a:ext cx="5314619" cy="938411"/>
+          </a:xfrm>
+          <a:prstGeom prst="rect">
+            <a:avLst/>
+          </a:prstGeom>
+        </p:spPr>
+      </p:pic>
+      <p:sp>
+        <p:nvSpPr>
+          <p:cNvPr id="30" name="Text 21"/>
+          <p:cNvSpPr/>
+          <p:nvPr/>
+        </p:nvSpPr>
+        <p:spPr>
+          <a:xfrm>
+            <a:off x="8805642" y="3199110"/>
+            <a:ext cx="147237" cy="184051"/>
+          </a:xfrm>
+          <a:prstGeom prst="rect">
+            <a:avLst/>
+          </a:prstGeom>
+          <a:noFill/>
+          <a:ln/>
+        </p:spPr>
+        <p:txBody>
+          <a:bodyPr wrap="none" lIns="0" tIns="0" rIns="0" bIns="0" rtlCol="0" anchor="ctr"/>
+          <a:lstStyle/>
+          <a:p>
+            <a:pPr algn="ctr" indent="0" marL="0">
+              <a:lnSpc>
+                <a:spcPct val="100000"/>
+              </a:lnSpc>
+              <a:buNone/>
+            </a:pPr>
+            <a:r>
+              <a:rPr lang="en-US" sz="1150" b="1" dirty="0">
+                <a:solidFill>
+                  <a:srgbClr val="333F70"/>
+                </a:solidFill>
+                <a:latin typeface="Unbounded Bold" pitchFamily="34" charset="0"/>
+                <a:ea typeface="Unbounded Bold" pitchFamily="34" charset="-122"/>
+                <a:cs typeface="Unbounded Bold" pitchFamily="34" charset="-120"/>
+              </a:rPr>
+              <a:t>3</a:t>
+            </a:r>
+            <a:endParaRPr lang="en-US" sz="1150" dirty="0"/>
+          </a:p>
+        </p:txBody>
+      </p:sp>
+      <p:sp>
+        <p:nvSpPr>
+          <p:cNvPr id="31" name="Text 22"/>
+          <p:cNvSpPr/>
+          <p:nvPr/>
+        </p:nvSpPr>
+        <p:spPr>
+          <a:xfrm>
+            <a:off x="6332776" y="3499842"/>
+            <a:ext cx="5092969" cy="153392"/>
+          </a:xfrm>
+          <a:prstGeom prst="rect">
+            <a:avLst/>
+          </a:prstGeom>
+          <a:noFill/>
+          <a:ln/>
+        </p:spPr>
+        <p:txBody>
+          <a:bodyPr wrap="none" lIns="0" tIns="0" rIns="0" bIns="0" rtlCol="0" anchor="t"/>
+          <a:lstStyle/>
+          <a:p>
+            <a:pPr algn="l" indent="0" marL="0">
+              <a:lnSpc>
+                <a:spcPct val="104000"/>
+              </a:lnSpc>
+              <a:buNone/>
+            </a:pPr>
+            <a:r>
+              <a:rPr lang="en-US" sz="950" b="1" dirty="0">
+                <a:solidFill>
+                  <a:srgbClr val="333F70"/>
+                </a:solidFill>
+                <a:latin typeface="Unbounded Bold" pitchFamily="34" charset="0"/>
+                <a:ea typeface="Unbounded Bold" pitchFamily="34" charset="-122"/>
+                <a:cs typeface="Unbounded Bold" pitchFamily="34" charset="-120"/>
+              </a:rPr>
+              <a:t>Simulation &amp; Testing</a:t>
+            </a:r>
+            <a:endParaRPr lang="en-US" sz="950" dirty="0"/>
+          </a:p>
+        </p:txBody>
+      </p:sp>
+      <p:sp>
+        <p:nvSpPr>
+          <p:cNvPr id="32" name="Text 23"/>
+          <p:cNvSpPr/>
+          <p:nvPr/>
+        </p:nvSpPr>
+        <p:spPr>
+          <a:xfrm>
+            <a:off x="6332776" y="3711476"/>
+            <a:ext cx="5092969" cy="250428"/>
+          </a:xfrm>
+          <a:prstGeom prst="rect">
+            <a:avLst/>
+          </a:prstGeom>
+          <a:noFill/>
+          <a:ln/>
+        </p:spPr>
+        <p:txBody>
+          <a:bodyPr wrap="square" lIns="0" tIns="0" rIns="0" bIns="0" rtlCol="0" anchor="t">
+            <a:normAutofit/>
+          </a:bodyPr>
+          <a:lstStyle/>
+          <a:p>
+            <a:pPr algn="l" indent="0" marL="0">
+              <a:lnSpc>
+                <a:spcPct val="106000"/>
+              </a:lnSpc>
+              <a:buNone/>
+            </a:pPr>
+            <a:r>
+              <a:rPr lang="en-US" sz="750" dirty="0">
+                <a:solidFill>
+                  <a:srgbClr val="333F70"/>
+                </a:solidFill>
+                <a:latin typeface="Open Sans" pitchFamily="34" charset="0"/>
+                <a:ea typeface="Open Sans" pitchFamily="34" charset="-122"/>
+                <a:cs typeface="Open Sans" pitchFamily="34" charset="-120"/>
+              </a:rPr>
               <a:t>Build the full circuit in </a:t>
             </a:r>
+            <a:pPr algn="l" indent="0" marL="0">
+              <a:lnSpc>
+                <a:spcPct val="106000"/>
+              </a:lnSpc>
+              <a:buNone/>
+            </a:pPr>
             <a:r>
               <a:rPr lang="en-US" sz="750" b="1" dirty="0">
                 <a:solidFill>
@@ -12946,6 +13466,12 @@
               </a:rPr>
               <a:t>Logisim / Digital</a:t>
             </a:r>
+            <a:pPr algn="l" indent="0" marL="0">
+              <a:lnSpc>
+                <a:spcPct val="106000"/>
+              </a:lnSpc>
+              <a:buNone/>
+            </a:pPr>
             <a:r>
               <a:rPr lang="en-US" sz="750" dirty="0">
                 <a:solidFill>
@@ -12982,7 +13508,7 @@
           <a:bodyPr wrap="none" lIns="0" tIns="0" rIns="0" bIns="0" rtlCol="0" anchor="t"/>
           <a:lstStyle/>
           <a:p>
-            <a:pPr marL="0" indent="0" algn="l">
+            <a:pPr algn="l" indent="0" marL="0">
               <a:lnSpc>
                 <a:spcPct val="104000"/>
               </a:lnSpc>
@@ -13005,7 +13531,7 @@
       </p:sp>
       <p:graphicFrame>
         <p:nvGraphicFramePr>
-          <p:cNvPr id="34" name="Table 0"/>
+          <p:cNvPr id="9" name="Table 0"/>
           <p:cNvGraphicFramePr>
             <a:graphicFrameLocks noGrp="1"/>
           </p:cNvGraphicFramePr>
@@ -13019,48 +13545,18 @@
         </p:nvGraphicFramePr>
         <p:xfrm>
           <a:off x="661475" y="4466530"/>
-          <a:ext cx="10868745" cy="1869831"/>
+          <a:ext cx="9143771" cy="914400"/>
         </p:xfrm>
         <a:graphic>
           <a:graphicData uri="http://schemas.openxmlformats.org/drawingml/2006/table">
             <a:tbl>
               <a:tblPr/>
               <a:tblGrid>
-                <a:gridCol w="2173749">
-                  <a:extLst>
-                    <a:ext uri="{9D8B030D-6E8A-4147-A177-3AD203B41FA5}">
-                      <a16:colId xmlns:a16="http://schemas.microsoft.com/office/drawing/2014/main" val="20000"/>
-                    </a:ext>
-                  </a:extLst>
-                </a:gridCol>
-                <a:gridCol w="2173749">
-                  <a:extLst>
-                    <a:ext uri="{9D8B030D-6E8A-4147-A177-3AD203B41FA5}">
-                      <a16:colId xmlns:a16="http://schemas.microsoft.com/office/drawing/2014/main" val="20001"/>
-                    </a:ext>
-                  </a:extLst>
-                </a:gridCol>
-                <a:gridCol w="2173749">
-                  <a:extLst>
-                    <a:ext uri="{9D8B030D-6E8A-4147-A177-3AD203B41FA5}">
-                      <a16:colId xmlns:a16="http://schemas.microsoft.com/office/drawing/2014/main" val="20002"/>
-                    </a:ext>
-                  </a:extLst>
-                </a:gridCol>
-                <a:gridCol w="2173749">
-                  <a:extLst>
-                    <a:ext uri="{9D8B030D-6E8A-4147-A177-3AD203B41FA5}">
-                      <a16:colId xmlns:a16="http://schemas.microsoft.com/office/drawing/2014/main" val="20003"/>
-                    </a:ext>
-                  </a:extLst>
-                </a:gridCol>
-                <a:gridCol w="2173749">
-                  <a:extLst>
-                    <a:ext uri="{9D8B030D-6E8A-4147-A177-3AD203B41FA5}">
-                      <a16:colId xmlns:a16="http://schemas.microsoft.com/office/drawing/2014/main" val="20004"/>
-                    </a:ext>
-                  </a:extLst>
-                </a:gridCol>
+                <a:gridCol w="2173749"/>
+                <a:gridCol w="2173749"/>
+                <a:gridCol w="2173749"/>
+                <a:gridCol w="2173749"/>
+                <a:gridCol w="2173749"/>
               </a:tblGrid>
               <a:tr h="207759">
                 <a:tc>
@@ -13068,7 +13564,7 @@
                     <a:bodyPr/>
                     <a:lstStyle/>
                     <a:p>
-                      <a:pPr marL="0" indent="0">
+                      <a:pPr indent="0" marL="0">
                         <a:buNone/>
                       </a:pPr>
                       <a:r>
@@ -13136,7 +13632,7 @@
                     <a:bodyPr/>
                     <a:lstStyle/>
                     <a:p>
-                      <a:pPr marL="0" indent="0">
+                      <a:pPr indent="0" marL="0">
                         <a:buNone/>
                       </a:pPr>
                       <a:r>
@@ -13204,7 +13700,7 @@
                     <a:bodyPr/>
                     <a:lstStyle/>
                     <a:p>
-                      <a:pPr marL="0" indent="0">
+                      <a:pPr indent="0" marL="0">
                         <a:buNone/>
                       </a:pPr>
                       <a:r>
@@ -13272,7 +13768,7 @@
                     <a:bodyPr/>
                     <a:lstStyle/>
                     <a:p>
-                      <a:pPr marL="0" indent="0">
+                      <a:pPr indent="0" marL="0">
                         <a:buNone/>
                       </a:pPr>
                       <a:r>
@@ -13340,7 +13836,7 @@
                     <a:bodyPr/>
                     <a:lstStyle/>
                     <a:p>
-                      <a:pPr marL="0" indent="0">
+                      <a:pPr indent="0" marL="0">
                         <a:buNone/>
                       </a:pPr>
                       <a:r>
@@ -13403,11 +13899,6 @@
                     </a:solidFill>
                   </a:tcPr>
                 </a:tc>
-                <a:extLst>
-                  <a:ext uri="{0D108BD9-81ED-4DB2-BD59-A6C34878D82A}">
-                    <a16:rowId xmlns:a16="http://schemas.microsoft.com/office/drawing/2014/main" val="10000"/>
-                  </a:ext>
-                </a:extLst>
               </a:tr>
               <a:tr h="207759">
                 <a:tc>
@@ -13415,7 +13906,7 @@
                     <a:bodyPr/>
                     <a:lstStyle/>
                     <a:p>
-                      <a:pPr marL="0" indent="0">
+                      <a:pPr indent="0" marL="0">
                         <a:buNone/>
                       </a:pPr>
                       <a:r>
@@ -13457,7 +13948,7 @@
                     </a:lnR>
                     <a:lnT w="12700" cap="flat" cmpd="sng" algn="ctr">
                       <a:solidFill>
-                        <a:srgbClr val="26A688"/>
+                        <a:srgbClr val="F5F5F5"/>
                       </a:solidFill>
                       <a:prstDash val="solid"/>
                       <a:round/>
@@ -13485,7 +13976,7 @@
                     <a:bodyPr/>
                     <a:lstStyle/>
                     <a:p>
-                      <a:pPr marL="0" indent="0">
+                      <a:pPr indent="0" marL="0">
                         <a:buNone/>
                       </a:pPr>
                       <a:r>
@@ -13527,7 +14018,7 @@
                     </a:lnR>
                     <a:lnT w="12700" cap="flat" cmpd="sng" algn="ctr">
                       <a:solidFill>
-                        <a:srgbClr val="26A688"/>
+                        <a:srgbClr val="F5F5F5"/>
                       </a:solidFill>
                       <a:prstDash val="solid"/>
                       <a:round/>
@@ -13555,7 +14046,7 @@
                     <a:bodyPr/>
                     <a:lstStyle/>
                     <a:p>
-                      <a:pPr marL="0" indent="0">
+                      <a:pPr indent="0" marL="0">
                         <a:buNone/>
                       </a:pPr>
                       <a:r>
@@ -13597,7 +14088,7 @@
                     </a:lnR>
                     <a:lnT w="12700" cap="flat" cmpd="sng" algn="ctr">
                       <a:solidFill>
-                        <a:srgbClr val="26A688"/>
+                        <a:srgbClr val="F5F5F5"/>
                       </a:solidFill>
                       <a:prstDash val="solid"/>
                       <a:round/>
@@ -13625,7 +14116,7 @@
                     <a:bodyPr/>
                     <a:lstStyle/>
                     <a:p>
-                      <a:pPr marL="0" indent="0">
+                      <a:pPr indent="0" marL="0">
                         <a:buNone/>
                       </a:pPr>
                       <a:r>
@@ -13667,7 +14158,7 @@
                     </a:lnR>
                     <a:lnT w="12700" cap="flat" cmpd="sng" algn="ctr">
                       <a:solidFill>
-                        <a:srgbClr val="26A688"/>
+                        <a:srgbClr val="F5F5F5"/>
                       </a:solidFill>
                       <a:prstDash val="solid"/>
                       <a:round/>
@@ -13695,7 +14186,7 @@
                     <a:bodyPr/>
                     <a:lstStyle/>
                     <a:p>
-                      <a:pPr marL="0" indent="0">
+                      <a:pPr indent="0" marL="0">
                         <a:buNone/>
                       </a:pPr>
                       <a:r>
@@ -13737,7 +14228,7 @@
                     </a:lnR>
                     <a:lnT w="12700" cap="flat" cmpd="sng" algn="ctr">
                       <a:solidFill>
-                        <a:srgbClr val="26A688"/>
+                        <a:srgbClr val="F5F5F5"/>
                       </a:solidFill>
                       <a:prstDash val="solid"/>
                       <a:round/>
@@ -13760,11 +14251,6 @@
                     </a:solidFill>
                   </a:tcPr>
                 </a:tc>
-                <a:extLst>
-                  <a:ext uri="{0D108BD9-81ED-4DB2-BD59-A6C34878D82A}">
-                    <a16:rowId xmlns:a16="http://schemas.microsoft.com/office/drawing/2014/main" val="10001"/>
-                  </a:ext>
-                </a:extLst>
               </a:tr>
               <a:tr h="207759">
                 <a:tc>
@@ -13772,7 +14258,7 @@
                     <a:bodyPr/>
                     <a:lstStyle/>
                     <a:p>
-                      <a:pPr marL="0" indent="0">
+                      <a:pPr indent="0" marL="0">
                         <a:buNone/>
                       </a:pPr>
                       <a:r>
@@ -13814,7 +14300,7 @@
                     </a:lnR>
                     <a:lnT w="12700" cap="flat" cmpd="sng" algn="ctr">
                       <a:solidFill>
-                        <a:srgbClr val="F5F5F5"/>
+                        <a:srgbClr val="FFFFFF"/>
                       </a:solidFill>
                       <a:prstDash val="solid"/>
                       <a:round/>
@@ -13842,7 +14328,7 @@
                     <a:bodyPr/>
                     <a:lstStyle/>
                     <a:p>
-                      <a:pPr marL="0" indent="0">
+                      <a:pPr indent="0" marL="0">
                         <a:buNone/>
                       </a:pPr>
                       <a:r>
@@ -13884,7 +14370,7 @@
                     </a:lnR>
                     <a:lnT w="12700" cap="flat" cmpd="sng" algn="ctr">
                       <a:solidFill>
-                        <a:srgbClr val="F5F5F5"/>
+                        <a:srgbClr val="FFFFFF"/>
                       </a:solidFill>
                       <a:prstDash val="solid"/>
                       <a:round/>
@@ -13912,7 +14398,7 @@
                     <a:bodyPr/>
                     <a:lstStyle/>
                     <a:p>
-                      <a:pPr marL="0" indent="0">
+                      <a:pPr indent="0" marL="0">
                         <a:buNone/>
                       </a:pPr>
                       <a:r>
@@ -13954,7 +14440,7 @@
                     </a:lnR>
                     <a:lnT w="12700" cap="flat" cmpd="sng" algn="ctr">
                       <a:solidFill>
-                        <a:srgbClr val="F5F5F5"/>
+                        <a:srgbClr val="FFFFFF"/>
                       </a:solidFill>
                       <a:prstDash val="solid"/>
                       <a:round/>
@@ -13982,7 +14468,7 @@
                     <a:bodyPr/>
                     <a:lstStyle/>
                     <a:p>
-                      <a:pPr marL="0" indent="0">
+                      <a:pPr indent="0" marL="0">
                         <a:buNone/>
                       </a:pPr>
                       <a:r>
@@ -14024,7 +14510,7 @@
                     </a:lnR>
                     <a:lnT w="12700" cap="flat" cmpd="sng" algn="ctr">
                       <a:solidFill>
-                        <a:srgbClr val="F5F5F5"/>
+                        <a:srgbClr val="FFFFFF"/>
                       </a:solidFill>
                       <a:prstDash val="solid"/>
                       <a:round/>
@@ -14052,7 +14538,7 @@
                     <a:bodyPr/>
                     <a:lstStyle/>
                     <a:p>
-                      <a:pPr marL="0" indent="0">
+                      <a:pPr indent="0" marL="0">
                         <a:buNone/>
                       </a:pPr>
                       <a:r>
@@ -14094,7 +14580,7 @@
                     </a:lnR>
                     <a:lnT w="12700" cap="flat" cmpd="sng" algn="ctr">
                       <a:solidFill>
-                        <a:srgbClr val="F5F5F5"/>
+                        <a:srgbClr val="FFFFFF"/>
                       </a:solidFill>
                       <a:prstDash val="solid"/>
                       <a:round/>
@@ -14117,11 +14603,6 @@
                     </a:solidFill>
                   </a:tcPr>
                 </a:tc>
-                <a:extLst>
-                  <a:ext uri="{0D108BD9-81ED-4DB2-BD59-A6C34878D82A}">
-                    <a16:rowId xmlns:a16="http://schemas.microsoft.com/office/drawing/2014/main" val="10002"/>
-                  </a:ext>
-                </a:extLst>
               </a:tr>
               <a:tr h="207759">
                 <a:tc>
@@ -14129,7 +14610,7 @@
                     <a:bodyPr/>
                     <a:lstStyle/>
                     <a:p>
-                      <a:pPr marL="0" indent="0">
+                      <a:pPr indent="0" marL="0">
                         <a:buNone/>
                       </a:pPr>
                       <a:r>
@@ -14171,7 +14652,7 @@
                     </a:lnR>
                     <a:lnT w="12700" cap="flat" cmpd="sng" algn="ctr">
                       <a:solidFill>
-                        <a:srgbClr val="FFFFFF"/>
+                        <a:srgbClr val="F5F5F5"/>
                       </a:solidFill>
                       <a:prstDash val="solid"/>
                       <a:round/>
@@ -14199,7 +14680,7 @@
                     <a:bodyPr/>
                     <a:lstStyle/>
                     <a:p>
-                      <a:pPr marL="0" indent="0">
+                      <a:pPr indent="0" marL="0">
                         <a:buNone/>
                       </a:pPr>
                       <a:r>
@@ -14241,7 +14722,7 @@
                     </a:lnR>
                     <a:lnT w="12700" cap="flat" cmpd="sng" algn="ctr">
                       <a:solidFill>
-                        <a:srgbClr val="FFFFFF"/>
+                        <a:srgbClr val="F5F5F5"/>
                       </a:solidFill>
                       <a:prstDash val="solid"/>
                       <a:round/>
@@ -14269,7 +14750,7 @@
                     <a:bodyPr/>
                     <a:lstStyle/>
                     <a:p>
-                      <a:pPr marL="0" indent="0">
+                      <a:pPr indent="0" marL="0">
                         <a:buNone/>
                       </a:pPr>
                       <a:r>
@@ -14311,7 +14792,7 @@
                     </a:lnR>
                     <a:lnT w="12700" cap="flat" cmpd="sng" algn="ctr">
                       <a:solidFill>
-                        <a:srgbClr val="FFFFFF"/>
+                        <a:srgbClr val="F5F5F5"/>
                       </a:solidFill>
                       <a:prstDash val="solid"/>
                       <a:round/>
@@ -14339,7 +14820,7 @@
                     <a:bodyPr/>
                     <a:lstStyle/>
                     <a:p>
-                      <a:pPr marL="0" indent="0">
+                      <a:pPr indent="0" marL="0">
                         <a:buNone/>
                       </a:pPr>
                       <a:r>
@@ -14381,7 +14862,7 @@
                     </a:lnR>
                     <a:lnT w="12700" cap="flat" cmpd="sng" algn="ctr">
                       <a:solidFill>
-                        <a:srgbClr val="FFFFFF"/>
+                        <a:srgbClr val="F5F5F5"/>
                       </a:solidFill>
                       <a:prstDash val="solid"/>
                       <a:round/>
@@ -14409,7 +14890,7 @@
                     <a:bodyPr/>
                     <a:lstStyle/>
                     <a:p>
-                      <a:pPr marL="0" indent="0">
+                      <a:pPr indent="0" marL="0">
                         <a:buNone/>
                       </a:pPr>
                       <a:r>
@@ -14451,7 +14932,7 @@
                     </a:lnR>
                     <a:lnT w="12700" cap="flat" cmpd="sng" algn="ctr">
                       <a:solidFill>
-                        <a:srgbClr val="FFFFFF"/>
+                        <a:srgbClr val="F5F5F5"/>
                       </a:solidFill>
                       <a:prstDash val="solid"/>
                       <a:round/>
@@ -14474,11 +14955,6 @@
                     </a:solidFill>
                   </a:tcPr>
                 </a:tc>
-                <a:extLst>
-                  <a:ext uri="{0D108BD9-81ED-4DB2-BD59-A6C34878D82A}">
-                    <a16:rowId xmlns:a16="http://schemas.microsoft.com/office/drawing/2014/main" val="10003"/>
-                  </a:ext>
-                </a:extLst>
               </a:tr>
               <a:tr h="207759">
                 <a:tc>
@@ -14486,7 +14962,7 @@
                     <a:bodyPr/>
                     <a:lstStyle/>
                     <a:p>
-                      <a:pPr marL="0" indent="0">
+                      <a:pPr indent="0" marL="0">
                         <a:buNone/>
                       </a:pPr>
                       <a:r>
@@ -14528,7 +15004,7 @@
                     </a:lnR>
                     <a:lnT w="12700" cap="flat" cmpd="sng" algn="ctr">
                       <a:solidFill>
-                        <a:srgbClr val="F5F5F5"/>
+                        <a:srgbClr val="FFFFFF"/>
                       </a:solidFill>
                       <a:prstDash val="solid"/>
                       <a:round/>
@@ -14556,7 +15032,7 @@
                     <a:bodyPr/>
                     <a:lstStyle/>
                     <a:p>
-                      <a:pPr marL="0" indent="0">
+                      <a:pPr indent="0" marL="0">
                         <a:buNone/>
                       </a:pPr>
                       <a:r>
@@ -14598,7 +15074,7 @@
                     </a:lnR>
                     <a:lnT w="12700" cap="flat" cmpd="sng" algn="ctr">
                       <a:solidFill>
-                        <a:srgbClr val="F5F5F5"/>
+                        <a:srgbClr val="FFFFFF"/>
                       </a:solidFill>
                       <a:prstDash val="solid"/>
                       <a:round/>
@@ -14626,7 +15102,7 @@
                     <a:bodyPr/>
                     <a:lstStyle/>
                     <a:p>
-                      <a:pPr marL="0" indent="0">
+                      <a:pPr indent="0" marL="0">
                         <a:buNone/>
                       </a:pPr>
                       <a:r>
@@ -14668,7 +15144,7 @@
                     </a:lnR>
                     <a:lnT w="12700" cap="flat" cmpd="sng" algn="ctr">
                       <a:solidFill>
-                        <a:srgbClr val="F5F5F5"/>
+                        <a:srgbClr val="FFFFFF"/>
                       </a:solidFill>
                       <a:prstDash val="solid"/>
                       <a:round/>
@@ -14696,7 +15172,7 @@
                     <a:bodyPr/>
                     <a:lstStyle/>
                     <a:p>
-                      <a:pPr marL="0" indent="0">
+                      <a:pPr indent="0" marL="0">
                         <a:buNone/>
                       </a:pPr>
                       <a:r>
@@ -14738,7 +15214,7 @@
                     </a:lnR>
                     <a:lnT w="12700" cap="flat" cmpd="sng" algn="ctr">
                       <a:solidFill>
-                        <a:srgbClr val="F5F5F5"/>
+                        <a:srgbClr val="FFFFFF"/>
                       </a:solidFill>
                       <a:prstDash val="solid"/>
                       <a:round/>
@@ -14766,7 +15242,7 @@
                     <a:bodyPr/>
                     <a:lstStyle/>
                     <a:p>
-                      <a:pPr marL="0" indent="0">
+                      <a:pPr indent="0" marL="0">
                         <a:buNone/>
                       </a:pPr>
                       <a:r>
@@ -14808,7 +15284,7 @@
                     </a:lnR>
                     <a:lnT w="12700" cap="flat" cmpd="sng" algn="ctr">
                       <a:solidFill>
-                        <a:srgbClr val="F5F5F5"/>
+                        <a:srgbClr val="FFFFFF"/>
                       </a:solidFill>
                       <a:prstDash val="solid"/>
                       <a:round/>
@@ -14831,11 +15307,6 @@
                     </a:solidFill>
                   </a:tcPr>
                 </a:tc>
-                <a:extLst>
-                  <a:ext uri="{0D108BD9-81ED-4DB2-BD59-A6C34878D82A}">
-                    <a16:rowId xmlns:a16="http://schemas.microsoft.com/office/drawing/2014/main" val="10004"/>
-                  </a:ext>
-                </a:extLst>
               </a:tr>
               <a:tr h="207759">
                 <a:tc>
@@ -14843,7 +15314,7 @@
                     <a:bodyPr/>
                     <a:lstStyle/>
                     <a:p>
-                      <a:pPr marL="0" indent="0">
+                      <a:pPr indent="0" marL="0">
                         <a:buNone/>
                       </a:pPr>
                       <a:r>
@@ -14885,7 +15356,7 @@
                     </a:lnR>
                     <a:lnT w="12700" cap="flat" cmpd="sng" algn="ctr">
                       <a:solidFill>
-                        <a:srgbClr val="FFFFFF"/>
+                        <a:srgbClr val="F5F5F5"/>
                       </a:solidFill>
                       <a:prstDash val="solid"/>
                       <a:round/>
@@ -14913,7 +15384,7 @@
                     <a:bodyPr/>
                     <a:lstStyle/>
                     <a:p>
-                      <a:pPr marL="0" indent="0">
+                      <a:pPr indent="0" marL="0">
                         <a:buNone/>
                       </a:pPr>
                       <a:r>
@@ -14955,7 +15426,7 @@
                     </a:lnR>
                     <a:lnT w="12700" cap="flat" cmpd="sng" algn="ctr">
                       <a:solidFill>
-                        <a:srgbClr val="FFFFFF"/>
+                        <a:srgbClr val="F5F5F5"/>
                       </a:solidFill>
                       <a:prstDash val="solid"/>
                       <a:round/>
@@ -14983,7 +15454,7 @@
                     <a:bodyPr/>
                     <a:lstStyle/>
                     <a:p>
-                      <a:pPr marL="0" indent="0">
+                      <a:pPr indent="0" marL="0">
                         <a:buNone/>
                       </a:pPr>
                       <a:r>
@@ -15025,7 +15496,7 @@
                     </a:lnR>
                     <a:lnT w="12700" cap="flat" cmpd="sng" algn="ctr">
                       <a:solidFill>
-                        <a:srgbClr val="FFFFFF"/>
+                        <a:srgbClr val="F5F5F5"/>
                       </a:solidFill>
                       <a:prstDash val="solid"/>
                       <a:round/>
@@ -15053,7 +15524,7 @@
                     <a:bodyPr/>
                     <a:lstStyle/>
                     <a:p>
-                      <a:pPr marL="0" indent="0">
+                      <a:pPr indent="0" marL="0">
                         <a:buNone/>
                       </a:pPr>
                       <a:r>
@@ -15095,7 +15566,7 @@
                     </a:lnR>
                     <a:lnT w="12700" cap="flat" cmpd="sng" algn="ctr">
                       <a:solidFill>
-                        <a:srgbClr val="FFFFFF"/>
+                        <a:srgbClr val="F5F5F5"/>
                       </a:solidFill>
                       <a:prstDash val="solid"/>
                       <a:round/>
@@ -15123,7 +15594,7 @@
                     <a:bodyPr/>
                     <a:lstStyle/>
                     <a:p>
-                      <a:pPr marL="0" indent="0">
+                      <a:pPr indent="0" marL="0">
                         <a:buNone/>
                       </a:pPr>
                       <a:r>
@@ -15165,7 +15636,7 @@
                     </a:lnR>
                     <a:lnT w="12700" cap="flat" cmpd="sng" algn="ctr">
                       <a:solidFill>
-                        <a:srgbClr val="FFFFFF"/>
+                        <a:srgbClr val="F5F5F5"/>
                       </a:solidFill>
                       <a:prstDash val="solid"/>
                       <a:round/>
@@ -15188,11 +15659,6 @@
                     </a:solidFill>
                   </a:tcPr>
                 </a:tc>
-                <a:extLst>
-                  <a:ext uri="{0D108BD9-81ED-4DB2-BD59-A6C34878D82A}">
-                    <a16:rowId xmlns:a16="http://schemas.microsoft.com/office/drawing/2014/main" val="10005"/>
-                  </a:ext>
-                </a:extLst>
               </a:tr>
               <a:tr h="207759">
                 <a:tc>
@@ -15200,7 +15666,7 @@
                     <a:bodyPr/>
                     <a:lstStyle/>
                     <a:p>
-                      <a:pPr marL="0" indent="0">
+                      <a:pPr indent="0" marL="0">
                         <a:buNone/>
                       </a:pPr>
                       <a:r>
@@ -15242,7 +15708,7 @@
                     </a:lnR>
                     <a:lnT w="12700" cap="flat" cmpd="sng" algn="ctr">
                       <a:solidFill>
-                        <a:srgbClr val="F5F5F5"/>
+                        <a:srgbClr val="FFFFFF"/>
                       </a:solidFill>
                       <a:prstDash val="solid"/>
                       <a:round/>
@@ -15270,7 +15736,7 @@
                     <a:bodyPr/>
                     <a:lstStyle/>
                     <a:p>
-                      <a:pPr marL="0" indent="0">
+                      <a:pPr indent="0" marL="0">
                         <a:buNone/>
                       </a:pPr>
                       <a:r>
@@ -15312,7 +15778,7 @@
                     </a:lnR>
                     <a:lnT w="12700" cap="flat" cmpd="sng" algn="ctr">
                       <a:solidFill>
-                        <a:srgbClr val="F5F5F5"/>
+                        <a:srgbClr val="FFFFFF"/>
                       </a:solidFill>
                       <a:prstDash val="solid"/>
                       <a:round/>
@@ -15340,7 +15806,7 @@
                     <a:bodyPr/>
                     <a:lstStyle/>
                     <a:p>
-                      <a:pPr marL="0" indent="0">
+                      <a:pPr indent="0" marL="0">
                         <a:buNone/>
                       </a:pPr>
                       <a:r>
@@ -15382,7 +15848,7 @@
                     </a:lnR>
                     <a:lnT w="12700" cap="flat" cmpd="sng" algn="ctr">
                       <a:solidFill>
-                        <a:srgbClr val="F5F5F5"/>
+                        <a:srgbClr val="FFFFFF"/>
                       </a:solidFill>
                       <a:prstDash val="solid"/>
                       <a:round/>
@@ -15410,7 +15876,7 @@
                     <a:bodyPr/>
                     <a:lstStyle/>
                     <a:p>
-                      <a:pPr marL="0" indent="0">
+                      <a:pPr indent="0" marL="0">
                         <a:buNone/>
                       </a:pPr>
                       <a:r>
@@ -15452,7 +15918,7 @@
                     </a:lnR>
                     <a:lnT w="12700" cap="flat" cmpd="sng" algn="ctr">
                       <a:solidFill>
-                        <a:srgbClr val="F5F5F5"/>
+                        <a:srgbClr val="FFFFFF"/>
                       </a:solidFill>
                       <a:prstDash val="solid"/>
                       <a:round/>
@@ -15480,7 +15946,7 @@
                     <a:bodyPr/>
                     <a:lstStyle/>
                     <a:p>
-                      <a:pPr marL="0" indent="0">
+                      <a:pPr indent="0" marL="0">
                         <a:buNone/>
                       </a:pPr>
                       <a:r>
@@ -15522,7 +15988,7 @@
                     </a:lnR>
                     <a:lnT w="12700" cap="flat" cmpd="sng" algn="ctr">
                       <a:solidFill>
-                        <a:srgbClr val="F5F5F5"/>
+                        <a:srgbClr val="FFFFFF"/>
                       </a:solidFill>
                       <a:prstDash val="solid"/>
                       <a:round/>
@@ -15545,11 +16011,6 @@
                     </a:solidFill>
                   </a:tcPr>
                 </a:tc>
-                <a:extLst>
-                  <a:ext uri="{0D108BD9-81ED-4DB2-BD59-A6C34878D82A}">
-                    <a16:rowId xmlns:a16="http://schemas.microsoft.com/office/drawing/2014/main" val="10006"/>
-                  </a:ext>
-                </a:extLst>
               </a:tr>
               <a:tr h="207759">
                 <a:tc>
@@ -15557,7 +16018,7 @@
                     <a:bodyPr/>
                     <a:lstStyle/>
                     <a:p>
-                      <a:pPr marL="0" indent="0">
+                      <a:pPr indent="0" marL="0">
                         <a:buNone/>
                       </a:pPr>
                       <a:r>
@@ -15599,7 +16060,7 @@
                     </a:lnR>
                     <a:lnT w="12700" cap="flat" cmpd="sng" algn="ctr">
                       <a:solidFill>
-                        <a:srgbClr val="FFFFFF"/>
+                        <a:srgbClr val="F5F5F5"/>
                       </a:solidFill>
                       <a:prstDash val="solid"/>
                       <a:round/>
@@ -15627,7 +16088,7 @@
                     <a:bodyPr/>
                     <a:lstStyle/>
                     <a:p>
-                      <a:pPr marL="0" indent="0">
+                      <a:pPr indent="0" marL="0">
                         <a:buNone/>
                       </a:pPr>
                       <a:r>
@@ -15669,7 +16130,7 @@
                     </a:lnR>
                     <a:lnT w="12700" cap="flat" cmpd="sng" algn="ctr">
                       <a:solidFill>
-                        <a:srgbClr val="FFFFFF"/>
+                        <a:srgbClr val="F5F5F5"/>
                       </a:solidFill>
                       <a:prstDash val="solid"/>
                       <a:round/>
@@ -15697,7 +16158,7 @@
                     <a:bodyPr/>
                     <a:lstStyle/>
                     <a:p>
-                      <a:pPr marL="0" indent="0">
+                      <a:pPr indent="0" marL="0">
                         <a:buNone/>
                       </a:pPr>
                       <a:r>
@@ -15739,7 +16200,7 @@
                     </a:lnR>
                     <a:lnT w="12700" cap="flat" cmpd="sng" algn="ctr">
                       <a:solidFill>
-                        <a:srgbClr val="FFFFFF"/>
+                        <a:srgbClr val="F5F5F5"/>
                       </a:solidFill>
                       <a:prstDash val="solid"/>
                       <a:round/>
@@ -15767,7 +16228,7 @@
                     <a:bodyPr/>
                     <a:lstStyle/>
                     <a:p>
-                      <a:pPr marL="0" indent="0">
+                      <a:pPr indent="0" marL="0">
                         <a:buNone/>
                       </a:pPr>
                       <a:r>
@@ -15809,7 +16270,7 @@
                     </a:lnR>
                     <a:lnT w="12700" cap="flat" cmpd="sng" algn="ctr">
                       <a:solidFill>
-                        <a:srgbClr val="FFFFFF"/>
+                        <a:srgbClr val="F5F5F5"/>
                       </a:solidFill>
                       <a:prstDash val="solid"/>
                       <a:round/>
@@ -15837,7 +16298,7 @@
                     <a:bodyPr/>
                     <a:lstStyle/>
                     <a:p>
-                      <a:pPr marL="0" indent="0">
+                      <a:pPr indent="0" marL="0">
                         <a:buNone/>
                       </a:pPr>
                       <a:r>
@@ -15879,7 +16340,7 @@
                     </a:lnR>
                     <a:lnT w="12700" cap="flat" cmpd="sng" algn="ctr">
                       <a:solidFill>
-                        <a:srgbClr val="FFFFFF"/>
+                        <a:srgbClr val="F5F5F5"/>
                       </a:solidFill>
                       <a:prstDash val="solid"/>
                       <a:round/>
@@ -15902,11 +16363,6 @@
                     </a:solidFill>
                   </a:tcPr>
                 </a:tc>
-                <a:extLst>
-                  <a:ext uri="{0D108BD9-81ED-4DB2-BD59-A6C34878D82A}">
-                    <a16:rowId xmlns:a16="http://schemas.microsoft.com/office/drawing/2014/main" val="10007"/>
-                  </a:ext>
-                </a:extLst>
               </a:tr>
               <a:tr h="207759">
                 <a:tc>
@@ -15914,7 +16370,7 @@
                     <a:bodyPr/>
                     <a:lstStyle/>
                     <a:p>
-                      <a:pPr marL="0" indent="0">
+                      <a:pPr indent="0" marL="0">
                         <a:buNone/>
                       </a:pPr>
                       <a:r>
@@ -15956,7 +16412,7 @@
                     </a:lnR>
                     <a:lnT w="12700" cap="flat" cmpd="sng" algn="ctr">
                       <a:solidFill>
-                        <a:srgbClr val="F5F5F5"/>
+                        <a:srgbClr val="FFFFFF"/>
                       </a:solidFill>
                       <a:prstDash val="solid"/>
                       <a:round/>
@@ -15984,7 +16440,7 @@
                     <a:bodyPr/>
                     <a:lstStyle/>
                     <a:p>
-                      <a:pPr marL="0" indent="0">
+                      <a:pPr indent="0" marL="0">
                         <a:buNone/>
                       </a:pPr>
                       <a:r>
@@ -16026,7 +16482,7 @@
                     </a:lnR>
                     <a:lnT w="12700" cap="flat" cmpd="sng" algn="ctr">
                       <a:solidFill>
-                        <a:srgbClr val="F5F5F5"/>
+                        <a:srgbClr val="FFFFFF"/>
                       </a:solidFill>
                       <a:prstDash val="solid"/>
                       <a:round/>
@@ -16054,7 +16510,7 @@
                     <a:bodyPr/>
                     <a:lstStyle/>
                     <a:p>
-                      <a:pPr marL="0" indent="0">
+                      <a:pPr indent="0" marL="0">
                         <a:buNone/>
                       </a:pPr>
                       <a:r>
@@ -16096,7 +16552,7 @@
                     </a:lnR>
                     <a:lnT w="12700" cap="flat" cmpd="sng" algn="ctr">
                       <a:solidFill>
-                        <a:srgbClr val="F5F5F5"/>
+                        <a:srgbClr val="FFFFFF"/>
                       </a:solidFill>
                       <a:prstDash val="solid"/>
                       <a:round/>
@@ -16124,7 +16580,7 @@
                     <a:bodyPr/>
                     <a:lstStyle/>
                     <a:p>
-                      <a:pPr marL="0" indent="0">
+                      <a:pPr indent="0" marL="0">
                         <a:buNone/>
                       </a:pPr>
                       <a:r>
@@ -16166,7 +16622,7 @@
                     </a:lnR>
                     <a:lnT w="12700" cap="flat" cmpd="sng" algn="ctr">
                       <a:solidFill>
-                        <a:srgbClr val="F5F5F5"/>
+                        <a:srgbClr val="FFFFFF"/>
                       </a:solidFill>
                       <a:prstDash val="solid"/>
                       <a:round/>
@@ -16194,7 +16650,7 @@
                     <a:bodyPr/>
                     <a:lstStyle/>
                     <a:p>
-                      <a:pPr marL="0" indent="0">
+                      <a:pPr indent="0" marL="0">
                         <a:buNone/>
                       </a:pPr>
                       <a:r>
@@ -16236,7 +16692,7 @@
                     </a:lnR>
                     <a:lnT w="12700" cap="flat" cmpd="sng" algn="ctr">
                       <a:solidFill>
-                        <a:srgbClr val="F5F5F5"/>
+                        <a:srgbClr val="FFFFFF"/>
                       </a:solidFill>
                       <a:prstDash val="solid"/>
                       <a:round/>
@@ -16259,11 +16715,6 @@
                     </a:solidFill>
                   </a:tcPr>
                 </a:tc>
-                <a:extLst>
-                  <a:ext uri="{0D108BD9-81ED-4DB2-BD59-A6C34878D82A}">
-                    <a16:rowId xmlns:a16="http://schemas.microsoft.com/office/drawing/2014/main" val="10008"/>
-                  </a:ext>
-                </a:extLst>
               </a:tr>
             </a:tbl>
           </a:graphicData>
@@ -16337,7 +16788,7 @@
           <a:bodyPr wrap="none" lIns="0" tIns="0" rIns="0" bIns="0" rtlCol="0" anchor="t"/>
           <a:lstStyle/>
           <a:p>
-            <a:pPr marL="0" indent="0" algn="l">
+            <a:pPr algn="l" indent="0" marL="0">
               <a:lnSpc>
                 <a:spcPct val="96000"/>
               </a:lnSpc>
@@ -16379,7 +16830,7 @@
           <a:bodyPr wrap="none" lIns="0" tIns="0" rIns="0" bIns="0" rtlCol="0" anchor="t"/>
           <a:lstStyle/>
           <a:p>
-            <a:pPr marL="0" indent="0" algn="l">
+            <a:pPr algn="l" indent="0" marL="0">
               <a:lnSpc>
                 <a:spcPct val="104000"/>
               </a:lnSpc>
@@ -16421,7 +16872,7 @@
           <a:bodyPr wrap="none" lIns="0" tIns="0" rIns="0" bIns="0" rtlCol="0" anchor="t"/>
           <a:lstStyle/>
           <a:p>
-            <a:pPr marL="0" indent="0" algn="l">
+            <a:pPr algn="l" indent="0" marL="0">
               <a:lnSpc>
                 <a:spcPct val="104000"/>
               </a:lnSpc>
@@ -16458,48 +16909,18 @@
         </p:nvGraphicFramePr>
         <p:xfrm>
           <a:off x="661475" y="1691779"/>
-          <a:ext cx="6395185" cy="1938490"/>
+          <a:ext cx="9143771" cy="914400"/>
         </p:xfrm>
         <a:graphic>
           <a:graphicData uri="http://schemas.openxmlformats.org/drawingml/2006/table">
             <a:tbl>
               <a:tblPr/>
               <a:tblGrid>
-                <a:gridCol w="1279037">
-                  <a:extLst>
-                    <a:ext uri="{9D8B030D-6E8A-4147-A177-3AD203B41FA5}">
-                      <a16:colId xmlns:a16="http://schemas.microsoft.com/office/drawing/2014/main" val="20000"/>
-                    </a:ext>
-                  </a:extLst>
-                </a:gridCol>
-                <a:gridCol w="1279037">
-                  <a:extLst>
-                    <a:ext uri="{9D8B030D-6E8A-4147-A177-3AD203B41FA5}">
-                      <a16:colId xmlns:a16="http://schemas.microsoft.com/office/drawing/2014/main" val="20001"/>
-                    </a:ext>
-                  </a:extLst>
-                </a:gridCol>
-                <a:gridCol w="1279037">
-                  <a:extLst>
-                    <a:ext uri="{9D8B030D-6E8A-4147-A177-3AD203B41FA5}">
-                      <a16:colId xmlns:a16="http://schemas.microsoft.com/office/drawing/2014/main" val="20002"/>
-                    </a:ext>
-                  </a:extLst>
-                </a:gridCol>
-                <a:gridCol w="1279037">
-                  <a:extLst>
-                    <a:ext uri="{9D8B030D-6E8A-4147-A177-3AD203B41FA5}">
-                      <a16:colId xmlns:a16="http://schemas.microsoft.com/office/drawing/2014/main" val="20003"/>
-                    </a:ext>
-                  </a:extLst>
-                </a:gridCol>
-                <a:gridCol w="1279037">
-                  <a:extLst>
-                    <a:ext uri="{9D8B030D-6E8A-4147-A177-3AD203B41FA5}">
-                      <a16:colId xmlns:a16="http://schemas.microsoft.com/office/drawing/2014/main" val="20004"/>
-                    </a:ext>
-                  </a:extLst>
-                </a:gridCol>
+                <a:gridCol w="1279037"/>
+                <a:gridCol w="1279037"/>
+                <a:gridCol w="1279037"/>
+                <a:gridCol w="1279037"/>
+                <a:gridCol w="1279037"/>
               </a:tblGrid>
               <a:tr h="320965">
                 <a:tc>
@@ -16507,7 +16928,7 @@
                     <a:bodyPr/>
                     <a:lstStyle/>
                     <a:p>
-                      <a:pPr marL="0" indent="0">
+                      <a:pPr indent="0" marL="0">
                         <a:buNone/>
                       </a:pPr>
                       <a:r>
@@ -16575,7 +16996,7 @@
                     <a:bodyPr/>
                     <a:lstStyle/>
                     <a:p>
-                      <a:pPr marL="0" indent="0">
+                      <a:pPr indent="0" marL="0">
                         <a:buNone/>
                       </a:pPr>
                       <a:r>
@@ -16643,7 +17064,7 @@
                     <a:bodyPr/>
                     <a:lstStyle/>
                     <a:p>
-                      <a:pPr marL="0" indent="0">
+                      <a:pPr indent="0" marL="0">
                         <a:buNone/>
                       </a:pPr>
                       <a:r>
@@ -16711,7 +17132,7 @@
                     <a:bodyPr/>
                     <a:lstStyle/>
                     <a:p>
-                      <a:pPr marL="0" indent="0">
+                      <a:pPr indent="0" marL="0">
                         <a:buNone/>
                       </a:pPr>
                       <a:r>
@@ -16779,7 +17200,7 @@
                     <a:bodyPr/>
                     <a:lstStyle/>
                     <a:p>
-                      <a:pPr marL="0" indent="0">
+                      <a:pPr indent="0" marL="0">
                         <a:buNone/>
                       </a:pPr>
                       <a:r>
@@ -16842,11 +17263,6 @@
                     </a:solidFill>
                   </a:tcPr>
                 </a:tc>
-                <a:extLst>
-                  <a:ext uri="{0D108BD9-81ED-4DB2-BD59-A6C34878D82A}">
-                    <a16:rowId xmlns:a16="http://schemas.microsoft.com/office/drawing/2014/main" val="10000"/>
-                  </a:ext>
-                </a:extLst>
               </a:tr>
               <a:tr h="324140">
                 <a:tc>
@@ -16854,7 +17270,7 @@
                     <a:bodyPr/>
                     <a:lstStyle/>
                     <a:p>
-                      <a:pPr marL="0" indent="0">
+                      <a:pPr indent="0" marL="0">
                         <a:buNone/>
                       </a:pPr>
                       <a:r>
@@ -16919,7 +17335,7 @@
                     <a:bodyPr/>
                     <a:lstStyle/>
                     <a:p>
-                      <a:pPr marL="0" indent="0">
+                      <a:pPr indent="0" marL="0">
                         <a:buNone/>
                       </a:pPr>
                       <a:r>
@@ -16984,7 +17400,7 @@
                     <a:bodyPr/>
                     <a:lstStyle/>
                     <a:p>
-                      <a:pPr marL="0" indent="0">
+                      <a:pPr indent="0" marL="0">
                         <a:buNone/>
                       </a:pPr>
                       <a:r>
@@ -17049,7 +17465,7 @@
                     <a:bodyPr/>
                     <a:lstStyle/>
                     <a:p>
-                      <a:pPr marL="0" indent="0">
+                      <a:pPr indent="0" marL="0">
                         <a:buNone/>
                       </a:pPr>
                       <a:r>
@@ -17114,7 +17530,7 @@
                     <a:bodyPr/>
                     <a:lstStyle/>
                     <a:p>
-                      <a:pPr marL="0" indent="0">
+                      <a:pPr indent="0" marL="0">
                         <a:buNone/>
                       </a:pPr>
                       <a:r>
@@ -17174,11 +17590,6 @@
                     </a:lnB>
                   </a:tcPr>
                 </a:tc>
-                <a:extLst>
-                  <a:ext uri="{0D108BD9-81ED-4DB2-BD59-A6C34878D82A}">
-                    <a16:rowId xmlns:a16="http://schemas.microsoft.com/office/drawing/2014/main" val="10001"/>
-                  </a:ext>
-                </a:extLst>
               </a:tr>
               <a:tr h="324140">
                 <a:tc>
@@ -17186,7 +17597,7 @@
                     <a:bodyPr/>
                     <a:lstStyle/>
                     <a:p>
-                      <a:pPr marL="0" indent="0">
+                      <a:pPr indent="0" marL="0">
                         <a:buNone/>
                       </a:pPr>
                       <a:r>
@@ -17251,7 +17662,7 @@
                     <a:bodyPr/>
                     <a:lstStyle/>
                     <a:p>
-                      <a:pPr marL="0" indent="0">
+                      <a:pPr indent="0" marL="0">
                         <a:buNone/>
                       </a:pPr>
                       <a:r>
@@ -17316,7 +17727,7 @@
                     <a:bodyPr/>
                     <a:lstStyle/>
                     <a:p>
-                      <a:pPr marL="0" indent="0">
+                      <a:pPr indent="0" marL="0">
                         <a:buNone/>
                       </a:pPr>
                       <a:r>
@@ -17381,7 +17792,7 @@
                     <a:bodyPr/>
                     <a:lstStyle/>
                     <a:p>
-                      <a:pPr marL="0" indent="0">
+                      <a:pPr indent="0" marL="0">
                         <a:buNone/>
                       </a:pPr>
                       <a:r>
@@ -17446,7 +17857,7 @@
                     <a:bodyPr/>
                     <a:lstStyle/>
                     <a:p>
-                      <a:pPr marL="0" indent="0">
+                      <a:pPr indent="0" marL="0">
                         <a:buNone/>
                       </a:pPr>
                       <a:r>
@@ -17506,11 +17917,6 @@
                     </a:lnB>
                   </a:tcPr>
                 </a:tc>
-                <a:extLst>
-                  <a:ext uri="{0D108BD9-81ED-4DB2-BD59-A6C34878D82A}">
-                    <a16:rowId xmlns:a16="http://schemas.microsoft.com/office/drawing/2014/main" val="10002"/>
-                  </a:ext>
-                </a:extLst>
               </a:tr>
               <a:tr h="324140">
                 <a:tc>
@@ -17518,7 +17924,7 @@
                     <a:bodyPr/>
                     <a:lstStyle/>
                     <a:p>
-                      <a:pPr marL="0" indent="0">
+                      <a:pPr indent="0" marL="0">
                         <a:buNone/>
                       </a:pPr>
                       <a:r>
@@ -17583,7 +17989,7 @@
                     <a:bodyPr/>
                     <a:lstStyle/>
                     <a:p>
-                      <a:pPr marL="0" indent="0">
+                      <a:pPr indent="0" marL="0">
                         <a:buNone/>
                       </a:pPr>
                       <a:r>
@@ -17648,7 +18054,7 @@
                     <a:bodyPr/>
                     <a:lstStyle/>
                     <a:p>
-                      <a:pPr marL="0" indent="0">
+                      <a:pPr indent="0" marL="0">
                         <a:buNone/>
                       </a:pPr>
                       <a:r>
@@ -17713,7 +18119,7 @@
                     <a:bodyPr/>
                     <a:lstStyle/>
                     <a:p>
-                      <a:pPr marL="0" indent="0">
+                      <a:pPr indent="0" marL="0">
                         <a:buNone/>
                       </a:pPr>
                       <a:r>
@@ -17778,7 +18184,7 @@
                     <a:bodyPr/>
                     <a:lstStyle/>
                     <a:p>
-                      <a:pPr marL="0" indent="0">
+                      <a:pPr indent="0" marL="0">
                         <a:buNone/>
                       </a:pPr>
                       <a:r>
@@ -17838,11 +18244,6 @@
                     </a:lnB>
                   </a:tcPr>
                 </a:tc>
-                <a:extLst>
-                  <a:ext uri="{0D108BD9-81ED-4DB2-BD59-A6C34878D82A}">
-                    <a16:rowId xmlns:a16="http://schemas.microsoft.com/office/drawing/2014/main" val="10003"/>
-                  </a:ext>
-                </a:extLst>
               </a:tr>
               <a:tr h="324140">
                 <a:tc>
@@ -17850,7 +18251,7 @@
                     <a:bodyPr/>
                     <a:lstStyle/>
                     <a:p>
-                      <a:pPr marL="0" indent="0">
+                      <a:pPr indent="0" marL="0">
                         <a:buNone/>
                       </a:pPr>
                       <a:r>
@@ -17915,7 +18316,7 @@
                     <a:bodyPr/>
                     <a:lstStyle/>
                     <a:p>
-                      <a:pPr marL="0" indent="0">
+                      <a:pPr indent="0" marL="0">
                         <a:buNone/>
                       </a:pPr>
                       <a:r>
@@ -17980,7 +18381,7 @@
                     <a:bodyPr/>
                     <a:lstStyle/>
                     <a:p>
-                      <a:pPr marL="0" indent="0">
+                      <a:pPr indent="0" marL="0">
                         <a:buNone/>
                       </a:pPr>
                       <a:r>
@@ -18045,7 +18446,7 @@
                     <a:bodyPr/>
                     <a:lstStyle/>
                     <a:p>
-                      <a:pPr marL="0" indent="0">
+                      <a:pPr indent="0" marL="0">
                         <a:buNone/>
                       </a:pPr>
                       <a:r>
@@ -18110,7 +18511,7 @@
                     <a:bodyPr/>
                     <a:lstStyle/>
                     <a:p>
-                      <a:pPr marL="0" indent="0">
+                      <a:pPr indent="0" marL="0">
                         <a:buNone/>
                       </a:pPr>
                       <a:r>
@@ -18170,11 +18571,6 @@
                     </a:lnB>
                   </a:tcPr>
                 </a:tc>
-                <a:extLst>
-                  <a:ext uri="{0D108BD9-81ED-4DB2-BD59-A6C34878D82A}">
-                    <a16:rowId xmlns:a16="http://schemas.microsoft.com/office/drawing/2014/main" val="10004"/>
-                  </a:ext>
-                </a:extLst>
               </a:tr>
               <a:tr h="320965">
                 <a:tc>
@@ -18182,7 +18578,7 @@
                     <a:bodyPr/>
                     <a:lstStyle/>
                     <a:p>
-                      <a:pPr marL="0" indent="0">
+                      <a:pPr indent="0" marL="0">
                         <a:buNone/>
                       </a:pPr>
                       <a:r>
@@ -18247,7 +18643,7 @@
                     <a:bodyPr/>
                     <a:lstStyle/>
                     <a:p>
-                      <a:pPr marL="0" indent="0">
+                      <a:pPr indent="0" marL="0">
                         <a:buNone/>
                       </a:pPr>
                       <a:r>
@@ -18312,7 +18708,7 @@
                     <a:bodyPr/>
                     <a:lstStyle/>
                     <a:p>
-                      <a:pPr marL="0" indent="0">
+                      <a:pPr indent="0" marL="0">
                         <a:buNone/>
                       </a:pPr>
                       <a:r>
@@ -18377,7 +18773,7 @@
                     <a:bodyPr/>
                     <a:lstStyle/>
                     <a:p>
-                      <a:pPr marL="0" indent="0">
+                      <a:pPr indent="0" marL="0">
                         <a:buNone/>
                       </a:pPr>
                       <a:r>
@@ -18442,7 +18838,7 @@
                     <a:bodyPr/>
                     <a:lstStyle/>
                     <a:p>
-                      <a:pPr marL="0" indent="0">
+                      <a:pPr indent="0" marL="0">
                         <a:buNone/>
                       </a:pPr>
                       <a:r>
@@ -18502,11 +18898,6 @@
                     </a:lnB>
                   </a:tcPr>
                 </a:tc>
-                <a:extLst>
-                  <a:ext uri="{0D108BD9-81ED-4DB2-BD59-A6C34878D82A}">
-                    <a16:rowId xmlns:a16="http://schemas.microsoft.com/office/drawing/2014/main" val="10005"/>
-                  </a:ext>
-                </a:extLst>
               </a:tr>
             </a:tbl>
           </a:graphicData>
@@ -18535,7 +18926,7 @@
           </a:bodyPr>
           <a:lstStyle/>
           <a:p>
-            <a:pPr marL="0" indent="0" algn="l">
+            <a:pPr algn="l" indent="0" marL="0">
               <a:lnSpc>
                 <a:spcPct val="119000"/>
               </a:lnSpc>
@@ -18564,8 +18955,8 @@
         </p:nvSpPr>
         <p:spPr>
           <a:xfrm>
-            <a:off x="7378119" y="1376361"/>
-            <a:ext cx="4439094" cy="374765"/>
+            <a:off x="7378119" y="1376362"/>
+            <a:ext cx="4158352" cy="201910"/>
           </a:xfrm>
           <a:prstGeom prst="rect">
             <a:avLst/>
@@ -18577,7 +18968,7 @@
           <a:bodyPr wrap="none" lIns="0" tIns="0" rIns="0" bIns="0" rtlCol="0" anchor="t"/>
           <a:lstStyle/>
           <a:p>
-            <a:pPr marL="0" indent="0" algn="l">
+            <a:pPr algn="l" indent="0" marL="0">
               <a:lnSpc>
                 <a:spcPct val="104000"/>
               </a:lnSpc>
@@ -18600,17 +18991,17 @@
       </p:sp>
       <p:pic>
         <p:nvPicPr>
-          <p:cNvPr id="9" name="Image 0" descr="preencoded.png"/>
+          <p:cNvPr id="9" name="Image 0" descr="preencoded.png">    </p:cNvPr>
           <p:cNvPicPr>
             <a:picLocks noChangeAspect="1"/>
           </p:cNvPicPr>
           <p:nvPr/>
         </p:nvPicPr>
         <p:blipFill>
-          <a:blip>
+          <a:blip r:embed="rId1">
             <a:extLst>
               <a:ext uri="{96DAC541-7B7A-43D3-8B79-37D633B846F1}">
-                <asvg:svgBlip xmlns:asvg="http://schemas.microsoft.com/office/drawing/2016/SVG/main" r:embed="rId3"/>
+                <asvg:svgBlip xmlns:asvg="http://schemas.microsoft.com/office/drawing/2016/SVG/main" r:embed="rId2"/>
               </a:ext>
             </a:extLst>
           </a:blip>
@@ -18620,8 +19011,8 @@
         </p:blipFill>
         <p:spPr>
           <a:xfrm>
-            <a:off x="7359068" y="1672729"/>
-            <a:ext cx="7753679" cy="1316007"/>
+            <a:off x="7359069" y="1672729"/>
+            <a:ext cx="4177402" cy="709017"/>
           </a:xfrm>
           <a:prstGeom prst="rect">
             <a:avLst/>
@@ -18630,14 +19021,14 @@
       </p:pic>
       <p:sp>
         <p:nvSpPr>
-          <p:cNvPr id="6" name="Text 6"/>
+          <p:cNvPr id="10" name="Text 6"/>
           <p:cNvSpPr/>
           <p:nvPr/>
         </p:nvSpPr>
         <p:spPr>
           <a:xfrm>
-            <a:off x="7545396" y="1691778"/>
-            <a:ext cx="4260523" cy="374765"/>
+            <a:off x="7545397" y="1691779"/>
+            <a:ext cx="3991074" cy="201910"/>
           </a:xfrm>
           <a:prstGeom prst="rect">
             <a:avLst/>
@@ -18649,7 +19040,7 @@
           <a:bodyPr wrap="none" lIns="0" tIns="0" rIns="0" bIns="0" rtlCol="0" anchor="t"/>
           <a:lstStyle/>
           <a:p>
-            <a:pPr marL="0" indent="0" algn="l">
+            <a:pPr algn="l" indent="0" marL="0">
               <a:lnSpc>
                 <a:spcPct val="104000"/>
               </a:lnSpc>
@@ -18678,8 +19069,8 @@
         </p:nvSpPr>
         <p:spPr>
           <a:xfrm>
-            <a:off x="7545396" y="1994594"/>
-            <a:ext cx="4260523" cy="683235"/>
+            <a:off x="7545397" y="1994595"/>
+            <a:ext cx="3991074" cy="368102"/>
           </a:xfrm>
           <a:prstGeom prst="rect">
             <a:avLst/>
@@ -18693,7 +19084,7 @@
           </a:bodyPr>
           <a:lstStyle/>
           <a:p>
-            <a:pPr marL="0" indent="0" algn="l">
+            <a:pPr algn="l" indent="0" marL="0">
               <a:lnSpc>
                 <a:spcPct val="119000"/>
               </a:lnSpc>
@@ -18710,6 +19101,12 @@
               </a:rPr>
               <a:t>Full adder truth table verified across all </a:t>
             </a:r>
+            <a:pPr algn="l" indent="0" marL="0">
+              <a:lnSpc>
+                <a:spcPct val="119000"/>
+              </a:lnSpc>
+              <a:buNone/>
+            </a:pPr>
             <a:r>
               <a:rPr lang="en-US" sz="1000" b="1" dirty="0">
                 <a:solidFill>
@@ -18721,6 +19118,12 @@
               </a:rPr>
               <a:t>8 input combinations</a:t>
             </a:r>
+            <a:pPr algn="l" indent="0" marL="0">
+              <a:lnSpc>
+                <a:spcPct val="119000"/>
+              </a:lnSpc>
+              <a:buNone/>
+            </a:pPr>
             <a:r>
               <a:rPr lang="en-US" sz="1000" dirty="0">
                 <a:solidFill>
@@ -18738,130 +19141,14 @@
       </p:sp>
       <p:pic>
         <p:nvPicPr>
-          <p:cNvPr id="12" name="Image 1" descr="preencoded.png"/>
+          <p:cNvPr id="12" name="Image 1" descr="preencoded.png">    </p:cNvPr>
           <p:cNvPicPr>
             <a:picLocks noChangeAspect="1"/>
           </p:cNvPicPr>
           <p:nvPr/>
         </p:nvPicPr>
         <p:blipFill>
-          <a:blip>
-            <a:extLst>
-              <a:ext uri="{96DAC541-7B7A-43D3-8B79-37D633B846F1}">
-                <asvg:svgBlip xmlns:asvg="http://schemas.microsoft.com/office/drawing/2016/SVG/main" r:embed="rId3"/>
-              </a:ext>
-            </a:extLst>
-          </a:blip>
-          <a:stretch>
-            <a:fillRect/>
-          </a:stretch>
-        </p:blipFill>
-        <p:spPr>
-          <a:xfrm>
-            <a:off x="7359068" y="2545457"/>
-            <a:ext cx="7753679" cy="1316007"/>
-          </a:xfrm>
-          <a:prstGeom prst="rect">
-            <a:avLst/>
-          </a:prstGeom>
-        </p:spPr>
-      </p:pic>
-      <p:sp>
-        <p:nvSpPr>
-          <p:cNvPr id="13" name="Text 8"/>
-          <p:cNvSpPr/>
-          <p:nvPr/>
-        </p:nvSpPr>
-        <p:spPr>
-          <a:xfrm>
-            <a:off x="7545396" y="2564506"/>
-            <a:ext cx="4260523" cy="374765"/>
-          </a:xfrm>
-          <a:prstGeom prst="rect">
-            <a:avLst/>
-          </a:prstGeom>
-          <a:noFill/>
-          <a:ln/>
-        </p:spPr>
-        <p:txBody>
-          <a:bodyPr wrap="none" lIns="0" tIns="0" rIns="0" bIns="0" rtlCol="0" anchor="t"/>
-          <a:lstStyle/>
-          <a:p>
-            <a:pPr marL="0" indent="0" algn="l">
-              <a:lnSpc>
-                <a:spcPct val="104000"/>
-              </a:lnSpc>
-              <a:buNone/>
-            </a:pPr>
-            <a:r>
-              <a:rPr lang="en-US" sz="1250" b="1" dirty="0">
-                <a:solidFill>
-                  <a:srgbClr val="333F70"/>
-                </a:solidFill>
-                <a:latin typeface="Unbounded Bold" pitchFamily="34" charset="0"/>
-                <a:ea typeface="Unbounded Bold" pitchFamily="34" charset="-122"/>
-                <a:cs typeface="Unbounded Bold" pitchFamily="34" charset="-120"/>
-              </a:rPr>
-              <a:t>Overflow Detection</a:t>
-            </a:r>
-            <a:endParaRPr lang="en-US" sz="1250" dirty="0"/>
-          </a:p>
-        </p:txBody>
-      </p:sp>
-      <p:sp>
-        <p:nvSpPr>
-          <p:cNvPr id="14" name="Text 9"/>
-          <p:cNvSpPr/>
-          <p:nvPr/>
-        </p:nvSpPr>
-        <p:spPr>
-          <a:xfrm>
-            <a:off x="7545396" y="2867322"/>
-            <a:ext cx="4260523" cy="683235"/>
-          </a:xfrm>
-          <a:prstGeom prst="rect">
-            <a:avLst/>
-          </a:prstGeom>
-          <a:noFill/>
-          <a:ln/>
-        </p:spPr>
-        <p:txBody>
-          <a:bodyPr wrap="square" lIns="0" tIns="0" rIns="0" bIns="0" rtlCol="0" anchor="t">
-            <a:normAutofit/>
-          </a:bodyPr>
-          <a:lstStyle/>
-          <a:p>
-            <a:pPr marL="0" indent="0" algn="l">
-              <a:lnSpc>
-                <a:spcPct val="119000"/>
-              </a:lnSpc>
-              <a:buNone/>
-            </a:pPr>
-            <a:r>
-              <a:rPr lang="en-US" sz="1000" dirty="0">
-                <a:solidFill>
-                  <a:srgbClr val="333F70"/>
-                </a:solidFill>
-                <a:latin typeface="Open Sans" pitchFamily="34" charset="0"/>
-                <a:ea typeface="Open Sans" pitchFamily="34" charset="-122"/>
-                <a:cs typeface="Open Sans" pitchFamily="34" charset="-120"/>
-              </a:rPr>
-              <a:t>OVF flag correctly identifies positive-overflow (two positive operands producing negative result) and negative-overflow cases.</a:t>
-            </a:r>
-            <a:endParaRPr lang="en-US" sz="1000" dirty="0"/>
-          </a:p>
-        </p:txBody>
-      </p:sp>
-      <p:pic>
-        <p:nvPicPr>
-          <p:cNvPr id="15" name="Image 2" descr="preencoded.png"/>
-          <p:cNvPicPr>
-            <a:picLocks noChangeAspect="1"/>
-          </p:cNvPicPr>
-          <p:nvPr/>
-        </p:nvPicPr>
-        <p:blipFill>
-          <a:blip>
+          <a:blip r:embed="rId3">
             <a:extLst>
               <a:ext uri="{96DAC541-7B7A-43D3-8B79-37D633B846F1}">
                 <asvg:svgBlip xmlns:asvg="http://schemas.microsoft.com/office/drawing/2016/SVG/main" r:embed="rId4"/>
@@ -18874,8 +19161,8 @@
         </p:blipFill>
         <p:spPr>
           <a:xfrm>
-            <a:off x="7359068" y="3418184"/>
-            <a:ext cx="7753683" cy="1657625"/>
+            <a:off x="7359069" y="2545457"/>
+            <a:ext cx="4177402" cy="709017"/>
           </a:xfrm>
           <a:prstGeom prst="rect">
             <a:avLst/>
@@ -18884,14 +19171,14 @@
       </p:pic>
       <p:sp>
         <p:nvSpPr>
-          <p:cNvPr id="16" name="Text 10"/>
+          <p:cNvPr id="13" name="Text 8"/>
           <p:cNvSpPr/>
           <p:nvPr/>
         </p:nvSpPr>
         <p:spPr>
           <a:xfrm>
-            <a:off x="7545396" y="3437234"/>
-            <a:ext cx="4260523" cy="374765"/>
+            <a:off x="7545397" y="2564507"/>
+            <a:ext cx="3991074" cy="201910"/>
           </a:xfrm>
           <a:prstGeom prst="rect">
             <a:avLst/>
@@ -18903,7 +19190,7 @@
           <a:bodyPr wrap="none" lIns="0" tIns="0" rIns="0" bIns="0" rtlCol="0" anchor="t"/>
           <a:lstStyle/>
           <a:p>
-            <a:pPr marL="0" indent="0" algn="l">
+            <a:pPr algn="l" indent="0" marL="0">
               <a:lnSpc>
                 <a:spcPct val="104000"/>
               </a:lnSpc>
@@ -18918,7 +19205,7 @@
                 <a:ea typeface="Unbounded Bold" pitchFamily="34" charset="-122"/>
                 <a:cs typeface="Unbounded Bold" pitchFamily="34" charset="-120"/>
               </a:rPr>
-              <a:t>Observed Limitations</a:t>
+              <a:t>Overflow Detection</a:t>
             </a:r>
             <a:endParaRPr lang="en-US" sz="1250" dirty="0"/>
           </a:p>
@@ -18926,14 +19213,14 @@
       </p:sp>
       <p:sp>
         <p:nvSpPr>
-          <p:cNvPr id="17" name="Text 11"/>
+          <p:cNvPr id="14" name="Text 9"/>
           <p:cNvSpPr/>
           <p:nvPr/>
         </p:nvSpPr>
         <p:spPr>
           <a:xfrm>
-            <a:off x="7545396" y="3740051"/>
-            <a:ext cx="4260523" cy="1024850"/>
+            <a:off x="7545397" y="2867323"/>
+            <a:ext cx="3991074" cy="368102"/>
           </a:xfrm>
           <a:prstGeom prst="rect">
             <a:avLst/>
@@ -18947,7 +19234,7 @@
           </a:bodyPr>
           <a:lstStyle/>
           <a:p>
-            <a:pPr marL="0" indent="0" algn="l">
+            <a:pPr algn="l" indent="0" marL="0">
               <a:lnSpc>
                 <a:spcPct val="119000"/>
               </a:lnSpc>
@@ -18962,29 +19249,7 @@
                 <a:ea typeface="Open Sans" pitchFamily="34" charset="-122"/>
                 <a:cs typeface="Open Sans" pitchFamily="34" charset="-120"/>
               </a:rPr>
-              <a:t>Ripple-carry propagation delay grows linearly with bit width. Overflow detection assumes strict </a:t>
-            </a:r>
-            <a:r>
-              <a:rPr lang="en-US" sz="1000" b="1" dirty="0">
-                <a:solidFill>
-                  <a:srgbClr val="333F70"/>
-                </a:solidFill>
-                <a:latin typeface="Open Sans Bold" pitchFamily="34" charset="0"/>
-                <a:ea typeface="Open Sans Bold" pitchFamily="34" charset="-122"/>
-                <a:cs typeface="Open Sans Bold" pitchFamily="34" charset="-120"/>
-              </a:rPr>
-              <a:t>two's complement interpretation</a:t>
-            </a:r>
-            <a:r>
-              <a:rPr lang="en-US" sz="1000" dirty="0">
-                <a:solidFill>
-                  <a:srgbClr val="333F70"/>
-                </a:solidFill>
-                <a:latin typeface="Open Sans" pitchFamily="34" charset="0"/>
-                <a:ea typeface="Open Sans" pitchFamily="34" charset="-122"/>
-                <a:cs typeface="Open Sans" pitchFamily="34" charset="-120"/>
-              </a:rPr>
-              <a:t> of inputs.</a:t>
+              <a:t>OVF flag correctly identifies positive-overflow (two positive operands producing negative result) and negative-overflow cases.</a:t>
             </a:r>
             <a:endParaRPr lang="en-US" sz="1000" dirty="0"/>
           </a:p>
@@ -18992,17 +19257,17 @@
       </p:sp>
       <p:pic>
         <p:nvPicPr>
-          <p:cNvPr id="18" name="Image 3" descr="preencoded.png"/>
+          <p:cNvPr id="15" name="Image 2" descr="preencoded.png">    </p:cNvPr>
           <p:cNvPicPr>
             <a:picLocks noChangeAspect="1"/>
           </p:cNvPicPr>
           <p:nvPr/>
         </p:nvPicPr>
         <p:blipFill>
-          <a:blip>
+          <a:blip r:embed="rId5">
             <a:extLst>
               <a:ext uri="{96DAC541-7B7A-43D3-8B79-37D633B846F1}">
-                <asvg:svgBlip xmlns:asvg="http://schemas.microsoft.com/office/drawing/2016/SVG/main" r:embed="rId4"/>
+                <asvg:svgBlip xmlns:asvg="http://schemas.microsoft.com/office/drawing/2016/SVG/main" r:embed="rId6"/>
               </a:ext>
             </a:extLst>
           </a:blip>
@@ -19012,8 +19277,8 @@
         </p:blipFill>
         <p:spPr>
           <a:xfrm>
-            <a:off x="7359068" y="4474963"/>
-            <a:ext cx="7753683" cy="1657625"/>
+            <a:off x="7359069" y="3418185"/>
+            <a:ext cx="4177402" cy="893068"/>
           </a:xfrm>
           <a:prstGeom prst="rect">
             <a:avLst/>
@@ -19022,14 +19287,14 @@
       </p:pic>
       <p:sp>
         <p:nvSpPr>
-          <p:cNvPr id="19" name="Text 12"/>
+          <p:cNvPr id="16" name="Text 10"/>
           <p:cNvSpPr/>
           <p:nvPr/>
         </p:nvSpPr>
         <p:spPr>
           <a:xfrm>
-            <a:off x="7545396" y="4494013"/>
-            <a:ext cx="4260523" cy="374765"/>
+            <a:off x="7545397" y="3437235"/>
+            <a:ext cx="3991074" cy="201910"/>
           </a:xfrm>
           <a:prstGeom prst="rect">
             <a:avLst/>
@@ -19041,7 +19306,7 @@
           <a:bodyPr wrap="none" lIns="0" tIns="0" rIns="0" bIns="0" rtlCol="0" anchor="t"/>
           <a:lstStyle/>
           <a:p>
-            <a:pPr marL="0" indent="0" algn="l">
+            <a:pPr algn="l" indent="0" marL="0">
               <a:lnSpc>
                 <a:spcPct val="104000"/>
               </a:lnSpc>
@@ -19056,7 +19321,7 @@
                 <a:ea typeface="Unbounded Bold" pitchFamily="34" charset="-122"/>
                 <a:cs typeface="Unbounded Bold" pitchFamily="34" charset="-120"/>
               </a:rPr>
-              <a:t>Performance Notes</a:t>
+              <a:t>Observed Limitations</a:t>
             </a:r>
             <a:endParaRPr lang="en-US" sz="1250" dirty="0"/>
           </a:p>
@@ -19064,14 +19329,14 @@
       </p:sp>
       <p:sp>
         <p:nvSpPr>
-          <p:cNvPr id="20" name="Text 13"/>
+          <p:cNvPr id="17" name="Text 11"/>
           <p:cNvSpPr/>
           <p:nvPr/>
         </p:nvSpPr>
         <p:spPr>
           <a:xfrm>
-            <a:off x="7545396" y="4796830"/>
-            <a:ext cx="4260523" cy="1024850"/>
+            <a:off x="7545397" y="3740051"/>
+            <a:ext cx="3991074" cy="552152"/>
           </a:xfrm>
           <a:prstGeom prst="rect">
             <a:avLst/>
@@ -19085,7 +19350,7 @@
           </a:bodyPr>
           <a:lstStyle/>
           <a:p>
-            <a:pPr marL="0" indent="0" algn="l">
+            <a:pPr algn="l" indent="0" marL="0">
               <a:lnSpc>
                 <a:spcPct val="119000"/>
               </a:lnSpc>
@@ -19100,7 +19365,247 @@
                 <a:ea typeface="Open Sans" pitchFamily="34" charset="-122"/>
                 <a:cs typeface="Open Sans" pitchFamily="34" charset="-120"/>
               </a:rPr>
+              <a:t>Ripple-carry propagation delay grows linearly with bit width. Overflow detection assumes strict </a:t>
+            </a:r>
+            <a:pPr algn="l" indent="0" marL="0">
+              <a:lnSpc>
+                <a:spcPct val="119000"/>
+              </a:lnSpc>
+              <a:buNone/>
+            </a:pPr>
+            <a:r>
+              <a:rPr lang="en-US" sz="1000" b="1" dirty="0">
+                <a:solidFill>
+                  <a:srgbClr val="333F70"/>
+                </a:solidFill>
+                <a:latin typeface="Open Sans Bold" pitchFamily="34" charset="0"/>
+                <a:ea typeface="Open Sans Bold" pitchFamily="34" charset="-122"/>
+                <a:cs typeface="Open Sans Bold" pitchFamily="34" charset="-120"/>
+              </a:rPr>
+              <a:t>two's complement interpretation</a:t>
+            </a:r>
+            <a:pPr algn="l" indent="0" marL="0">
+              <a:lnSpc>
+                <a:spcPct val="119000"/>
+              </a:lnSpc>
+              <a:buNone/>
+            </a:pPr>
+            <a:r>
+              <a:rPr lang="en-US" sz="1000" dirty="0">
+                <a:solidFill>
+                  <a:srgbClr val="333F70"/>
+                </a:solidFill>
+                <a:latin typeface="Open Sans" pitchFamily="34" charset="0"/>
+                <a:ea typeface="Open Sans" pitchFamily="34" charset="-122"/>
+                <a:cs typeface="Open Sans" pitchFamily="34" charset="-120"/>
+              </a:rPr>
+              <a:t> of inputs.</a:t>
+            </a:r>
+            <a:endParaRPr lang="en-US" sz="1000" dirty="0"/>
+          </a:p>
+        </p:txBody>
+      </p:sp>
+      <p:pic>
+        <p:nvPicPr>
+          <p:cNvPr id="18" name="Image 3" descr="preencoded.png">    </p:cNvPr>
+          <p:cNvPicPr>
+            <a:picLocks noChangeAspect="1"/>
+          </p:cNvPicPr>
+          <p:nvPr/>
+        </p:nvPicPr>
+        <p:blipFill>
+          <a:blip r:embed="rId7">
+            <a:extLst>
+              <a:ext uri="{96DAC541-7B7A-43D3-8B79-37D633B846F1}">
+                <asvg:svgBlip xmlns:asvg="http://schemas.microsoft.com/office/drawing/2016/SVG/main" r:embed="rId8"/>
+              </a:ext>
+            </a:extLst>
+          </a:blip>
+          <a:stretch>
+            <a:fillRect/>
+          </a:stretch>
+        </p:blipFill>
+        <p:spPr>
+          <a:xfrm>
+            <a:off x="7359069" y="4474964"/>
+            <a:ext cx="4177402" cy="893068"/>
+          </a:xfrm>
+          <a:prstGeom prst="rect">
+            <a:avLst/>
+          </a:prstGeom>
+        </p:spPr>
+      </p:pic>
+      <p:sp>
+        <p:nvSpPr>
+          <p:cNvPr id="19" name="Text 12"/>
+          <p:cNvSpPr/>
+          <p:nvPr/>
+        </p:nvSpPr>
+        <p:spPr>
+          <a:xfrm>
+            <a:off x="7545397" y="4494014"/>
+            <a:ext cx="3991074" cy="201910"/>
+          </a:xfrm>
+          <a:prstGeom prst="rect">
+            <a:avLst/>
+          </a:prstGeom>
+          <a:noFill/>
+          <a:ln/>
+        </p:spPr>
+        <p:txBody>
+          <a:bodyPr wrap="none" lIns="0" tIns="0" rIns="0" bIns="0" rtlCol="0" anchor="t"/>
+          <a:lstStyle/>
+          <a:p>
+            <a:pPr algn="l" indent="0" marL="0">
+              <a:lnSpc>
+                <a:spcPct val="104000"/>
+              </a:lnSpc>
+              <a:buNone/>
+            </a:pPr>
+            <a:r>
+              <a:rPr lang="en-US" sz="1250" b="1" dirty="0">
+                <a:solidFill>
+                  <a:srgbClr val="333F70"/>
+                </a:solidFill>
+                <a:latin typeface="Unbounded Bold" pitchFamily="34" charset="0"/>
+                <a:ea typeface="Unbounded Bold" pitchFamily="34" charset="-122"/>
+                <a:cs typeface="Unbounded Bold" pitchFamily="34" charset="-120"/>
+              </a:rPr>
+              <a:t>Performance Notes</a:t>
+            </a:r>
+            <a:endParaRPr lang="en-US" sz="1250" dirty="0"/>
+          </a:p>
+        </p:txBody>
+      </p:sp>
+      <p:sp>
+        <p:nvSpPr>
+          <p:cNvPr id="20" name="Text 13"/>
+          <p:cNvSpPr/>
+          <p:nvPr/>
+        </p:nvSpPr>
+        <p:spPr>
+          <a:xfrm>
+            <a:off x="7545397" y="4796830"/>
+            <a:ext cx="3991074" cy="552152"/>
+          </a:xfrm>
+          <a:prstGeom prst="rect">
+            <a:avLst/>
+          </a:prstGeom>
+          <a:noFill/>
+          <a:ln/>
+        </p:spPr>
+        <p:txBody>
+          <a:bodyPr wrap="square" lIns="0" tIns="0" rIns="0" bIns="0" rtlCol="0" anchor="t">
+            <a:normAutofit/>
+          </a:bodyPr>
+          <a:lstStyle/>
+          <a:p>
+            <a:pPr algn="l" indent="0" marL="0">
+              <a:lnSpc>
+                <a:spcPct val="119000"/>
+              </a:lnSpc>
+              <a:buNone/>
+            </a:pPr>
+            <a:r>
+              <a:rPr lang="en-US" sz="1000" dirty="0">
+                <a:solidFill>
+                  <a:srgbClr val="333F70"/>
+                </a:solidFill>
+                <a:latin typeface="Open Sans" pitchFamily="34" charset="0"/>
+                <a:ea typeface="Open Sans" pitchFamily="34" charset="-122"/>
+                <a:cs typeface="Open Sans" pitchFamily="34" charset="-120"/>
+              </a:rPr>
               <a:t>Gate count and propagation delay are appropriate for educational demonstration. Circuit is not optimized for production speed or area.</a:t>
+            </a:r>
+            <a:endParaRPr lang="en-US" sz="1000" dirty="0"/>
+          </a:p>
+        </p:txBody>
+      </p:sp>
+      <p:sp>
+        <p:nvSpPr>
+          <p:cNvPr id="21" name="Shape 14"/>
+          <p:cNvSpPr/>
+          <p:nvPr/>
+        </p:nvSpPr>
+        <p:spPr>
+          <a:xfrm>
+            <a:off x="7378119" y="5462488"/>
+            <a:ext cx="4158352" cy="798215"/>
+          </a:xfrm>
+          <a:prstGeom prst="roundRect">
+            <a:avLst>
+              <a:gd name="adj" fmla="val 6799"/>
+            </a:avLst>
+          </a:prstGeom>
+          <a:solidFill>
+            <a:srgbClr val="D6F5EE"/>
+          </a:solidFill>
+          <a:ln/>
+        </p:spPr>
+      </p:sp>
+      <p:pic>
+        <p:nvPicPr>
+          <p:cNvPr id="22" name="Image 4" descr="preencoded.png">    </p:cNvPr>
+          <p:cNvPicPr>
+            <a:picLocks noChangeAspect="1"/>
+          </p:cNvPicPr>
+          <p:nvPr/>
+        </p:nvPicPr>
+        <p:blipFill>
+          <a:blip r:embed="rId9"/>
+          <a:stretch>
+            <a:fillRect/>
+          </a:stretch>
+        </p:blipFill>
+        <p:spPr>
+          <a:xfrm>
+            <a:off x="7507298" y="5622230"/>
+            <a:ext cx="161425" cy="129183"/>
+          </a:xfrm>
+          <a:prstGeom prst="rect">
+            <a:avLst/>
+          </a:prstGeom>
+        </p:spPr>
+      </p:pic>
+      <p:sp>
+        <p:nvSpPr>
+          <p:cNvPr id="23" name="Text 15"/>
+          <p:cNvSpPr/>
+          <p:nvPr/>
+        </p:nvSpPr>
+        <p:spPr>
+          <a:xfrm>
+            <a:off x="7797903" y="5585520"/>
+            <a:ext cx="3609389" cy="552152"/>
+          </a:xfrm>
+          <a:prstGeom prst="rect">
+            <a:avLst/>
+          </a:prstGeom>
+          <a:noFill/>
+          <a:ln/>
+        </p:spPr>
+        <p:txBody>
+          <a:bodyPr wrap="square" lIns="0" tIns="0" rIns="0" bIns="0" rtlCol="0" anchor="t">
+            <a:normAutofit/>
+          </a:bodyPr>
+          <a:lstStyle/>
+          <a:p>
+            <a:pPr algn="l" indent="0" marL="0">
+              <a:lnSpc>
+                <a:spcPct val="119000"/>
+              </a:lnSpc>
+              <a:buNone/>
+            </a:pPr>
+            <a:r>
+              <a:rPr lang="en-US" sz="1000" dirty="0">
+                <a:solidFill>
+                  <a:srgbClr val="000000"/>
+                </a:solidFill>
+                <a:latin typeface="Open Sans" pitchFamily="34" charset="0"/>
+                <a:ea typeface="Open Sans" pitchFamily="34" charset="-122"/>
+                <a:cs typeface="Open Sans" pitchFamily="34" charset="-120"/>
+              </a:rPr>
+              <a:t>Simulation screenshots from Logisim / Digital — showing gate connections and active signal states — should be inserted here as evidence of correctness.</a:t>
             </a:r>
             <a:endParaRPr lang="en-US" sz="1000" dirty="0"/>
           </a:p>
@@ -19407,319 +19912,4 @@
     </a:ext>
   </a:extLst>
 </a:theme>
-</file>
-
-<file path=ppt/theme/theme2.xml><?xml version="1.0" encoding="utf-8"?>
-<a:theme xmlns:a="http://schemas.openxmlformats.org/drawingml/2006/main" name="Office Theme">
-  <a:themeElements>
-    <a:clrScheme name="Office">
-      <a:dk1>
-        <a:sysClr val="windowText" lastClr="000000"/>
-      </a:dk1>
-      <a:lt1>
-        <a:sysClr val="window" lastClr="FFFFFF"/>
-      </a:lt1>
-      <a:dk2>
-        <a:srgbClr val="0E2841"/>
-      </a:dk2>
-      <a:lt2>
-        <a:srgbClr val="E8E8E8"/>
-      </a:lt2>
-      <a:accent1>
-        <a:srgbClr val="156082"/>
-      </a:accent1>
-      <a:accent2>
-        <a:srgbClr val="E97132"/>
-      </a:accent2>
-      <a:accent3>
-        <a:srgbClr val="196B24"/>
-      </a:accent3>
-      <a:accent4>
-        <a:srgbClr val="0F9ED5"/>
-      </a:accent4>
-      <a:accent5>
-        <a:srgbClr val="A02B93"/>
-      </a:accent5>
-      <a:accent6>
-        <a:srgbClr val="4EA72E"/>
-      </a:accent6>
-      <a:hlink>
-        <a:srgbClr val="467886"/>
-      </a:hlink>
-      <a:folHlink>
-        <a:srgbClr val="96607D"/>
-      </a:folHlink>
-    </a:clrScheme>
-    <a:fontScheme name="Office">
-      <a:majorFont>
-        <a:latin typeface="Aptos Display" panose="02110004020202020204"/>
-        <a:ea typeface=""/>
-        <a:cs typeface=""/>
-        <a:font script="Jpan" typeface="游ゴシック Light"/>
-        <a:font script="Hang" typeface="맑은 고딕"/>
-        <a:font script="Hans" typeface="等线 Light"/>
-        <a:font script="Hant" typeface="新細明體"/>
-        <a:font script="Arab" typeface="Times New Roman"/>
-        <a:font script="Hebr" typeface="Times New Roman"/>
-        <a:font script="Thai" typeface="Angsana New"/>
-        <a:font script="Ethi" typeface="Nyala"/>
-        <a:font script="Beng" typeface="Vrinda"/>
-        <a:font script="Gujr" typeface="Shruti"/>
-        <a:font script="Khmr" typeface="MoolBoran"/>
-        <a:font script="Knda" typeface="Tunga"/>
-        <a:font script="Guru" typeface="Raavi"/>
-        <a:font script="Cans" typeface="Euphemia"/>
-        <a:font script="Cher" typeface="Plantagenet Cherokee"/>
-        <a:font script="Yiii" typeface="Microsoft Yi Baiti"/>
-        <a:font script="Tibt" typeface="Microsoft Himalaya"/>
-        <a:font script="Thaa" typeface="MV Boli"/>
-        <a:font script="Deva" typeface="Mangal"/>
-        <a:font script="Telu" typeface="Gautami"/>
-        <a:font script="Taml" typeface="Latha"/>
-        <a:font script="Syrc" typeface="Estrangelo Edessa"/>
-        <a:font script="Orya" typeface="Kalinga"/>
-        <a:font script="Mlym" typeface="Kartika"/>
-        <a:font script="Laoo" typeface="DokChampa"/>
-        <a:font script="Sinh" typeface="Iskoola Pota"/>
-        <a:font script="Mong" typeface="Mongolian Baiti"/>
-        <a:font script="Viet" typeface="Times New Roman"/>
-        <a:font script="Uigh" typeface="Microsoft Uighur"/>
-        <a:font script="Geor" typeface="Sylfaen"/>
-        <a:font script="Armn" typeface="Arial"/>
-        <a:font script="Bugi" typeface="Leelawadee UI"/>
-        <a:font script="Bopo" typeface="Microsoft JhengHei"/>
-        <a:font script="Java" typeface="Javanese Text"/>
-        <a:font script="Lisu" typeface="Segoe UI"/>
-        <a:font script="Mymr" typeface="Myanmar Text"/>
-        <a:font script="Nkoo" typeface="Ebrima"/>
-        <a:font script="Olck" typeface="Nirmala UI"/>
-        <a:font script="Osma" typeface="Ebrima"/>
-        <a:font script="Phag" typeface="Phagspa"/>
-        <a:font script="Syrn" typeface="Estrangelo Edessa"/>
-        <a:font script="Syrj" typeface="Estrangelo Edessa"/>
-        <a:font script="Syre" typeface="Estrangelo Edessa"/>
-        <a:font script="Sora" typeface="Nirmala UI"/>
-        <a:font script="Tale" typeface="Microsoft Tai Le"/>
-        <a:font script="Talu" typeface="Microsoft New Tai Lue"/>
-        <a:font script="Tfng" typeface="Ebrima"/>
-      </a:majorFont>
-      <a:minorFont>
-        <a:latin typeface="Aptos" panose="02110004020202020204"/>
-        <a:ea typeface=""/>
-        <a:cs typeface=""/>
-        <a:font script="Jpan" typeface="游ゴシック"/>
-        <a:font script="Hang" typeface="맑은 고딕"/>
-        <a:font script="Hans" typeface="等线"/>
-        <a:font script="Hant" typeface="新細明體"/>
-        <a:font script="Arab" typeface="Arial"/>
-        <a:font script="Hebr" typeface="Arial"/>
-        <a:font script="Thai" typeface="Cordia New"/>
-        <a:font script="Ethi" typeface="Nyala"/>
-        <a:font script="Beng" typeface="Vrinda"/>
-        <a:font script="Gujr" typeface="Shruti"/>
-        <a:font script="Khmr" typeface="DaunPenh"/>
-        <a:font script="Knda" typeface="Tunga"/>
-        <a:font script="Guru" typeface="Raavi"/>
-        <a:font script="Cans" typeface="Euphemia"/>
-        <a:font script="Cher" typeface="Plantagenet Cherokee"/>
-        <a:font script="Yiii" typeface="Microsoft Yi Baiti"/>
-        <a:font script="Tibt" typeface="Microsoft Himalaya"/>
-        <a:font script="Thaa" typeface="MV Boli"/>
-        <a:font script="Deva" typeface="Mangal"/>
-        <a:font script="Telu" typeface="Gautami"/>
-        <a:font script="Taml" typeface="Latha"/>
-        <a:font script="Syrc" typeface="Estrangelo Edessa"/>
-        <a:font script="Orya" typeface="Kalinga"/>
-        <a:font script="Mlym" typeface="Kartika"/>
-        <a:font script="Laoo" typeface="DokChampa"/>
-        <a:font script="Sinh" typeface="Iskoola Pota"/>
-        <a:font script="Mong" typeface="Mongolian Baiti"/>
-        <a:font script="Viet" typeface="Arial"/>
-        <a:font script="Uigh" typeface="Microsoft Uighur"/>
-        <a:font script="Geor" typeface="Sylfaen"/>
-        <a:font script="Armn" typeface="Arial"/>
-        <a:font script="Bugi" typeface="Leelawadee UI"/>
-        <a:font script="Bopo" typeface="Microsoft JhengHei"/>
-        <a:font script="Java" typeface="Javanese Text"/>
-        <a:font script="Lisu" typeface="Segoe UI"/>
-        <a:font script="Mymr" typeface="Myanmar Text"/>
-        <a:font script="Nkoo" typeface="Ebrima"/>
-        <a:font script="Olck" typeface="Nirmala UI"/>
-        <a:font script="Osma" typeface="Ebrima"/>
-        <a:font script="Phag" typeface="Phagspa"/>
-        <a:font script="Syrn" typeface="Estrangelo Edessa"/>
-        <a:font script="Syrj" typeface="Estrangelo Edessa"/>
-        <a:font script="Syre" typeface="Estrangelo Edessa"/>
-        <a:font script="Sora" typeface="Nirmala UI"/>
-        <a:font script="Tale" typeface="Microsoft Tai Le"/>
-        <a:font script="Talu" typeface="Microsoft New Tai Lue"/>
-        <a:font script="Tfng" typeface="Ebrima"/>
-      </a:minorFont>
-    </a:fontScheme>
-    <a:fmtScheme name="Office">
-      <a:fillStyleLst>
-        <a:solidFill>
-          <a:schemeClr val="phClr"/>
-        </a:solidFill>
-        <a:gradFill rotWithShape="1">
-          <a:gsLst>
-            <a:gs pos="0">
-              <a:schemeClr val="phClr">
-                <a:lumMod val="110000"/>
-                <a:satMod val="105000"/>
-                <a:tint val="67000"/>
-              </a:schemeClr>
-            </a:gs>
-            <a:gs pos="50000">
-              <a:schemeClr val="phClr">
-                <a:lumMod val="105000"/>
-                <a:satMod val="103000"/>
-                <a:tint val="73000"/>
-              </a:schemeClr>
-            </a:gs>
-            <a:gs pos="100000">
-              <a:schemeClr val="phClr">
-                <a:lumMod val="105000"/>
-                <a:satMod val="109000"/>
-                <a:tint val="81000"/>
-              </a:schemeClr>
-            </a:gs>
-          </a:gsLst>
-          <a:lin ang="5400000" scaled="0"/>
-        </a:gradFill>
-        <a:gradFill rotWithShape="1">
-          <a:gsLst>
-            <a:gs pos="0">
-              <a:schemeClr val="phClr">
-                <a:satMod val="103000"/>
-                <a:lumMod val="102000"/>
-                <a:tint val="94000"/>
-              </a:schemeClr>
-            </a:gs>
-            <a:gs pos="50000">
-              <a:schemeClr val="phClr">
-                <a:satMod val="110000"/>
-                <a:lumMod val="100000"/>
-                <a:shade val="100000"/>
-              </a:schemeClr>
-            </a:gs>
-            <a:gs pos="100000">
-              <a:schemeClr val="phClr">
-                <a:lumMod val="99000"/>
-                <a:satMod val="120000"/>
-                <a:shade val="78000"/>
-              </a:schemeClr>
-            </a:gs>
-          </a:gsLst>
-          <a:lin ang="5400000" scaled="0"/>
-        </a:gradFill>
-      </a:fillStyleLst>
-      <a:lnStyleLst>
-        <a:ln w="12700" cap="flat" cmpd="sng" algn="ctr">
-          <a:solidFill>
-            <a:schemeClr val="phClr"/>
-          </a:solidFill>
-          <a:prstDash val="solid"/>
-          <a:miter lim="800000"/>
-        </a:ln>
-        <a:ln w="19050" cap="flat" cmpd="sng" algn="ctr">
-          <a:solidFill>
-            <a:schemeClr val="phClr"/>
-          </a:solidFill>
-          <a:prstDash val="solid"/>
-          <a:miter lim="800000"/>
-        </a:ln>
-        <a:ln w="25400" cap="flat" cmpd="sng" algn="ctr">
-          <a:solidFill>
-            <a:schemeClr val="phClr"/>
-          </a:solidFill>
-          <a:prstDash val="solid"/>
-          <a:miter lim="800000"/>
-        </a:ln>
-      </a:lnStyleLst>
-      <a:effectStyleLst>
-        <a:effectStyle>
-          <a:effectLst/>
-        </a:effectStyle>
-        <a:effectStyle>
-          <a:effectLst/>
-        </a:effectStyle>
-        <a:effectStyle>
-          <a:effectLst>
-            <a:outerShdw blurRad="57150" dist="19050" dir="5400000" algn="ctr" rotWithShape="0">
-              <a:srgbClr val="000000">
-                <a:alpha val="63000"/>
-              </a:srgbClr>
-            </a:outerShdw>
-          </a:effectLst>
-        </a:effectStyle>
-      </a:effectStyleLst>
-      <a:bgFillStyleLst>
-        <a:solidFill>
-          <a:schemeClr val="phClr"/>
-        </a:solidFill>
-        <a:solidFill>
-          <a:schemeClr val="phClr">
-            <a:tint val="95000"/>
-            <a:satMod val="170000"/>
-          </a:schemeClr>
-        </a:solidFill>
-        <a:gradFill rotWithShape="1">
-          <a:gsLst>
-            <a:gs pos="0">
-              <a:schemeClr val="phClr">
-                <a:tint val="93000"/>
-                <a:satMod val="150000"/>
-                <a:shade val="98000"/>
-                <a:lumMod val="102000"/>
-              </a:schemeClr>
-            </a:gs>
-            <a:gs pos="50000">
-              <a:schemeClr val="phClr">
-                <a:tint val="98000"/>
-                <a:satMod val="130000"/>
-                <a:shade val="90000"/>
-                <a:lumMod val="103000"/>
-              </a:schemeClr>
-            </a:gs>
-            <a:gs pos="100000">
-              <a:schemeClr val="phClr">
-                <a:shade val="63000"/>
-                <a:satMod val="120000"/>
-              </a:schemeClr>
-            </a:gs>
-          </a:gsLst>
-          <a:lin ang="5400000" scaled="0"/>
-        </a:gradFill>
-      </a:bgFillStyleLst>
-    </a:fmtScheme>
-  </a:themeElements>
-  <a:objectDefaults>
-    <a:lnDef>
-      <a:spPr/>
-      <a:bodyPr/>
-      <a:lstStyle/>
-      <a:style>
-        <a:lnRef idx="2">
-          <a:schemeClr val="accent1"/>
-        </a:lnRef>
-        <a:fillRef idx="0">
-          <a:schemeClr val="accent1"/>
-        </a:fillRef>
-        <a:effectRef idx="1">
-          <a:schemeClr val="accent1"/>
-        </a:effectRef>
-        <a:fontRef idx="minor">
-          <a:schemeClr val="tx1"/>
-        </a:fontRef>
-      </a:style>
-    </a:lnDef>
-  </a:objectDefaults>
-  <a:extraClrSchemeLst/>
-  <a:extLst>
-    <a:ext uri="{05A4C25C-085E-4340-85A3-A5531E510DB2}">
-      <thm15:themeFamily xmlns:thm15="http://schemas.microsoft.com/office/thememl/2012/main" name="Office Theme" id="{2E142A2C-CD16-42D6-873A-C26D2A0506FA}" vid="{1BDDFF52-6CD6-40A5-AB3C-68EB2F1E4D0A}"/>
-    </a:ext>
-  </a:extLst>
-</a:theme>
 </file>
--- a/DDCA PPT.pptx
+++ b/DDCA PPT.pptx
@@ -6629,7 +6629,7 @@
         <p:spPr>
           <a:xfrm>
             <a:off x="661475" y="1974255"/>
-            <a:ext cx="5821812" cy="1057176"/>
+            <a:ext cx="5821812" cy="845741"/>
           </a:xfrm>
           <a:prstGeom prst="rect">
             <a:avLst/>
@@ -6692,7 +6692,7 @@
                 <a:ea typeface="Open Sans" pitchFamily="34" charset="-122"/>
                 <a:cs typeface="Open Sans" pitchFamily="34" charset="-120"/>
               </a:rPr>
-              <a:t> is the canonical gate-level design, where carry propagates sequentially through each bit stage. It is conceptually simple and uses minimal logic, making it the standard choice for educational implementations. The trade-off is propagation delay that grows linearly with bit width — a significant limitation for wide datapaths.</a:t>
+              <a:t> is the canonical gate-level design, where carry propagates sequentially through each bit stage. It is conceptually simple and uses minimal logic, making it the standard choice for educational implementations. The carry from one bit moves to the next bit.</a:t>
             </a:r>
             <a:endParaRPr lang="en-US" sz="1100" dirty="0"/>
           </a:p>
@@ -6706,7 +6706,7 @@
         </p:nvSpPr>
         <p:spPr>
           <a:xfrm>
-            <a:off x="661475" y="3153569"/>
+            <a:off x="661475" y="2942134"/>
             <a:ext cx="5821812" cy="222052"/>
           </a:xfrm>
           <a:prstGeom prst="rect">
@@ -6748,7 +6748,7 @@
         </p:nvSpPr>
         <p:spPr>
           <a:xfrm>
-            <a:off x="661475" y="3497759"/>
+            <a:off x="661475" y="3286323"/>
             <a:ext cx="5821812" cy="845741"/>
           </a:xfrm>
           <a:prstGeom prst="rect">
@@ -6795,7 +6795,7 @@
                 <a:ea typeface="Open Sans" pitchFamily="34" charset="-122"/>
                 <a:cs typeface="Open Sans" pitchFamily="34" charset="-120"/>
               </a:rPr>
-              <a:t> overcome RCA latency by computing carry signals in parallel using generate and propagate signals. This reduces critical path delay to O(log n) at the cost of substantially greater gate complexity — typically impractical for manual gate-level edu</a:t>
+              <a:t> overcome RCA latency by computing carry signals in parallel using generate and propagate signals. This reduces critical path delay to O(log n) at the cost of substantially greater gate complexity — typically impractical for manual gate-level educational design.</a:t>
             </a:r>
             <a:endParaRPr lang="en-US" sz="1100" dirty="0"/>
           </a:p>
@@ -6809,7 +6809,7 @@
         </p:nvSpPr>
         <p:spPr>
           <a:xfrm>
-            <a:off x="661475" y="4465638"/>
+            <a:off x="661475" y="4254202"/>
             <a:ext cx="5821812" cy="222052"/>
           </a:xfrm>
           <a:prstGeom prst="rect">
@@ -6851,8 +6851,8 @@
         </p:nvSpPr>
         <p:spPr>
           <a:xfrm>
-            <a:off x="661475" y="4809827"/>
-            <a:ext cx="5821812" cy="845741"/>
+            <a:off x="661475" y="4598392"/>
+            <a:ext cx="5821812" cy="955576"/>
           </a:xfrm>
           <a:prstGeom prst="rect">
             <a:avLst/>
@@ -6870,6 +6870,9 @@
               <a:lnSpc>
                 <a:spcPct val="124000"/>
               </a:lnSpc>
+              <a:spcAft>
+                <a:spcPts val="850"/>
+              </a:spcAft>
               <a:buNone/>
             </a:pPr>
             <a:r>
@@ -6881,7 +6884,7 @@
                 <a:ea typeface="Open Sans" pitchFamily="34" charset="-122"/>
                 <a:cs typeface="Open Sans" pitchFamily="34" charset="-120"/>
               </a:rPr>
-              <a:t>Modern processor ALUs combine optimized adder structures with multiplexers to support multiple operations: ADD, SUB, AND, OR, XOR, and shift. Real ALU designs abstract the adder as a sub-component and layer control logic on top, exactly the hierarchy this project simulates at the 4-bit educational scale.</a:t>
+              <a:t>Modern processor ALUs combine optimized adder structures with multiplexers to support multiple operations: ADD, SUB, AND, OR, XOR, and shift. They use adders, multiplexers, and control logic together. Different logical gates are also used</a:t>
             </a:r>
             <a:endParaRPr lang="en-US" sz="1100" dirty="0"/>
           </a:p>
